--- a/reports/apresentacao_case_boticario.pptx
+++ b/reports/apresentacao_case_boticario.pptx
@@ -4,6 +4,9 @@
   <p:sldMasterIdLst>
     <p:sldMasterId id="2147483648" r:id="rId1"/>
   </p:sldMasterIdLst>
+  <p:notesMasterIdLst>
+    <p:notesMasterId r:id="rId31"/>
+  </p:notesMasterIdLst>
   <p:sldIdLst>
     <p:sldId id="256" r:id="rId2"/>
     <p:sldId id="257" r:id="rId3"/>
@@ -35,9 +38,6 @@
     <p:sldId id="283" r:id="rId29"/>
     <p:sldId id="284" r:id="rId30"/>
   </p:sldIdLst>
-  <p:notesMasterIdLst>
-    <p:notesMasterId r:id="rId31"/>
-  </p:notesMasterIdLst>
   <p:sldSz cx="12192000" cy="6858000"/>
   <p:notesSz cx="6858000" cy="12192000"/>
   <p:defaultTextStyle>
@@ -135,20 +135,20 @@
   <p:extLst>
     <p:ext uri="{521415D9-36F7-43E2-AB2F-B90AF26B5E84}">
       <p14:sectionLst xmlns:p14="http://schemas.microsoft.com/office/powerpoint/2010/main">
-        <p14:section name="Abertura" id="{05a898bf-cafc-f221-a35e-9e77ac7d3855}">
+        <p14:section name="Abertura" id="{05A898BF-CAFC-F221-A35E-9E77AC7D3855}">
           <p14:sldIdLst>
             <p14:sldId id="256"/>
             <p14:sldId id="257"/>
             <p14:sldId id="258"/>
           </p14:sldIdLst>
         </p14:section>
-        <p14:section name="A base" id="{c25a9914-0d1c-a236-4b05-eda4fee1895c}">
+        <p14:section name="A base" id="{C25A9914-0D1C-A236-4B05-EDA4FEE1895C}">
           <p14:sldIdLst>
             <p14:sldId id="259"/>
             <p14:sldId id="260"/>
           </p14:sldIdLst>
         </p14:section>
-        <p14:section name="Insights" id="{13a520be-31df-fb12-cc49-eb3d05307fcf}">
+        <p14:section name="Insights" id="{13A520BE-31DF-FB12-CC49-EB3D05307FCF}">
           <p14:sldIdLst>
             <p14:sldId id="261"/>
             <p14:sldId id="262"/>
@@ -161,7 +161,7 @@
             <p14:sldId id="269"/>
           </p14:sldIdLst>
         </p14:section>
-        <p14:section name="Forecast" id="{fb59f457-0cbd-0ace-309e-4ab4ab4a0a25}">
+        <p14:section name="Forecast" id="{FB59F457-0CBD-0ACE-309E-4AB4AB4A0A25}">
           <p14:sldIdLst>
             <p14:sldId id="270"/>
             <p14:sldId id="271"/>
@@ -174,7 +174,7 @@
             <p14:sldId id="278"/>
           </p14:sldIdLst>
         </p14:section>
-        <p14:section name="IA para banners" id="{0d531f99-3b99-574f-a897-36e6f79455cb}">
+        <p14:section name="IA para banners" id="{0D531F99-3B99-574F-A897-36E6F79455CB}">
           <p14:sldIdLst>
             <p14:sldId id="279"/>
             <p14:sldId id="280"/>
@@ -183,7 +183,7 @@
             <p14:sldId id="283"/>
           </p14:sldIdLst>
         </p14:section>
-        <p14:section name="Fechamento" id="{0e30da41-1383-3b20-d925-a0d0a5359d6b}">
+        <p14:section name="Fechamento" id="{0E30DA41-1383-3B20-D925-A0D0A5359D6B}">
           <p14:sldIdLst>
             <p14:sldId id="284"/>
           </p14:sldIdLst>
@@ -198,9 +198,11 @@
 </file>
 
 <file path=ppt/charts/chart1.xml><?xml version="1.0" encoding="utf-8"?>
-<c:chartSpace xmlns:c="http://schemas.openxmlformats.org/drawingml/2006/chart" xmlns:a="http://schemas.openxmlformats.org/drawingml/2006/main" xmlns:r="http://schemas.openxmlformats.org/officeDocument/2006/relationships">
+<c:chartSpace xmlns:c="http://schemas.openxmlformats.org/drawingml/2006/chart" xmlns:a="http://schemas.openxmlformats.org/drawingml/2006/main" xmlns:r="http://schemas.openxmlformats.org/officeDocument/2006/relationships" xmlns:c16r2="http://schemas.microsoft.com/office/drawing/2015/06/chart">
   <c:date1904 val="0"/>
+  <c:lang val="pt-BR"/>
   <c:roundedCorners val="1"/>
+  <c:style val="2"/>
   <c:chart>
     <c:autoTitleDeleted val="1"/>
     <c:plotArea>
@@ -230,73 +232,45 @@
             <a:effectLst/>
           </c:spPr>
           <c:invertIfNegative val="0"/>
-          <c:dLbls>
-            <c:numFmt formatCode="0.00" sourceLinked="0"/>
-            <c:txPr>
-              <a:bodyPr/>
-              <a:lstStyle/>
-              <a:p>
-                <a:pPr>
-                  <a:defRPr b="0" i="0" strike="noStrike" sz="1400" u="none">
-                    <a:solidFill>
-                      <a:srgbClr val="1F2622"/>
-                    </a:solidFill>
-                    <a:latin typeface="+mn-lt"/>
-                  </a:defRPr>
-                </a:pPr>
-              </a:p>
-            </c:txPr>
-            <c:showLegendKey val="0"/>
-            <c:showVal val="1"/>
-            <c:showCatName val="0"/>
-            <c:showSerName val="0"/>
-            <c:showPercent val="0"/>
-            <c:showBubbleSize val="0"/>
-            <c:showLeaderLines val="0"/>
-          </c:dLbls>
           <c:dPt>
             <c:idx val="0"/>
             <c:invertIfNegative val="0"/>
             <c:bubble3D val="0"/>
-            <c:spPr>
-              <a:solidFill>
-                <a:srgbClr val="0B5A43"/>
-              </a:solidFill>
-              <a:effectLst/>
-            </c:spPr>
+            <c:extLst>
+              <c:ext xmlns:c16="http://schemas.microsoft.com/office/drawing/2014/chart" uri="{C3380CC4-5D6E-409C-BE32-E72D297353CC}">
+                <c16:uniqueId val="{00000001-1971-45D4-A9E7-F71A0199ABF7}"/>
+              </c:ext>
+            </c:extLst>
           </c:dPt>
           <c:dPt>
             <c:idx val="1"/>
             <c:invertIfNegative val="0"/>
             <c:bubble3D val="0"/>
-            <c:spPr>
-              <a:solidFill>
-                <a:srgbClr val="0B5A43"/>
-              </a:solidFill>
-              <a:effectLst/>
-            </c:spPr>
+            <c:extLst>
+              <c:ext xmlns:c16="http://schemas.microsoft.com/office/drawing/2014/chart" uri="{C3380CC4-5D6E-409C-BE32-E72D297353CC}">
+                <c16:uniqueId val="{00000003-1971-45D4-A9E7-F71A0199ABF7}"/>
+              </c:ext>
+            </c:extLst>
           </c:dPt>
           <c:dPt>
             <c:idx val="2"/>
             <c:invertIfNegative val="0"/>
             <c:bubble3D val="0"/>
-            <c:spPr>
-              <a:solidFill>
-                <a:srgbClr val="0B5A43"/>
-              </a:solidFill>
-              <a:effectLst/>
-            </c:spPr>
+            <c:extLst>
+              <c:ext xmlns:c16="http://schemas.microsoft.com/office/drawing/2014/chart" uri="{C3380CC4-5D6E-409C-BE32-E72D297353CC}">
+                <c16:uniqueId val="{00000005-1971-45D4-A9E7-F71A0199ABF7}"/>
+              </c:ext>
+            </c:extLst>
           </c:dPt>
           <c:dPt>
             <c:idx val="3"/>
             <c:invertIfNegative val="0"/>
             <c:bubble3D val="0"/>
-            <c:spPr>
-              <a:solidFill>
-                <a:srgbClr val="0B5A43"/>
-              </a:solidFill>
-              <a:effectLst/>
-            </c:spPr>
+            <c:extLst>
+              <c:ext xmlns:c16="http://schemas.microsoft.com/office/drawing/2014/chart" uri="{C3380CC4-5D6E-409C-BE32-E72D297353CC}">
+                <c16:uniqueId val="{00000007-1971-45D4-A9E7-F71A0199ABF7}"/>
+              </c:ext>
+            </c:extLst>
           </c:dPt>
           <c:dPt>
             <c:idx val="4"/>
@@ -308,17 +282,21 @@
               </a:solidFill>
               <a:effectLst/>
             </c:spPr>
+            <c:extLst>
+              <c:ext xmlns:c16="http://schemas.microsoft.com/office/drawing/2014/chart" uri="{C3380CC4-5D6E-409C-BE32-E72D297353CC}">
+                <c16:uniqueId val="{00000009-1971-45D4-A9E7-F71A0199ABF7}"/>
+              </c:ext>
+            </c:extLst>
           </c:dPt>
           <c:dPt>
             <c:idx val="5"/>
             <c:invertIfNegative val="0"/>
             <c:bubble3D val="0"/>
-            <c:spPr>
-              <a:solidFill>
-                <a:srgbClr val="0B5A43"/>
-              </a:solidFill>
-              <a:effectLst/>
-            </c:spPr>
+            <c:extLst>
+              <c:ext xmlns:c16="http://schemas.microsoft.com/office/drawing/2014/chart" uri="{C3380CC4-5D6E-409C-BE32-E72D297353CC}">
+                <c16:uniqueId val="{0000000B-1971-45D4-A9E7-F71A0199ABF7}"/>
+              </c:ext>
+            </c:extLst>
           </c:dPt>
           <c:dPt>
             <c:idx val="6"/>
@@ -330,37 +308,78 @@
               </a:solidFill>
               <a:effectLst/>
             </c:spPr>
+            <c:extLst>
+              <c:ext xmlns:c16="http://schemas.microsoft.com/office/drawing/2014/chart" uri="{C3380CC4-5D6E-409C-BE32-E72D297353CC}">
+                <c16:uniqueId val="{0000000D-1971-45D4-A9E7-F71A0199ABF7}"/>
+              </c:ext>
+            </c:extLst>
           </c:dPt>
+          <c:dLbls>
+            <c:numFmt formatCode="0.00" sourceLinked="0"/>
+            <c:spPr>
+              <a:noFill/>
+              <a:ln>
+                <a:noFill/>
+              </a:ln>
+              <a:effectLst/>
+            </c:spPr>
+            <c:txPr>
+              <a:bodyPr/>
+              <a:lstStyle/>
+              <a:p>
+                <a:pPr>
+                  <a:defRPr sz="1400" b="0" i="0" u="none" strike="noStrike">
+                    <a:solidFill>
+                      <a:srgbClr val="1F2622"/>
+                    </a:solidFill>
+                    <a:latin typeface="+mn-lt"/>
+                  </a:defRPr>
+                </a:pPr>
+                <a:endParaRPr lang="pt-BR"/>
+              </a:p>
+            </c:txPr>
+            <c:showLegendKey val="0"/>
+            <c:showVal val="1"/>
+            <c:showCatName val="0"/>
+            <c:showSerName val="0"/>
+            <c:showPercent val="0"/>
+            <c:showBubbleSize val="0"/>
+            <c:showLeaderLines val="0"/>
+            <c:extLst>
+              <c:ext xmlns:c15="http://schemas.microsoft.com/office/drawing/2012/chart" uri="{CE6537A1-D6FC-4f65-9D91-7224C49458BB}">
+                <c15:layout/>
+                <c15:showLeaderLines val="0"/>
+              </c:ext>
+            </c:extLst>
+          </c:dLbls>
           <c:cat>
-            <c:multiLvlStrRef>
+            <c:strRef>
               <c:f>Sheet1!$A$2:$A$8</c:f>
-              <c:multiLvlStrCache>
+              <c:strCache>
                 <c:ptCount val="7"/>
-                <c:lvl>
-                  <c:pt idx="0">
-                    <c:v>Seg</c:v>
-                  </c:pt>
-                  <c:pt idx="1">
-                    <c:v>Ter</c:v>
-                  </c:pt>
-                  <c:pt idx="2">
-                    <c:v>Qua</c:v>
-                  </c:pt>
-                  <c:pt idx="3">
-                    <c:v>Qui</c:v>
-                  </c:pt>
-                  <c:pt idx="4">
-                    <c:v>Sex</c:v>
-                  </c:pt>
-                  <c:pt idx="5">
-                    <c:v>Sáb</c:v>
-                  </c:pt>
-                  <c:pt idx="6">
-                    <c:v>Dom</c:v>
-                  </c:pt>
-                </c:lvl>
-              </c:multiLvlStrCache>
-            </c:multiLvlStrRef>
+                <c:pt idx="0">
+                  <c:v>Seg</c:v>
+                </c:pt>
+                <c:pt idx="1">
+                  <c:v>Ter</c:v>
+                </c:pt>
+                <c:pt idx="2">
+                  <c:v>Qua</c:v>
+                </c:pt>
+                <c:pt idx="3">
+                  <c:v>Qui</c:v>
+                </c:pt>
+                <c:pt idx="4">
+                  <c:v>Sex</c:v>
+                </c:pt>
+                <c:pt idx="5">
+                  <c:v>Sáb</c:v>
+                </c:pt>
+                <c:pt idx="6">
+                  <c:v>Dom</c:v>
+                </c:pt>
+              </c:strCache>
+            </c:strRef>
           </c:cat>
           <c:val>
             <c:numRef>
@@ -381,7 +400,7 @@
                   <c:v>1.04</c:v>
                 </c:pt>
                 <c:pt idx="4">
-                  <c:v>1.1</c:v>
+                  <c:v>1.1000000000000001</c:v>
                 </c:pt>
                 <c:pt idx="5">
                   <c:v>0.99</c:v>
@@ -392,36 +411,23 @@
               </c:numCache>
             </c:numRef>
           </c:val>
+          <c:extLst>
+            <c:ext xmlns:c16="http://schemas.microsoft.com/office/drawing/2014/chart" uri="{C3380CC4-5D6E-409C-BE32-E72D297353CC}">
+              <c16:uniqueId val="{0000000E-1971-45D4-A9E7-F71A0199ABF7}"/>
+            </c:ext>
+          </c:extLst>
         </c:ser>
         <c:dLbls>
-          <c:numFmt formatCode="0.00" sourceLinked="0"/>
-          <c:txPr>
-            <a:bodyPr/>
-            <a:lstStyle/>
-            <a:p>
-              <a:pPr>
-                <a:defRPr b="0" i="0" strike="noStrike" sz="1400" u="none">
-                  <a:solidFill>
-                    <a:srgbClr val="1F2622"/>
-                  </a:solidFill>
-                  <a:latin typeface="+mn-lt"/>
-                </a:defRPr>
-              </a:pPr>
-            </a:p>
-          </c:txPr>
           <c:showLegendKey val="0"/>
           <c:showVal val="1"/>
           <c:showCatName val="0"/>
           <c:showSerName val="0"/>
           <c:showPercent val="0"/>
           <c:showBubbleSize val="0"/>
-          <c:showLeaderLines val="0"/>
         </c:dLbls>
         <c:gapWidth val="60"/>
-        <c:overlap val="0"/>
         <c:axId val="2094734554"/>
         <c:axId val="2094734552"/>
-        <c:axId val="2094734556"/>
       </c:barChart>
       <c:catAx>
         <c:axId val="2094734554"/>
@@ -455,13 +461,14 @@
                 <a:latin typeface="+mn-lt"/>
               </a:defRPr>
             </a:pPr>
-            <a:endParaRPr lang="en-US"/>
+            <a:endParaRPr lang="pt-BR"/>
           </a:p>
         </c:txPr>
         <c:crossAx val="2094734552"/>
         <c:crosses val="autoZero"/>
         <c:auto val="1"/>
         <c:lblAlgn val="ctr"/>
+        <c:lblOffset val="100"/>
         <c:noMultiLvlLbl val="1"/>
       </c:catAx>
       <c:valAx>
@@ -477,30 +484,6 @@
         <c:majorTickMark val="out"/>
         <c:minorTickMark val="none"/>
         <c:tickLblPos val="nextTo"/>
-        <c:spPr>
-          <a:ln w="12700" cap="flat">
-            <a:solidFill>
-              <a:srgbClr val="888888"/>
-            </a:solidFill>
-            <a:prstDash val="solid"/>
-            <a:round/>
-          </a:ln>
-        </c:spPr>
-        <c:txPr>
-          <a:bodyPr/>
-          <a:lstStyle/>
-          <a:p>
-            <a:pPr>
-              <a:defRPr sz="1200" b="0" i="0" u="none" strike="noStrike">
-                <a:solidFill>
-                  <a:srgbClr val="000000"/>
-                </a:solidFill>
-                <a:latin typeface="Arial"/>
-              </a:defRPr>
-            </a:pPr>
-            <a:endParaRPr lang="en-US"/>
-          </a:p>
-        </c:txPr>
         <c:crossAx val="2094734554"/>
         <c:crosses val="autoZero"/>
         <c:crossBetween val="between"/>
@@ -515,6 +498,7 @@
     </c:plotArea>
     <c:plotVisOnly val="1"/>
     <c:dispBlanksAs val="span"/>
+    <c:showDLblsOverMax val="1"/>
   </c:chart>
   <c:spPr>
     <a:noFill/>
@@ -530,14 +514,17 @@
 </file>
 
 <file path=ppt/charts/chart2.xml><?xml version="1.0" encoding="utf-8"?>
-<c:chartSpace xmlns:c="http://schemas.openxmlformats.org/drawingml/2006/chart" xmlns:a="http://schemas.openxmlformats.org/drawingml/2006/main" xmlns:r="http://schemas.openxmlformats.org/officeDocument/2006/relationships">
+<c:chartSpace xmlns:c="http://schemas.openxmlformats.org/drawingml/2006/chart" xmlns:a="http://schemas.openxmlformats.org/drawingml/2006/main" xmlns:r="http://schemas.openxmlformats.org/officeDocument/2006/relationships" xmlns:c16r2="http://schemas.microsoft.com/office/drawing/2015/06/chart">
   <c:date1904 val="0"/>
+  <c:lang val="pt-BR"/>
   <c:roundedCorners val="1"/>
+  <c:style val="2"/>
   <c:chart>
     <c:autoTitleDeleted val="1"/>
     <c:plotArea>
       <c:layout/>
       <c:lineChart>
+        <c:grouping val="standard"/>
         <c:varyColors val="0"/>
         <c:ser>
           <c:idx val="0"/>
@@ -554,9 +541,6 @@
             </c:strRef>
           </c:tx>
           <c:spPr>
-            <a:solidFill>
-              <a:srgbClr val="0B5A43"/>
-            </a:solidFill>
             <a:ln w="38100" cap="flat">
               <a:solidFill>
                 <a:srgbClr val="0B5A43"/>
@@ -566,21 +550,45 @@
             </a:ln>
             <a:effectLst/>
           </c:spPr>
-          <c:invertIfNegative val="0"/>
+          <c:marker>
+            <c:symbol val="circle"/>
+            <c:size val="8"/>
+            <c:spPr>
+              <a:solidFill>
+                <a:srgbClr val="0B5A43"/>
+              </a:solidFill>
+              <a:ln w="9525" cap="flat">
+                <a:solidFill>
+                  <a:srgbClr val="0B5A43"/>
+                </a:solidFill>
+                <a:prstDash val="solid"/>
+                <a:round/>
+              </a:ln>
+              <a:effectLst/>
+            </c:spPr>
+          </c:marker>
           <c:dLbls>
             <c:numFmt formatCode="0&quot;%&quot;" sourceLinked="0"/>
+            <c:spPr>
+              <a:noFill/>
+              <a:ln>
+                <a:noFill/>
+              </a:ln>
+              <a:effectLst/>
+            </c:spPr>
             <c:txPr>
               <a:bodyPr/>
               <a:lstStyle/>
               <a:p>
                 <a:pPr>
-                  <a:defRPr b="0" i="0" strike="noStrike" sz="1200" u="none">
+                  <a:defRPr sz="1200" b="0" i="0" u="none" strike="noStrike">
                     <a:solidFill>
                       <a:srgbClr val="1F2622"/>
                     </a:solidFill>
                     <a:latin typeface="+mn-lt"/>
                   </a:defRPr>
                 </a:pPr>
+                <a:endParaRPr lang="pt-BR"/>
               </a:p>
             </c:txPr>
             <c:dLblPos val="t"/>
@@ -591,57 +599,44 @@
             <c:showPercent val="0"/>
             <c:showBubbleSize val="0"/>
             <c:showLeaderLines val="0"/>
+            <c:extLst>
+              <c:ext xmlns:c15="http://schemas.microsoft.com/office/drawing/2012/chart" uri="{CE6537A1-D6FC-4f65-9D91-7224C49458BB}">
+                <c15:layout/>
+                <c15:showLeaderLines val="0"/>
+              </c:ext>
+            </c:extLst>
           </c:dLbls>
-          <c:marker>
-            <c:symbol val="circle"/>
-            <c:size val="8"/>
-            <c:spPr>
-              <a:solidFill>
-                <a:srgbClr val="0B5A43"/>
-              </a:solidFill>
-              <a:ln w="9525" cap="flat">
-                <a:solidFill>
-                  <a:srgbClr val="0B5A43"/>
-                </a:solidFill>
-                <a:prstDash val="solid"/>
-                <a:round/>
-              </a:ln>
-              <a:effectLst/>
-            </c:spPr>
-          </c:marker>
           <c:cat>
-            <c:multiLvlStrRef>
+            <c:strRef>
               <c:f>Sheet1!$A$2:$A$9</c:f>
-              <c:multiLvlStrCache>
+              <c:strCache>
                 <c:ptCount val="8"/>
-                <c:lvl>
-                  <c:pt idx="0">
-                    <c:v>nov</c:v>
-                  </c:pt>
-                  <c:pt idx="1">
-                    <c:v>dez</c:v>
-                  </c:pt>
-                  <c:pt idx="2">
-                    <c:v>jan</c:v>
-                  </c:pt>
-                  <c:pt idx="3">
-                    <c:v>fev</c:v>
-                  </c:pt>
-                  <c:pt idx="4">
-                    <c:v>mar</c:v>
-                  </c:pt>
-                  <c:pt idx="5">
-                    <c:v>abr</c:v>
-                  </c:pt>
-                  <c:pt idx="6">
-                    <c:v>mai</c:v>
-                  </c:pt>
-                  <c:pt idx="7">
-                    <c:v>jun</c:v>
-                  </c:pt>
-                </c:lvl>
-              </c:multiLvlStrCache>
-            </c:multiLvlStrRef>
+                <c:pt idx="0">
+                  <c:v>nov</c:v>
+                </c:pt>
+                <c:pt idx="1">
+                  <c:v>dez</c:v>
+                </c:pt>
+                <c:pt idx="2">
+                  <c:v>jan</c:v>
+                </c:pt>
+                <c:pt idx="3">
+                  <c:v>fev</c:v>
+                </c:pt>
+                <c:pt idx="4">
+                  <c:v>mar</c:v>
+                </c:pt>
+                <c:pt idx="5">
+                  <c:v>abr</c:v>
+                </c:pt>
+                <c:pt idx="6">
+                  <c:v>mai</c:v>
+                </c:pt>
+                <c:pt idx="7">
+                  <c:v>jun</c:v>
+                </c:pt>
+              </c:strCache>
+            </c:strRef>
           </c:cat>
           <c:val>
             <c:numRef>
@@ -650,10 +645,10 @@
                 <c:formatCode>General</c:formatCode>
                 <c:ptCount val="8"/>
                 <c:pt idx="0">
-                  <c:v>76.1</c:v>
+                  <c:v>76.099999999999994</c:v>
                 </c:pt>
                 <c:pt idx="1">
-                  <c:v>72.1</c:v>
+                  <c:v>72.099999999999994</c:v>
                 </c:pt>
                 <c:pt idx="2">
                   <c:v>75.7</c:v>
@@ -662,7 +657,7 @@
                   <c:v>74.7</c:v>
                 </c:pt>
                 <c:pt idx="4">
-                  <c:v>76.6</c:v>
+                  <c:v>76.599999999999994</c:v>
                 </c:pt>
                 <c:pt idx="5">
                   <c:v>77.5</c:v>
@@ -677,23 +672,13 @@
             </c:numRef>
           </c:val>
           <c:smooth val="0"/>
+          <c:extLst>
+            <c:ext xmlns:c16="http://schemas.microsoft.com/office/drawing/2014/chart" uri="{C3380CC4-5D6E-409C-BE32-E72D297353CC}">
+              <c16:uniqueId val="{00000000-4080-4AE4-8B8F-F44F01A1025F}"/>
+            </c:ext>
+          </c:extLst>
         </c:ser>
         <c:dLbls>
-          <c:numFmt formatCode="0&quot;%&quot;" sourceLinked="0"/>
-          <c:txPr>
-            <a:bodyPr/>
-            <a:lstStyle/>
-            <a:p>
-              <a:pPr>
-                <a:defRPr b="0" i="0" strike="noStrike" sz="1200" u="none">
-                  <a:solidFill>
-                    <a:srgbClr val="1F2622"/>
-                  </a:solidFill>
-                  <a:latin typeface="+mn-lt"/>
-                </a:defRPr>
-              </a:pPr>
-            </a:p>
-          </c:txPr>
           <c:dLblPos val="t"/>
           <c:showLegendKey val="0"/>
           <c:showVal val="1"/>
@@ -701,12 +686,11 @@
           <c:showSerName val="0"/>
           <c:showPercent val="0"/>
           <c:showBubbleSize val="0"/>
-          <c:showLeaderLines val="0"/>
         </c:dLbls>
         <c:marker val="1"/>
+        <c:smooth val="0"/>
         <c:axId val="2094734554"/>
         <c:axId val="2094734552"/>
-        <c:axId val="2094734556"/>
       </c:lineChart>
       <c:catAx>
         <c:axId val="2094734554"/>
@@ -740,13 +724,14 @@
                 <a:latin typeface="+mn-lt"/>
               </a:defRPr>
             </a:pPr>
-            <a:endParaRPr lang="en-US"/>
+            <a:endParaRPr lang="pt-BR"/>
           </a:p>
         </c:txPr>
         <c:crossAx val="2094734552"/>
         <c:crosses val="autoZero"/>
         <c:auto val="1"/>
         <c:lblAlgn val="ctr"/>
+        <c:lblOffset val="100"/>
         <c:noMultiLvlLbl val="1"/>
       </c:catAx>
       <c:valAx>
@@ -762,30 +747,6 @@
         <c:majorTickMark val="out"/>
         <c:minorTickMark val="none"/>
         <c:tickLblPos val="nextTo"/>
-        <c:spPr>
-          <a:ln w="12700" cap="flat">
-            <a:solidFill>
-              <a:srgbClr val="888888"/>
-            </a:solidFill>
-            <a:prstDash val="solid"/>
-            <a:round/>
-          </a:ln>
-        </c:spPr>
-        <c:txPr>
-          <a:bodyPr/>
-          <a:lstStyle/>
-          <a:p>
-            <a:pPr>
-              <a:defRPr sz="1200" b="0" i="0" u="none" strike="noStrike">
-                <a:solidFill>
-                  <a:srgbClr val="000000"/>
-                </a:solidFill>
-                <a:latin typeface="Arial"/>
-              </a:defRPr>
-            </a:pPr>
-            <a:endParaRPr lang="en-US"/>
-          </a:p>
-        </c:txPr>
         <c:crossAx val="2094734554"/>
         <c:crosses val="autoZero"/>
         <c:crossBetween val="between"/>
@@ -800,6 +761,7 @@
     </c:plotArea>
     <c:plotVisOnly val="1"/>
     <c:dispBlanksAs val="span"/>
+    <c:showDLblsOverMax val="1"/>
   </c:chart>
   <c:spPr>
     <a:noFill/>
@@ -815,9 +777,11 @@
 </file>
 
 <file path=ppt/charts/chart3.xml><?xml version="1.0" encoding="utf-8"?>
-<c:chartSpace xmlns:c="http://schemas.openxmlformats.org/drawingml/2006/chart" xmlns:a="http://schemas.openxmlformats.org/drawingml/2006/main" xmlns:r="http://schemas.openxmlformats.org/officeDocument/2006/relationships">
+<c:chartSpace xmlns:c="http://schemas.openxmlformats.org/drawingml/2006/chart" xmlns:a="http://schemas.openxmlformats.org/drawingml/2006/main" xmlns:r="http://schemas.openxmlformats.org/officeDocument/2006/relationships" xmlns:c16r2="http://schemas.microsoft.com/office/drawing/2015/06/chart">
   <c:date1904 val="0"/>
+  <c:lang val="pt-BR"/>
   <c:roundedCorners val="1"/>
+  <c:style val="2"/>
   <c:chart>
     <c:autoTitleDeleted val="1"/>
     <c:plotArea>
@@ -847,40 +811,15 @@
             <a:effectLst/>
           </c:spPr>
           <c:invertIfNegative val="0"/>
-          <c:dLbls>
-            <c:numFmt formatCode="0.0&quot;%&quot;" sourceLinked="0"/>
-            <c:txPr>
-              <a:bodyPr/>
-              <a:lstStyle/>
-              <a:p>
-                <a:pPr>
-                  <a:defRPr b="0" i="0" strike="noStrike" sz="1400" u="none">
-                    <a:solidFill>
-                      <a:srgbClr val="1F2622"/>
-                    </a:solidFill>
-                    <a:latin typeface="+mn-lt"/>
-                  </a:defRPr>
-                </a:pPr>
-              </a:p>
-            </c:txPr>
-            <c:showLegendKey val="0"/>
-            <c:showVal val="1"/>
-            <c:showCatName val="0"/>
-            <c:showSerName val="0"/>
-            <c:showPercent val="0"/>
-            <c:showBubbleSize val="0"/>
-            <c:showLeaderLines val="0"/>
-          </c:dLbls>
           <c:dPt>
             <c:idx val="0"/>
             <c:invertIfNegative val="0"/>
             <c:bubble3D val="0"/>
-            <c:spPr>
-              <a:solidFill>
-                <a:srgbClr val="E4572E"/>
-              </a:solidFill>
-              <a:effectLst/>
-            </c:spPr>
+            <c:extLst>
+              <c:ext xmlns:c16="http://schemas.microsoft.com/office/drawing/2014/chart" uri="{C3380CC4-5D6E-409C-BE32-E72D297353CC}">
+                <c16:uniqueId val="{00000001-7E72-457A-83CC-4F713E1E118D}"/>
+              </c:ext>
+            </c:extLst>
           </c:dPt>
           <c:dPt>
             <c:idx val="1"/>
@@ -892,6 +831,11 @@
               </a:solidFill>
               <a:effectLst/>
             </c:spPr>
+            <c:extLst>
+              <c:ext xmlns:c16="http://schemas.microsoft.com/office/drawing/2014/chart" uri="{C3380CC4-5D6E-409C-BE32-E72D297353CC}">
+                <c16:uniqueId val="{00000003-7E72-457A-83CC-4F713E1E118D}"/>
+              </c:ext>
+            </c:extLst>
           </c:dPt>
           <c:dPt>
             <c:idx val="2"/>
@@ -903,6 +847,11 @@
               </a:solidFill>
               <a:effectLst/>
             </c:spPr>
+            <c:extLst>
+              <c:ext xmlns:c16="http://schemas.microsoft.com/office/drawing/2014/chart" uri="{C3380CC4-5D6E-409C-BE32-E72D297353CC}">
+                <c16:uniqueId val="{00000005-7E72-457A-83CC-4F713E1E118D}"/>
+              </c:ext>
+            </c:extLst>
           </c:dPt>
           <c:dPt>
             <c:idx val="3"/>
@@ -914,28 +863,68 @@
               </a:solidFill>
               <a:effectLst/>
             </c:spPr>
+            <c:extLst>
+              <c:ext xmlns:c16="http://schemas.microsoft.com/office/drawing/2014/chart" uri="{C3380CC4-5D6E-409C-BE32-E72D297353CC}">
+                <c16:uniqueId val="{00000007-7E72-457A-83CC-4F713E1E118D}"/>
+              </c:ext>
+            </c:extLst>
           </c:dPt>
+          <c:dLbls>
+            <c:numFmt formatCode="0.0&quot;%&quot;" sourceLinked="0"/>
+            <c:spPr>
+              <a:noFill/>
+              <a:ln>
+                <a:noFill/>
+              </a:ln>
+              <a:effectLst/>
+            </c:spPr>
+            <c:txPr>
+              <a:bodyPr/>
+              <a:lstStyle/>
+              <a:p>
+                <a:pPr>
+                  <a:defRPr sz="1400" b="0" i="0" u="none" strike="noStrike">
+                    <a:solidFill>
+                      <a:srgbClr val="1F2622"/>
+                    </a:solidFill>
+                    <a:latin typeface="+mn-lt"/>
+                  </a:defRPr>
+                </a:pPr>
+                <a:endParaRPr lang="pt-BR"/>
+              </a:p>
+            </c:txPr>
+            <c:showLegendKey val="0"/>
+            <c:showVal val="1"/>
+            <c:showCatName val="0"/>
+            <c:showSerName val="0"/>
+            <c:showPercent val="0"/>
+            <c:showBubbleSize val="0"/>
+            <c:showLeaderLines val="0"/>
+            <c:extLst>
+              <c:ext xmlns:c15="http://schemas.microsoft.com/office/drawing/2012/chart" uri="{CE6537A1-D6FC-4f65-9D91-7224C49458BB}">
+                <c15:showLeaderLines val="0"/>
+              </c:ext>
+            </c:extLst>
+          </c:dLbls>
           <c:cat>
-            <c:multiLvlStrRef>
+            <c:strRef>
               <c:f>Sheet1!$A$2:$A$5</c:f>
-              <c:multiLvlStrCache>
+              <c:strCache>
                 <c:ptCount val="4"/>
-                <c:lvl>
-                  <c:pt idx="0">
-                    <c:v>LightGBM</c:v>
-                  </c:pt>
-                  <c:pt idx="1">
-                    <c:v>Média 4 semanas</c:v>
-                  </c:pt>
-                  <c:pt idx="2">
-                    <c:v>Ridge</c:v>
-                  </c:pt>
-                  <c:pt idx="3">
-                    <c:v>Repetir semana passada</c:v>
-                  </c:pt>
-                </c:lvl>
-              </c:multiLvlStrCache>
-            </c:multiLvlStrRef>
+                <c:pt idx="0">
+                  <c:v>LightGBM</c:v>
+                </c:pt>
+                <c:pt idx="1">
+                  <c:v>Média 4 semanas</c:v>
+                </c:pt>
+                <c:pt idx="2">
+                  <c:v>Ridge</c:v>
+                </c:pt>
+                <c:pt idx="3">
+                  <c:v>Repetir semana passada</c:v>
+                </c:pt>
+              </c:strCache>
+            </c:strRef>
           </c:cat>
           <c:val>
             <c:numRef>
@@ -958,36 +947,23 @@
               </c:numCache>
             </c:numRef>
           </c:val>
+          <c:extLst>
+            <c:ext xmlns:c16="http://schemas.microsoft.com/office/drawing/2014/chart" uri="{C3380CC4-5D6E-409C-BE32-E72D297353CC}">
+              <c16:uniqueId val="{00000008-7E72-457A-83CC-4F713E1E118D}"/>
+            </c:ext>
+          </c:extLst>
         </c:ser>
         <c:dLbls>
-          <c:numFmt formatCode="0.0&quot;%&quot;" sourceLinked="0"/>
-          <c:txPr>
-            <a:bodyPr/>
-            <a:lstStyle/>
-            <a:p>
-              <a:pPr>
-                <a:defRPr b="0" i="0" strike="noStrike" sz="1400" u="none">
-                  <a:solidFill>
-                    <a:srgbClr val="1F2622"/>
-                  </a:solidFill>
-                  <a:latin typeface="+mn-lt"/>
-                </a:defRPr>
-              </a:pPr>
-            </a:p>
-          </c:txPr>
           <c:showLegendKey val="0"/>
           <c:showVal val="1"/>
           <c:showCatName val="0"/>
           <c:showSerName val="0"/>
           <c:showPercent val="0"/>
           <c:showBubbleSize val="0"/>
-          <c:showLeaderLines val="0"/>
         </c:dLbls>
         <c:gapWidth val="50"/>
-        <c:overlap val="0"/>
         <c:axId val="2094734554"/>
         <c:axId val="2094734552"/>
-        <c:axId val="2094734556"/>
       </c:barChart>
       <c:catAx>
         <c:axId val="2094734554"/>
@@ -1021,13 +997,14 @@
                 <a:latin typeface="+mn-lt"/>
               </a:defRPr>
             </a:pPr>
-            <a:endParaRPr lang="en-US"/>
+            <a:endParaRPr lang="pt-BR"/>
           </a:p>
         </c:txPr>
         <c:crossAx val="2094734552"/>
         <c:crosses val="autoZero"/>
         <c:auto val="1"/>
         <c:lblAlgn val="ctr"/>
+        <c:lblOffset val="100"/>
         <c:noMultiLvlLbl val="1"/>
       </c:catAx>
       <c:valAx>
@@ -1038,35 +1015,11 @@
           <c:min val="0"/>
         </c:scaling>
         <c:delete val="1"/>
-        <c:axPos val="b"/>
+        <c:axPos val="t"/>
         <c:numFmt formatCode="General" sourceLinked="0"/>
         <c:majorTickMark val="out"/>
         <c:minorTickMark val="none"/>
         <c:tickLblPos val="low"/>
-        <c:spPr>
-          <a:ln w="12700" cap="flat">
-            <a:solidFill>
-              <a:srgbClr val="888888"/>
-            </a:solidFill>
-            <a:prstDash val="solid"/>
-            <a:round/>
-          </a:ln>
-        </c:spPr>
-        <c:txPr>
-          <a:bodyPr/>
-          <a:lstStyle/>
-          <a:p>
-            <a:pPr>
-              <a:defRPr sz="1200" b="0" i="0" u="none" strike="noStrike">
-                <a:solidFill>
-                  <a:srgbClr val="000000"/>
-                </a:solidFill>
-                <a:latin typeface="Arial"/>
-              </a:defRPr>
-            </a:pPr>
-            <a:endParaRPr lang="en-US"/>
-          </a:p>
-        </c:txPr>
         <c:crossAx val="2094734554"/>
         <c:crosses val="autoZero"/>
         <c:crossBetween val="between"/>
@@ -1081,6 +1034,7 @@
     </c:plotArea>
     <c:plotVisOnly val="1"/>
     <c:dispBlanksAs val="span"/>
+    <c:showDLblsOverMax val="1"/>
   </c:chart>
   <c:spPr>
     <a:noFill/>
@@ -1117,234 +1071,10 @@
           <a:chExt cx="0" cy="0"/>
         </a:xfrm>
       </p:grpSpPr>
-      <p:sp>
-        <p:nvSpPr>
-          <p:cNvPr id="2" name="Header Placeholder 1"/>
-          <p:cNvSpPr>
-            <a:spLocks noGrp="1"/>
-          </p:cNvSpPr>
-          <p:nvPr>
-            <p:ph type="hdr" sz="quarter"/>
-          </p:nvPr>
-        </p:nvSpPr>
-        <p:spPr>
-          <a:xfrm>
-            <a:off x="0" y="0"/>
-            <a:ext cx="2971800" cy="458788"/>
-          </a:xfrm>
-          <a:prstGeom prst="rect">
-            <a:avLst/>
-          </a:prstGeom>
-        </p:spPr>
-        <p:txBody>
-          <a:bodyPr vert="horz" lIns="91440" tIns="45720" rIns="91440" bIns="45720" rtlCol="0"/>
-          <a:lstStyle>
-            <a:lvl1pPr algn="l">
-              <a:defRPr sz="1200"/>
-            </a:lvl1pPr>
-          </a:lstStyle>
-          <a:p>
-            <a:endParaRPr lang="en-US"/>
-          </a:p>
-        </p:txBody>
-      </p:sp>
-      <p:sp>
-        <p:nvSpPr>
-          <p:cNvPr id="3" name="Date Placeholder 2"/>
-          <p:cNvSpPr>
-            <a:spLocks noGrp="1"/>
-          </p:cNvSpPr>
-          <p:nvPr>
-            <p:ph type="dt" idx="1"/>
-          </p:nvPr>
-        </p:nvSpPr>
-        <p:spPr>
-          <a:xfrm>
-            <a:off x="3884613" y="0"/>
-            <a:ext cx="2971800" cy="458788"/>
-          </a:xfrm>
-          <a:prstGeom prst="rect">
-            <a:avLst/>
-          </a:prstGeom>
-        </p:spPr>
-        <p:txBody>
-          <a:bodyPr vert="horz" lIns="91440" tIns="45720" rIns="91440" bIns="45720" rtlCol="0"/>
-          <a:lstStyle>
-            <a:lvl1pPr algn="r">
-              <a:defRPr sz="1200"/>
-            </a:lvl1pPr>
-          </a:lstStyle>
-          <a:p>
-            <a:fld id="{5282F153-3F37-0F45-9E97-73ACFA13230C}" type="datetimeFigureOut">
-              <a:rPr lang="en-US"/>
-              <a:t>7/23/19</a:t>
-            </a:fld>
-            <a:endParaRPr lang="en-US"/>
-          </a:p>
-        </p:txBody>
-      </p:sp>
-      <p:sp>
-        <p:nvSpPr>
-          <p:cNvPr id="4" name="Slide Image Placeholder 3"/>
-          <p:cNvSpPr>
-            <a:spLocks noGrp="1" noRot="1" noChangeAspect="1"/>
-          </p:cNvSpPr>
-          <p:nvPr>
-            <p:ph type="sldImg" idx="2"/>
-          </p:nvPr>
-        </p:nvSpPr>
-        <p:spPr>
-          <a:xfrm>
-            <a:off x="685800" y="1143000"/>
-            <a:ext cx="5486400" cy="3086100"/>
-          </a:xfrm>
-          <a:prstGeom prst="rect">
-            <a:avLst/>
-          </a:prstGeom>
-          <a:noFill/>
-          <a:ln w="12700">
-            <a:solidFill>
-              <a:prstClr val="black"/>
-            </a:solidFill>
-          </a:ln>
-        </p:spPr>
-        <p:txBody>
-          <a:bodyPr vert="horz" lIns="91440" tIns="45720" rIns="91440" bIns="45720" rtlCol="0" anchor="ctr"/>
-          <a:lstStyle/>
-          <a:p>
-            <a:endParaRPr lang="en-US"/>
-          </a:p>
-        </p:txBody>
-      </p:sp>
-      <p:sp>
-        <p:nvSpPr>
-          <p:cNvPr id="5" name="Notes Placeholder 4"/>
-          <p:cNvSpPr>
-            <a:spLocks noGrp="1"/>
-          </p:cNvSpPr>
-          <p:nvPr>
-            <p:ph type="body" sz="quarter" idx="3"/>
-          </p:nvPr>
-        </p:nvSpPr>
-        <p:spPr>
-          <a:xfrm>
-            <a:off x="685800" y="4400550"/>
-            <a:ext cx="5486400" cy="3600450"/>
-          </a:xfrm>
-          <a:prstGeom prst="rect">
-            <a:avLst/>
-          </a:prstGeom>
-        </p:spPr>
-        <p:txBody>
-          <a:bodyPr vert="horz" lIns="91440" tIns="45720" rIns="91440" bIns="45720" rtlCol="0"/>
-          <a:lstStyle/>
-          <a:p>
-            <a:pPr lvl="0"/>
-            <a:r>
-              <a:rPr lang="en-US"/>
-              <a:t>Click to edit Master text styles</a:t>
-            </a:r>
-          </a:p>
-          <a:p>
-            <a:pPr lvl="1"/>
-            <a:r>
-              <a:rPr lang="en-US"/>
-              <a:t>Second level</a:t>
-            </a:r>
-          </a:p>
-          <a:p>
-            <a:pPr lvl="2"/>
-            <a:r>
-              <a:rPr lang="en-US"/>
-              <a:t>Third level</a:t>
-            </a:r>
-          </a:p>
-          <a:p>
-            <a:pPr lvl="3"/>
-            <a:r>
-              <a:rPr lang="en-US"/>
-              <a:t>Fourth level</a:t>
-            </a:r>
-          </a:p>
-          <a:p>
-            <a:pPr lvl="4"/>
-            <a:r>
-              <a:rPr lang="en-US"/>
-              <a:t>Fifth level</a:t>
-            </a:r>
-          </a:p>
-        </p:txBody>
-      </p:sp>
-      <p:sp>
-        <p:nvSpPr>
-          <p:cNvPr id="6" name="Footer Placeholder 5"/>
-          <p:cNvSpPr>
-            <a:spLocks noGrp="1"/>
-          </p:cNvSpPr>
-          <p:nvPr>
-            <p:ph type="ftr" sz="quarter" idx="4"/>
-          </p:nvPr>
-        </p:nvSpPr>
-        <p:spPr>
-          <a:xfrm>
-            <a:off x="0" y="8685213"/>
-            <a:ext cx="2971800" cy="458787"/>
-          </a:xfrm>
-          <a:prstGeom prst="rect">
-            <a:avLst/>
-          </a:prstGeom>
-        </p:spPr>
-        <p:txBody>
-          <a:bodyPr vert="horz" lIns="91440" tIns="45720" rIns="91440" bIns="45720" rtlCol="0" anchor="b"/>
-          <a:lstStyle>
-            <a:lvl1pPr algn="l">
-              <a:defRPr sz="1200"/>
-            </a:lvl1pPr>
-          </a:lstStyle>
-          <a:p>
-            <a:endParaRPr lang="en-US"/>
-          </a:p>
-        </p:txBody>
-      </p:sp>
-      <p:sp>
-        <p:nvSpPr>
-          <p:cNvPr id="7" name="Slide Number Placeholder 6"/>
-          <p:cNvSpPr>
-            <a:spLocks noGrp="1"/>
-          </p:cNvSpPr>
-          <p:nvPr>
-            <p:ph type="sldNum" sz="quarter" idx="5"/>
-          </p:nvPr>
-        </p:nvSpPr>
-        <p:spPr>
-          <a:xfrm>
-            <a:off x="3884613" y="8685213"/>
-            <a:ext cx="2971800" cy="458787"/>
-          </a:xfrm>
-          <a:prstGeom prst="rect">
-            <a:avLst/>
-          </a:prstGeom>
-        </p:spPr>
-        <p:txBody>
-          <a:bodyPr vert="horz" lIns="91440" tIns="45720" rIns="91440" bIns="45720" rtlCol="0" anchor="b"/>
-          <a:lstStyle>
-            <a:lvl1pPr algn="r">
-              <a:defRPr sz="1200"/>
-            </a:lvl1pPr>
-          </a:lstStyle>
-          <a:p>
-            <a:fld id="{CE5E9CC1-C706-0F49-92D6-E571CC5EEA8F}" type="slidenum">
-              <a:rPr lang="en-US"/>
-              <a:t>‹#›</a:t>
-            </a:fld>
-            <a:endParaRPr lang="en-US"/>
-          </a:p>
-        </p:txBody>
-      </p:sp>
     </p:spTree>
     <p:extLst>
       <p:ext uri="{BB962C8B-B14F-4D97-AF65-F5344CB8AC3E}">
-        <p14:creationId xmlns:p14="http://schemas.microsoft.com/office/powerpoint/2010/main" val="1024086991"/>
+        <p14:creationId xmlns:p14="http://schemas.microsoft.com/office/powerpoint/2010/main" val="2802805840"/>
       </p:ext>
     </p:extLst>
   </p:cSld>
@@ -1492,7 +1222,6 @@
               <a:rPr lang="en-US" dirty="0"/>
               <a:t>Abertura. Em uma frase: vou mostrar o que os dados de 8 meses do e-commerce dizem, como construí um forecast diário que erra 16% menos que as regras simples, e como eu levaria a ideia do hackathon de imagens para um MVP viável.</a:t>
             </a:r>
-            <a:endParaRPr lang="en-US" dirty="0"/>
           </a:p>
         </p:txBody>
       </p:sp>
@@ -1580,7 +1309,6 @@
               <a:rPr lang="en-US" dirty="0"/>
               <a:t>Recomendação: disparos e campanhas começando na quinta para capturar a sexta. Domingo é o dia mais barato para testar criativo, porque o custo de oportunidade é menor.</a:t>
             </a:r>
-            <a:endParaRPr lang="en-US" dirty="0"/>
           </a:p>
         </p:txBody>
       </p:sp>
@@ -1668,7 +1396,6 @@
               <a:rPr lang="en-US" dirty="0"/>
               <a:t>Mapa de calor da receita média por dia da semana e hora, dezembro a junho. Hipótese inicial era App à noite e Site de dia; os dois têm o mesmo formato, a diferença é de intensidade. Em dia de campanha a curva muda: na Black Friday a meia-noite já vende 3% do dia.</a:t>
             </a:r>
-            <a:endParaRPr lang="en-US" dirty="0"/>
           </a:p>
         </p:txBody>
       </p:sp>
@@ -1756,7 +1483,6 @@
               <a:rPr lang="en-US" dirty="0"/>
               <a:t>E a venda sobe na semana anterior à data e despenca logo depois: dois dias após os Namorados, a receita caiu para R$ 0,8 mi, menos da metade de um dia típico. Isso vai virar feature no modelo: dias até o evento.</a:t>
             </a:r>
-            <a:endParaRPr lang="en-US" dirty="0"/>
           </a:p>
         </p:txBody>
       </p:sp>
@@ -1844,7 +1570,6 @@
               <a:rPr lang="en-US" dirty="0"/>
               <a:t>Pergunta provável: o crescimento do App é migração ou é novo cliente? A base não permite responder, porque não tem identificação de cliente. Seria o próximo estudo.</a:t>
             </a:r>
-            <a:endParaRPr lang="en-US" dirty="0"/>
           </a:p>
         </p:txBody>
       </p:sp>
@@ -1932,7 +1657,6 @@
               <a:rPr lang="en-US" dirty="0"/>
               <a:t>Fechamento do bloco de insights: cada recomendação está ligada a um número que mostrei.</a:t>
             </a:r>
-            <a:endParaRPr lang="en-US" dirty="0"/>
           </a:p>
         </p:txBody>
       </p:sp>
@@ -2016,10 +1740,6 @@
           <a:bodyPr/>
           <a:lstStyle/>
           <a:p>
-            <a:r>
-              <a:rPr lang="en-US" dirty="0"/>
-              <a:t/>
-            </a:r>
             <a:endParaRPr lang="en-US" dirty="0"/>
           </a:p>
         </p:txBody>
@@ -2108,7 +1828,6 @@
               <a:rPr lang="en-US" dirty="0"/>
               <a:t>Quatro decisões antes de escolher algoritmo. Regra contra vazamento: se a informação não existe no momento da previsão, não entra. Como prevejo até 7 dias à frente, o menor lag permitido é 7. Itens, pedidos e desconto do próprio dia ficam fora.</a:t>
             </a:r>
-            <a:endParaRPr lang="en-US" dirty="0"/>
           </a:p>
         </p:txBody>
       </p:sp>
@@ -2196,7 +1915,6 @@
               <a:rPr lang="en-US" dirty="0"/>
               <a:t>Backtest walk-forward com janela expansível: treina até março e testa abril; até abril e testa maio; até maio e testa junho. As features vêm direto da EDA: padrão semanal, rampa antes das datas de presente e patamar recente.</a:t>
             </a:r>
-            <a:endParaRPr lang="en-US" dirty="0"/>
           </a:p>
         </p:txBody>
       </p:sp>
@@ -2284,7 +2002,6 @@
               <a:rPr lang="en-US" dirty="0"/>
               <a:t>Sem baseline, nenhum número de erro significa nada. A pergunta é: o modelo erra menos do que as regras que o time já usaria?</a:t>
             </a:r>
-            <a:endParaRPr lang="en-US" dirty="0"/>
           </a:p>
         </p:txBody>
       </p:sp>
@@ -2372,7 +2089,6 @@
               <a:rPr lang="en-US" dirty="0"/>
               <a:t>Tradução: a cada R$ 100 vendidos, o modelo erra em média R$ 25, contra R$ 30 da melhor regra simples. A Ridge perde para a média de 4 semanas porque a relação não é linear e ela extrapola mal o nível depois de novembro. Daqui em diante, tudo é sobre o modelo vencedor.</a:t>
             </a:r>
-            <a:endParaRPr lang="en-US" dirty="0"/>
           </a:p>
         </p:txBody>
       </p:sp>
@@ -2460,7 +2176,6 @@
               <a:rPr lang="en-US" dirty="0"/>
               <a:t>Combinar com a banca: perguntas no fim de cada bloco ou no final. Sugestão: no final, para não estourar o tempo.</a:t>
             </a:r>
-            <a:endParaRPr lang="en-US" dirty="0"/>
           </a:p>
         </p:txBody>
       </p:sp>
@@ -2548,7 +2263,6 @@
               <a:rPr lang="en-US" dirty="0"/>
               <a:t>Com 8 meses de base, cada data comemorativa aparece uma vez. Nenhum algoritmo aprende o efeito de algo que nunca viu. Por isso usei features genéricas de evento, e junho já se beneficia de ter visto maio. Com 2 anos de histórico, entra o lag de 52 semanas.</a:t>
             </a:r>
-            <a:endParaRPr lang="en-US" dirty="0"/>
           </a:p>
         </p:txBody>
       </p:sp>
@@ -2636,7 +2350,6 @@
               <a:rPr lang="en-US" dirty="0"/>
               <a:t>SHAP do LightGBM treinado até 31 de maio, aplicado aos dias de junho. Mede quanto cada feature empurrou cada previsão. Todas as análises de importância são do modelo vencedor.</a:t>
             </a:r>
-            <a:endParaRPr lang="en-US" dirty="0"/>
           </a:p>
         </p:txBody>
       </p:sp>
@@ -2724,7 +2437,6 @@
               <a:rPr lang="en-US" dirty="0"/>
               <a:t>A meta era 80% de cobertura; chegamos a 65%. Honestamente: com um ano incompleto, a faixa ainda é larga e pouco calibrada nas datas sazonais. Em dias regulares, serve para estoque e escala.</a:t>
             </a:r>
-            <a:endParaRPr lang="en-US" dirty="0"/>
           </a:p>
         </p:txBody>
       </p:sp>
@@ -2812,7 +2524,6 @@
               <a:rPr lang="en-US" dirty="0"/>
               <a:t>Falar de limitação com naturalidade: é sinal de domínio, não de fraqueza. O maior ganho esperado é o calendário comercial, porque o time de campanhas já sabe com antecedência o que vai acontecer.</a:t>
             </a:r>
-            <a:endParaRPr lang="en-US" dirty="0"/>
           </a:p>
         </p:txBody>
       </p:sp>
@@ -2896,10 +2607,6 @@
           <a:bodyPr/>
           <a:lstStyle/>
           <a:p>
-            <a:r>
-              <a:rPr lang="en-US" dirty="0"/>
-              <a:t/>
-            </a:r>
             <a:endParaRPr lang="en-US" dirty="0"/>
           </a:p>
         </p:txBody>
@@ -2988,7 +2695,6 @@
               <a:rPr lang="en-US" dirty="0"/>
               <a:t>A resposta curta: não uso a ferramenta não homologada e não mato a ideia. Tradução para o time: embedding é a impressão digital numérica da imagem; zero-shot é perguntar ao modelo se o banner tem preço em destaque sem precisar ensinar com exemplos.</a:t>
             </a:r>
-            <a:endParaRPr lang="en-US" dirty="0"/>
           </a:p>
         </p:txBody>
       </p:sp>
@@ -3076,7 +2782,6 @@
               <a:rPr lang="en-US" dirty="0"/>
               <a:t>O time no-code atua nas duas pontas: define a rubrica de marca e consome o dashboard. O modelo de performance pode ser uma regressão logística ou LightGBM sobre embeddings e features, prevendo CTR acima da mediana.</a:t>
             </a:r>
-            <a:endParaRPr lang="en-US" dirty="0"/>
           </a:p>
         </p:txBody>
       </p:sp>
@@ -3164,7 +2869,6 @@
               <a:rPr lang="en-US" dirty="0"/>
               <a:t>O ticket médio vem da Seção 1: isso amarra as duas partes do case. Os cenários são hipotéticos e estão marcados assim. A mensagem para gestão sênior: investimento pequeno, em etapas, cada uma com saída barata se não funcionar.</a:t>
             </a:r>
-            <a:endParaRPr lang="en-US" dirty="0"/>
           </a:p>
         </p:txBody>
       </p:sp>
@@ -3252,7 +2956,6 @@
               <a:rPr lang="en-US" dirty="0"/>
               <a:t>Gestão sênior quer saber o que estou pedindo, quanto custa e quando decide de novo. Este slide responde as três.</a:t>
             </a:r>
-            <a:endParaRPr lang="en-US" dirty="0"/>
           </a:p>
         </p:txBody>
       </p:sp>
@@ -3340,7 +3043,6 @@
               <a:rPr lang="en-US" dirty="0"/>
               <a:t>Fechar com proposta de valor, não com obrigado. Depois, abrir para perguntas. Perguntas prováveis: vazamento, por que WAPE, como iria para produção, e se o comercial mudar a campanha de última hora.</a:t>
             </a:r>
-            <a:endParaRPr lang="en-US" dirty="0"/>
           </a:p>
         </p:txBody>
       </p:sp>
@@ -3428,7 +3130,6 @@
               <a:rPr lang="en-US" dirty="0"/>
               <a:t>Este é o slide de elevador. Se a banca só lembrar de uma coisa, que sejam estes três pontos.</a:t>
             </a:r>
-            <a:endParaRPr lang="en-US" dirty="0"/>
           </a:p>
         </p:txBody>
       </p:sp>
@@ -3512,10 +3213,6 @@
           <a:bodyPr/>
           <a:lstStyle/>
           <a:p>
-            <a:r>
-              <a:rPr lang="en-US" dirty="0"/>
-              <a:t/>
-            </a:r>
             <a:endParaRPr lang="en-US" dirty="0"/>
           </a:p>
         </p:txBody>
@@ -3604,7 +3301,6 @@
               <a:rPr lang="en-US" dirty="0"/>
               <a:t>Mensagem: rigor antes de velocidade. A categoria numérica não é lixo, é venda real com rótulo corrompido. A receita negativa tem o mesmo preço por item das positivas, então é sinal invertido. Se eu tivesse deletado ou somado direto, todos os números seguintes estariam errados.</a:t>
             </a:r>
-            <a:endParaRPr lang="en-US" dirty="0"/>
           </a:p>
         </p:txBody>
       </p:sp>
@@ -3688,10 +3384,6 @@
           <a:bodyPr/>
           <a:lstStyle/>
           <a:p>
-            <a:r>
-              <a:rPr lang="en-US" dirty="0"/>
-              <a:t/>
-            </a:r>
             <a:endParaRPr lang="en-US" dirty="0"/>
           </a:p>
         </p:txBody>
@@ -3780,7 +3472,6 @@
               <a:rPr lang="en-US" dirty="0"/>
               <a:t>A série tem dois regimes. Novembro é um mês inteiro de campanha, com receita diária 2,5 vezes maior. Qualquer média simples do período fica distorcida, e o modelo precisa saber disso.</a:t>
             </a:r>
-            <a:endParaRPr lang="en-US" dirty="0"/>
           </a:p>
         </p:txBody>
       </p:sp>
@@ -3868,7 +3559,6 @@
               <a:rPr lang="en-US" dirty="0"/>
               <a:t>Decomposição da receita. O que mudou em novembro foi o número de pedidos, não o valor do pedido. Preço e desconto andam em espelho no período inteiro. Implicação: campanha deve ser avaliada por margem, não só por receita.</a:t>
             </a:r>
-            <a:endParaRPr lang="en-US" dirty="0"/>
           </a:p>
         </p:txBody>
       </p:sp>
@@ -3956,7 +3646,6 @@
               <a:rPr lang="en-US" dirty="0"/>
               <a:t>Desconto puxa volume, correlação de 0,56 entre desconto e itens vendidos. Mas a semana do Dia das Mães (losangos verdes) vende muito com o desconto mais baixo do período. Dia típico = mediana de dezembro a junho.</a:t>
             </a:r>
-            <a:endParaRPr lang="en-US" dirty="0"/>
           </a:p>
         </p:txBody>
       </p:sp>
@@ -4034,6 +3723,7 @@
         <a:solidFill>
           <a:srgbClr val="0B5A43"/>
         </a:solidFill>
+        <a:effectLst/>
       </p:bgPr>
     </p:bg>
     <p:spTree>
@@ -4053,9 +3743,11 @@
       <p:sp>
         <p:nvSpPr>
           <p:cNvPr id="2" name="Text 0"/>
-          <p:cNvSpPr/>
+          <p:cNvSpPr>
+            <a:spLocks noGrp="1"/>
+          </p:cNvSpPr>
           <p:nvPr>
-            <p:ph idx="100" type="title" hasCustomPrompt="1"/>
+            <p:ph type="title" idx="100" hasCustomPrompt="1"/>
           </p:nvPr>
         </p:nvSpPr>
         <p:spPr>
@@ -4072,7 +3764,7 @@
         <p:txBody>
           <a:bodyPr wrap="square" rtlCol="0"/>
           <a:lstStyle>
-            <a:lvl1pPr algn="l" indent="0" marL="0">
+            <a:lvl1pPr marL="0" indent="0" algn="l">
               <a:buNone/>
               <a:defRPr lang="en-US" sz="4000" b="1" dirty="0">
                 <a:solidFill>
@@ -4082,7 +3774,7 @@
             </a:lvl1pPr>
           </a:lstStyle>
           <a:p>
-            <a:pPr algn="l" indent="0" marL="0">
+            <a:pPr marL="0" indent="0" algn="l">
               <a:buNone/>
             </a:pPr>
             <a:endParaRPr lang="en-US" sz="4000" dirty="0"/>
@@ -4092,9 +3784,11 @@
       <p:sp>
         <p:nvSpPr>
           <p:cNvPr id="3" name="Text 0"/>
-          <p:cNvSpPr/>
+          <p:cNvSpPr>
+            <a:spLocks noGrp="1"/>
+          </p:cNvSpPr>
           <p:nvPr>
-            <p:ph idx="101" type="body" hasCustomPrompt="1"/>
+            <p:ph type="body" idx="101" hasCustomPrompt="1"/>
           </p:nvPr>
         </p:nvSpPr>
         <p:spPr>
@@ -4111,7 +3805,7 @@
         <p:txBody>
           <a:bodyPr wrap="square" rtlCol="0"/>
           <a:lstStyle>
-            <a:lvl1pPr algn="l" indent="0" marL="0">
+            <a:lvl1pPr marL="0" indent="0" algn="l">
               <a:buNone/>
               <a:defRPr lang="en-US" sz="1800" dirty="0">
                 <a:solidFill>
@@ -4121,7 +3815,7 @@
             </a:lvl1pPr>
           </a:lstStyle>
           <a:p>
-            <a:pPr algn="l" indent="0" marL="0">
+            <a:pPr marL="0" indent="0" algn="l">
               <a:buNone/>
             </a:pPr>
             <a:endParaRPr lang="en-US" sz="1800" dirty="0"/>
@@ -4144,6 +3838,7 @@
         <a:solidFill>
           <a:srgbClr val="0B5A43"/>
         </a:solidFill>
+        <a:effectLst/>
       </p:bgPr>
     </p:bg>
     <p:spTree>
@@ -4163,9 +3858,11 @@
       <p:sp>
         <p:nvSpPr>
           <p:cNvPr id="2" name="Text 0"/>
-          <p:cNvSpPr/>
+          <p:cNvSpPr>
+            <a:spLocks noGrp="1"/>
+          </p:cNvSpPr>
           <p:nvPr>
-            <p:ph idx="100" type="body" hasCustomPrompt="1"/>
+            <p:ph type="body" idx="100" hasCustomPrompt="1"/>
           </p:nvPr>
         </p:nvSpPr>
         <p:spPr>
@@ -4182,7 +3879,7 @@
         <p:txBody>
           <a:bodyPr wrap="square" rtlCol="0"/>
           <a:lstStyle>
-            <a:lvl1pPr algn="l" indent="0" marL="0">
+            <a:lvl1pPr marL="0" indent="0" algn="l">
               <a:buNone/>
               <a:defRPr lang="en-US" sz="7200" b="1" dirty="0">
                 <a:solidFill>
@@ -4192,7 +3889,7 @@
             </a:lvl1pPr>
           </a:lstStyle>
           <a:p>
-            <a:pPr algn="l" indent="0" marL="0">
+            <a:pPr marL="0" indent="0" algn="l">
               <a:buNone/>
             </a:pPr>
             <a:endParaRPr lang="en-US" sz="7200" dirty="0"/>
@@ -4202,9 +3899,11 @@
       <p:sp>
         <p:nvSpPr>
           <p:cNvPr id="3" name="Text 0"/>
-          <p:cNvSpPr/>
+          <p:cNvSpPr>
+            <a:spLocks noGrp="1"/>
+          </p:cNvSpPr>
           <p:nvPr>
-            <p:ph idx="101" type="title" hasCustomPrompt="1"/>
+            <p:ph type="title" idx="101" hasCustomPrompt="1"/>
           </p:nvPr>
         </p:nvSpPr>
         <p:spPr>
@@ -4221,7 +3920,7 @@
         <p:txBody>
           <a:bodyPr wrap="square" rtlCol="0"/>
           <a:lstStyle>
-            <a:lvl1pPr algn="l" indent="0" marL="0">
+            <a:lvl1pPr marL="0" indent="0" algn="l">
               <a:buNone/>
               <a:defRPr lang="en-US" sz="4000" b="1" dirty="0">
                 <a:solidFill>
@@ -4231,7 +3930,7 @@
             </a:lvl1pPr>
           </a:lstStyle>
           <a:p>
-            <a:pPr algn="l" indent="0" marL="0">
+            <a:pPr marL="0" indent="0" algn="l">
               <a:buNone/>
             </a:pPr>
             <a:endParaRPr lang="en-US" sz="4000" dirty="0"/>
@@ -4258,7 +3957,7 @@
           </a:prstGeom>
           <a:extLst>
             <a:ext uri="{C572A759-6A51-4108-AA02-DFA0A04FC94B}">
-              <ma14:wrappingTextBoxFlag xmlns:ma14="http://schemas.microsoft.com/office/mac/drawingml/2011/main" val="0"/>
+              <ma14:wrappingTextBoxFlag xmlns="" xmlns:ma14="http://schemas.microsoft.com/office/mac/drawingml/2011/main" val="0"/>
             </a:ext>
           </a:extLst>
         </p:spPr>
@@ -4276,8 +3975,8 @@
           <a:p>
             <a:pPr algn="r"/>
             <a:fld id="{F7021451-1387-4CA6-816F-3879F97B5CBC}" type="slidenum">
-              <a:rPr b="0" lang="en-US"/>
-              <a:t>1003</a:t>
+              <a:rPr lang="en-US" b="0"/>
+              <a:t>‹nº›</a:t>
             </a:fld>
             <a:endParaRPr lang="en-US"/>
           </a:p>
@@ -4299,6 +3998,7 @@
         <a:solidFill>
           <a:srgbClr val="FFFFFF"/>
         </a:solidFill>
+        <a:effectLst/>
       </p:bgPr>
     </p:bg>
     <p:spTree>
@@ -4318,9 +4018,11 @@
       <p:sp>
         <p:nvSpPr>
           <p:cNvPr id="2" name="Text 0"/>
-          <p:cNvSpPr/>
+          <p:cNvSpPr>
+            <a:spLocks noGrp="1"/>
+          </p:cNvSpPr>
           <p:nvPr>
-            <p:ph idx="100" type="title" hasCustomPrompt="1"/>
+            <p:ph type="title" idx="100" hasCustomPrompt="1"/>
           </p:nvPr>
         </p:nvSpPr>
         <p:spPr>
@@ -4337,7 +4039,7 @@
         <p:txBody>
           <a:bodyPr wrap="square" rtlCol="0"/>
           <a:lstStyle>
-            <a:lvl1pPr algn="l" indent="0" marL="0">
+            <a:lvl1pPr marL="0" indent="0" algn="l">
               <a:buNone/>
               <a:defRPr lang="en-US" sz="2800" b="1" dirty="0">
                 <a:solidFill>
@@ -4347,7 +4049,7 @@
             </a:lvl1pPr>
           </a:lstStyle>
           <a:p>
-            <a:pPr algn="l" indent="0" marL="0">
+            <a:pPr marL="0" indent="0" algn="l">
               <a:buNone/>
             </a:pPr>
             <a:endParaRPr lang="en-US" sz="2800" dirty="0"/>
@@ -4375,7 +4077,7 @@
           <a:bodyPr wrap="square" lIns="0" tIns="0" rIns="0" bIns="0" rtlCol="0" anchor="ctr"/>
           <a:lstStyle/>
           <a:p>
-            <a:pPr indent="0" marL="0">
+            <a:pPr marL="0" indent="0">
               <a:buNone/>
             </a:pPr>
             <a:r>
@@ -4410,7 +4112,7 @@
           </a:prstGeom>
           <a:extLst>
             <a:ext uri="{C572A759-6A51-4108-AA02-DFA0A04FC94B}">
-              <ma14:wrappingTextBoxFlag xmlns:ma14="http://schemas.microsoft.com/office/mac/drawingml/2011/main" val="0"/>
+              <ma14:wrappingTextBoxFlag xmlns="" xmlns:ma14="http://schemas.microsoft.com/office/mac/drawingml/2011/main" val="0"/>
             </a:ext>
           </a:extLst>
         </p:spPr>
@@ -4428,8 +4130,8 @@
           <a:p>
             <a:pPr algn="r"/>
             <a:fld id="{F7021451-1387-4CA6-816F-3879F97B5CBC}" type="slidenum">
-              <a:rPr b="0" lang="en-US"/>
-              <a:t>1004</a:t>
+              <a:rPr lang="en-US" b="0"/>
+              <a:t>‹nº›</a:t>
             </a:fld>
             <a:endParaRPr lang="en-US"/>
           </a:p>
@@ -4446,6 +4148,11 @@
 <file path=ppt/slideMasters/slideMaster1.xml><?xml version="1.0" encoding="utf-8"?>
 <p:sldMaster xmlns:a="http://schemas.openxmlformats.org/drawingml/2006/main" xmlns:r="http://schemas.openxmlformats.org/officeDocument/2006/relationships" xmlns:p="http://schemas.openxmlformats.org/presentationml/2006/main">
   <p:cSld>
+    <p:bg>
+      <p:bgRef idx="1001">
+        <a:schemeClr val="bg1"/>
+      </p:bgRef>
+    </p:bg>
     <p:spTree>
       <p:nvGrpSpPr>
         <p:cNvPr id="1" name=""/>
@@ -4480,7 +4187,7 @@
           </a:prstGeom>
           <a:extLst>
             <a:ext uri="{C572A759-6A51-4108-AA02-DFA0A04FC94B}">
-              <ma14:wrappingTextBoxFlag xmlns:ma14="http://schemas.microsoft.com/office/mac/drawingml/2011/main" val="0"/>
+              <ma14:wrappingTextBoxFlag xmlns="" xmlns:ma14="http://schemas.microsoft.com/office/mac/drawingml/2011/main" val="0"/>
             </a:ext>
           </a:extLst>
         </p:spPr>
@@ -4498,10 +4205,90 @@
           <a:p>
             <a:pPr algn="r"/>
             <a:fld id="{F7021451-1387-4CA6-816F-3879F97B5CBC}" type="slidenum">
-              <a:rPr b="0" lang="en-US"/>
-              <a:t>null</a:t>
+              <a:rPr lang="en-US" b="0"/>
+              <a:t>‹nº›</a:t>
             </a:fld>
             <a:endParaRPr lang="en-US"/>
+          </a:p>
+        </p:txBody>
+      </p:sp>
+      <p:pic>
+        <p:nvPicPr>
+          <p:cNvPr id="2" name="Imagem 1"/>
+          <p:cNvPicPr>
+            <a:picLocks noChangeAspect="1"/>
+          </p:cNvPicPr>
+          <p:nvPr userDrawn="1"/>
+        </p:nvPicPr>
+        <p:blipFill>
+          <a:blip r:embed="rId6">
+            <a:extLst>
+              <a:ext uri="{28A0092B-C50C-407E-A947-70E740481C1C}">
+                <a14:useLocalDpi xmlns:a14="http://schemas.microsoft.com/office/drawing/2010/main" val="0"/>
+              </a:ext>
+            </a:extLst>
+          </a:blip>
+          <a:stretch>
+            <a:fillRect/>
+          </a:stretch>
+        </p:blipFill>
+        <p:spPr>
+          <a:xfrm>
+            <a:off x="10224655" y="102160"/>
+            <a:ext cx="1499894" cy="376307"/>
+          </a:xfrm>
+          <a:prstGeom prst="rect">
+            <a:avLst/>
+          </a:prstGeom>
+        </p:spPr>
+      </p:pic>
+      <p:sp>
+        <p:nvSpPr>
+          <p:cNvPr id="3" name="CaixaDeTexto 2"/>
+          <p:cNvSpPr txBox="1"/>
+          <p:nvPr userDrawn="1"/>
+        </p:nvSpPr>
+        <p:spPr>
+          <a:xfrm>
+            <a:off x="9800705" y="5706070"/>
+            <a:ext cx="1923844" cy="246221"/>
+          </a:xfrm>
+          <a:prstGeom prst="rect">
+            <a:avLst/>
+          </a:prstGeom>
+          <a:noFill/>
+        </p:spPr>
+        <p:txBody>
+          <a:bodyPr wrap="square" rtlCol="0">
+            <a:spAutoFit/>
+          </a:bodyPr>
+          <a:lstStyle/>
+          <a:p>
+            <a:r>
+              <a:rPr lang="pt-BR" sz="1000" dirty="0" smtClean="0"/>
+              <a:t>Bernardo</a:t>
+            </a:r>
+            <a:r>
+              <a:rPr lang="pt-BR" sz="1000" baseline="0" dirty="0" smtClean="0"/>
+              <a:t> </a:t>
+            </a:r>
+            <a:r>
+              <a:rPr lang="pt-BR" sz="1000" baseline="0" dirty="0" err="1" smtClean="0"/>
+              <a:t>Chiusoli</a:t>
+            </a:r>
+            <a:r>
+              <a:rPr lang="pt-BR" sz="1000" baseline="0" dirty="0" smtClean="0"/>
+              <a:t> – </a:t>
+            </a:r>
+            <a:r>
+              <a:rPr lang="pt-BR" sz="1000" baseline="0" dirty="0" err="1" smtClean="0"/>
+              <a:t>Espec</a:t>
+            </a:r>
+            <a:r>
+              <a:rPr lang="pt-BR" sz="1000" baseline="0" dirty="0" smtClean="0"/>
+              <a:t> Dados I</a:t>
+            </a:r>
+            <a:endParaRPr lang="pt-BR" dirty="0"/>
           </a:p>
         </p:txBody>
       </p:sp>
@@ -4788,9 +4575,11 @@
       <p:sp>
         <p:nvSpPr>
           <p:cNvPr id="2" name="Text 0"/>
-          <p:cNvSpPr/>
+          <p:cNvSpPr>
+            <a:spLocks noGrp="1"/>
+          </p:cNvSpPr>
           <p:nvPr>
-            <p:ph idx="100" type="title" hasCustomPrompt="1"/>
+            <p:ph type="title" idx="100" hasCustomPrompt="1"/>
           </p:nvPr>
         </p:nvSpPr>
         <p:spPr>
@@ -4808,7 +4597,7 @@
           <a:bodyPr wrap="square" lIns="0" tIns="0" rIns="0" bIns="0" rtlCol="0" anchor="b"/>
           <a:lstStyle/>
           <a:p>
-            <a:pPr algn="l" indent="0" marL="0">
+            <a:pPr marL="0" indent="0" algn="l">
               <a:buNone/>
             </a:pPr>
             <a:r>
@@ -4826,9 +4615,11 @@
       <p:sp>
         <p:nvSpPr>
           <p:cNvPr id="3" name="Text 0"/>
-          <p:cNvSpPr/>
+          <p:cNvSpPr>
+            <a:spLocks noGrp="1"/>
+          </p:cNvSpPr>
           <p:nvPr>
-            <p:ph idx="101" type="body" hasCustomPrompt="1"/>
+            <p:ph type="body" idx="101" hasCustomPrompt="1"/>
           </p:nvPr>
         </p:nvSpPr>
         <p:spPr>
@@ -4846,7 +4637,7 @@
           <a:bodyPr wrap="square" lIns="0" tIns="0" rIns="0" bIns="0" rtlCol="0" anchor="t"/>
           <a:lstStyle/>
           <a:p>
-            <a:pPr algn="l" indent="0" marL="0">
+            <a:pPr marL="0" indent="0" algn="l">
               <a:buNone/>
             </a:pPr>
             <a:r>
@@ -4889,9 +4680,11 @@
       <p:sp>
         <p:nvSpPr>
           <p:cNvPr id="2" name="Text 0"/>
-          <p:cNvSpPr/>
+          <p:cNvSpPr>
+            <a:spLocks noGrp="1"/>
+          </p:cNvSpPr>
           <p:nvPr>
-            <p:ph idx="100" type="title" hasCustomPrompt="1"/>
+            <p:ph type="title" idx="100" hasCustomPrompt="1"/>
           </p:nvPr>
         </p:nvSpPr>
         <p:spPr>
@@ -4909,7 +4702,7 @@
           <a:bodyPr wrap="square" lIns="0" tIns="0" rIns="0" bIns="0" rtlCol="0" anchor="ctr"/>
           <a:lstStyle/>
           <a:p>
-            <a:pPr algn="l" indent="0" marL="0">
+            <a:pPr marL="0" indent="0" algn="l">
               <a:buNone/>
             </a:pPr>
             <a:r>
@@ -4926,7 +4719,7 @@
       </p:sp>
       <p:graphicFrame>
         <p:nvGraphicFramePr>
-          <p:cNvPr id="3" name="Chart 0" descr=""/>
+          <p:cNvPr id="3" name="Chart 0"/>
           <p:cNvGraphicFramePr/>
           <p:nvPr/>
         </p:nvGraphicFramePr>
@@ -4934,9 +4727,9 @@
           <a:off x="548640" y="1417320"/>
           <a:ext cx="6949440" cy="4572000"/>
         </p:xfrm>
-        <a:graphic xmlns:a="http://schemas.openxmlformats.org/drawingml/2006/main">
+        <a:graphic>
           <a:graphicData uri="http://schemas.openxmlformats.org/drawingml/2006/chart">
-            <c:chart xmlns:c="http://schemas.openxmlformats.org/drawingml/2006/chart" r:id="rId1"/>
+            <c:chart xmlns:c="http://schemas.openxmlformats.org/drawingml/2006/chart" xmlns:r="http://schemas.openxmlformats.org/officeDocument/2006/relationships" r:id="rId3"/>
           </a:graphicData>
         </a:graphic>
       </p:graphicFrame>
@@ -4983,7 +4776,7 @@
           <a:bodyPr wrap="square" lIns="0" tIns="0" rIns="0" bIns="0" rtlCol="0" anchor="t"/>
           <a:lstStyle/>
           <a:p>
-            <a:pPr indent="0" marL="0">
+            <a:pPr marL="0" indent="0">
               <a:buNone/>
             </a:pPr>
             <a:r>
@@ -4997,7 +4790,7 @@
             <a:endParaRPr lang="en-US" sz="1400" dirty="0"/>
           </a:p>
           <a:p>
-            <a:pPr indent="0" marL="0">
+            <a:pPr marL="0" indent="0">
               <a:buNone/>
             </a:pPr>
             <a:r>
@@ -5011,7 +4804,7 @@
             <a:endParaRPr lang="en-US" sz="1400" dirty="0"/>
           </a:p>
           <a:p>
-            <a:pPr indent="0" marL="0">
+            <a:pPr marL="0" indent="0">
               <a:buNone/>
             </a:pPr>
             <a:r>
@@ -5025,7 +4818,7 @@
             <a:endParaRPr lang="en-US" sz="1400" dirty="0"/>
           </a:p>
           <a:p>
-            <a:pPr indent="0" marL="0">
+            <a:pPr marL="0" indent="0">
               <a:buNone/>
             </a:pPr>
             <a:r>
@@ -5039,7 +4832,7 @@
             <a:endParaRPr lang="en-US" sz="1400" dirty="0"/>
           </a:p>
           <a:p>
-            <a:pPr indent="0" marL="0">
+            <a:pPr marL="0" indent="0">
               <a:buNone/>
             </a:pPr>
             <a:r>
@@ -5074,7 +4867,7 @@
           </a:prstGeom>
           <a:extLst>
             <a:ext uri="{C572A759-6A51-4108-AA02-DFA0A04FC94B}">
-              <ma14:wrappingTextBoxFlag xmlns:ma14="http://schemas.microsoft.com/office/mac/drawingml/2011/main" val="0"/>
+              <ma14:wrappingTextBoxFlag xmlns="" xmlns:ma14="http://schemas.microsoft.com/office/mac/drawingml/2011/main" val="0"/>
             </a:ext>
           </a:extLst>
         </p:spPr>
@@ -5092,7 +4885,7 @@
           <a:p>
             <a:pPr algn="r"/>
             <a:fld id="{F7021451-1387-4CA6-816F-3879F97B5CBC}" type="slidenum">
-              <a:rPr b="0" lang="en-US"/>
+              <a:rPr lang="en-US" b="0"/>
               <a:t>10</a:t>
             </a:fld>
             <a:endParaRPr lang="en-US"/>
@@ -5127,9 +4920,11 @@
       <p:sp>
         <p:nvSpPr>
           <p:cNvPr id="2" name="Text 0"/>
-          <p:cNvSpPr/>
+          <p:cNvSpPr>
+            <a:spLocks noGrp="1"/>
+          </p:cNvSpPr>
           <p:nvPr>
-            <p:ph idx="100" type="title" hasCustomPrompt="1"/>
+            <p:ph type="title" idx="100" hasCustomPrompt="1"/>
           </p:nvPr>
         </p:nvSpPr>
         <p:spPr>
@@ -5147,7 +4942,7 @@
           <a:bodyPr wrap="square" lIns="0" tIns="0" rIns="0" bIns="0" rtlCol="0" anchor="ctr"/>
           <a:lstStyle/>
           <a:p>
-            <a:pPr algn="l" indent="0" marL="0">
+            <a:pPr marL="0" indent="0" algn="l">
               <a:buNone/>
             </a:pPr>
             <a:r>
@@ -5164,14 +4959,14 @@
       </p:sp>
       <p:pic>
         <p:nvPicPr>
-          <p:cNvPr id="3" name="02_heatmap_dia_hora" descr="/home/claude/case/reports/figures/slides/02_heatmap_dia_hora.png">    </p:cNvPr>
+          <p:cNvPr id="3" name="02_heatmap_dia_hora" descr="/home/claude/case/reports/figures/slides/02_heatmap_dia_hora.png"/>
           <p:cNvPicPr>
             <a:picLocks noChangeAspect="1"/>
           </p:cNvPicPr>
           <p:nvPr/>
         </p:nvPicPr>
         <p:blipFill>
-          <a:blip r:embed="rId1"/>
+          <a:blip r:embed="rId3"/>
           <a:stretch>
             <a:fillRect/>
           </a:stretch>
@@ -5207,7 +5002,7 @@
           <a:bodyPr wrap="square" lIns="0" tIns="0" rIns="0" bIns="0" rtlCol="0" anchor="t"/>
           <a:lstStyle/>
           <a:p>
-            <a:pPr indent="0" marL="0">
+            <a:pPr marL="0" indent="0">
               <a:buNone/>
             </a:pPr>
             <a:r>
@@ -5243,7 +5038,7 @@
           <a:bodyPr wrap="square" lIns="0" tIns="0" rIns="0" bIns="0" rtlCol="0" anchor="t"/>
           <a:lstStyle/>
           <a:p>
-            <a:pPr indent="0" marL="0">
+            <a:pPr marL="0" indent="0">
               <a:buNone/>
             </a:pPr>
             <a:r>
@@ -5279,7 +5074,7 @@
           <a:bodyPr wrap="square" lIns="0" tIns="0" rIns="0" bIns="0" rtlCol="0" anchor="t"/>
           <a:lstStyle/>
           <a:p>
-            <a:pPr indent="0" marL="0">
+            <a:pPr marL="0" indent="0">
               <a:buNone/>
             </a:pPr>
             <a:r>
@@ -5315,7 +5110,7 @@
           <a:bodyPr wrap="square" lIns="0" tIns="0" rIns="0" bIns="0" rtlCol="0" anchor="t"/>
           <a:lstStyle/>
           <a:p>
-            <a:pPr indent="0" marL="0">
+            <a:pPr marL="0" indent="0">
               <a:buNone/>
             </a:pPr>
             <a:r>
@@ -5351,7 +5146,7 @@
           <a:bodyPr wrap="square" lIns="0" tIns="0" rIns="0" bIns="0" rtlCol="0" anchor="t"/>
           <a:lstStyle/>
           <a:p>
-            <a:pPr indent="0" marL="0">
+            <a:pPr marL="0" indent="0">
               <a:buNone/>
             </a:pPr>
             <a:r>
@@ -5387,7 +5182,7 @@
           <a:bodyPr wrap="square" lIns="0" tIns="0" rIns="0" bIns="0" rtlCol="0" anchor="t"/>
           <a:lstStyle/>
           <a:p>
-            <a:pPr indent="0" marL="0">
+            <a:pPr marL="0" indent="0">
               <a:buNone/>
             </a:pPr>
             <a:r>
@@ -5422,7 +5217,7 @@
           </a:prstGeom>
           <a:extLst>
             <a:ext uri="{C572A759-6A51-4108-AA02-DFA0A04FC94B}">
-              <ma14:wrappingTextBoxFlag xmlns:ma14="http://schemas.microsoft.com/office/mac/drawingml/2011/main" val="0"/>
+              <ma14:wrappingTextBoxFlag xmlns="" xmlns:ma14="http://schemas.microsoft.com/office/mac/drawingml/2011/main" val="0"/>
             </a:ext>
           </a:extLst>
         </p:spPr>
@@ -5440,7 +5235,7 @@
           <a:p>
             <a:pPr algn="r"/>
             <a:fld id="{F7021451-1387-4CA6-816F-3879F97B5CBC}" type="slidenum">
-              <a:rPr b="0" lang="en-US"/>
+              <a:rPr lang="en-US" b="0"/>
               <a:t>11</a:t>
             </a:fld>
             <a:endParaRPr lang="en-US"/>
@@ -5475,9 +5270,11 @@
       <p:sp>
         <p:nvSpPr>
           <p:cNvPr id="2" name="Text 0"/>
-          <p:cNvSpPr/>
+          <p:cNvSpPr>
+            <a:spLocks noGrp="1"/>
+          </p:cNvSpPr>
           <p:nvPr>
-            <p:ph idx="100" type="title" hasCustomPrompt="1"/>
+            <p:ph type="title" idx="100" hasCustomPrompt="1"/>
           </p:nvPr>
         </p:nvSpPr>
         <p:spPr>
@@ -5495,7 +5292,7 @@
           <a:bodyPr wrap="square" lIns="0" tIns="0" rIns="0" bIns="0" rtlCol="0" anchor="ctr"/>
           <a:lstStyle/>
           <a:p>
-            <a:pPr algn="l" indent="0" marL="0">
+            <a:pPr marL="0" indent="0" algn="l">
               <a:buNone/>
             </a:pPr>
             <a:r>
@@ -5512,14 +5309,14 @@
       </p:sp>
       <p:pic>
         <p:nvPicPr>
-          <p:cNvPr id="3" name="02_mix_ocasiao" descr="/home/claude/case/reports/figures/slides/02_mix_ocasiao.png">    </p:cNvPr>
+          <p:cNvPr id="3" name="02_mix_ocasiao" descr="/home/claude/case/reports/figures/slides/02_mix_ocasiao.png"/>
           <p:cNvPicPr>
             <a:picLocks noChangeAspect="1"/>
           </p:cNvPicPr>
           <p:nvPr/>
         </p:nvPicPr>
         <p:blipFill>
-          <a:blip r:embed="rId1"/>
+          <a:blip r:embed="rId3"/>
           <a:stretch>
             <a:fillRect/>
           </a:stretch>
@@ -5555,7 +5352,7 @@
           <a:bodyPr wrap="square" lIns="0" tIns="0" rIns="0" bIns="0" rtlCol="0" anchor="t"/>
           <a:lstStyle/>
           <a:p>
-            <a:pPr indent="0" marL="0">
+            <a:pPr marL="0" indent="0">
               <a:buNone/>
             </a:pPr>
             <a:r>
@@ -5566,9 +5363,6 @@
               </a:rPr>
               <a:t>Gifts: 8% da receita num dia típico, 21% antes do Dia das Mães e 18% antes dos Namorados. Perfumaria masculina vai a 36% nos Namorados. </a:t>
             </a:r>
-            <a:pPr indent="0" marL="0">
-              <a:buNone/>
-            </a:pPr>
             <a:r>
               <a:rPr lang="en-US" sz="1600" b="1" dirty="0">
                 <a:solidFill>
@@ -5601,7 +5395,7 @@
           </a:prstGeom>
           <a:extLst>
             <a:ext uri="{C572A759-6A51-4108-AA02-DFA0A04FC94B}">
-              <ma14:wrappingTextBoxFlag xmlns:ma14="http://schemas.microsoft.com/office/mac/drawingml/2011/main" val="0"/>
+              <ma14:wrappingTextBoxFlag xmlns="" xmlns:ma14="http://schemas.microsoft.com/office/mac/drawingml/2011/main" val="0"/>
             </a:ext>
           </a:extLst>
         </p:spPr>
@@ -5619,7 +5413,7 @@
           <a:p>
             <a:pPr algn="r"/>
             <a:fld id="{F7021451-1387-4CA6-816F-3879F97B5CBC}" type="slidenum">
-              <a:rPr b="0" lang="en-US"/>
+              <a:rPr lang="en-US" b="0"/>
               <a:t>12</a:t>
             </a:fld>
             <a:endParaRPr lang="en-US"/>
@@ -5654,9 +5448,11 @@
       <p:sp>
         <p:nvSpPr>
           <p:cNvPr id="2" name="Text 0"/>
-          <p:cNvSpPr/>
+          <p:cNvSpPr>
+            <a:spLocks noGrp="1"/>
+          </p:cNvSpPr>
           <p:nvPr>
-            <p:ph idx="100" type="title" hasCustomPrompt="1"/>
+            <p:ph type="title" idx="100" hasCustomPrompt="1"/>
           </p:nvPr>
         </p:nvSpPr>
         <p:spPr>
@@ -5674,7 +5470,7 @@
           <a:bodyPr wrap="square" lIns="0" tIns="0" rIns="0" bIns="0" rtlCol="0" anchor="ctr"/>
           <a:lstStyle/>
           <a:p>
-            <a:pPr algn="l" indent="0" marL="0">
+            <a:pPr marL="0" indent="0" algn="l">
               <a:buNone/>
             </a:pPr>
             <a:r>
@@ -5691,7 +5487,7 @@
       </p:sp>
       <p:graphicFrame>
         <p:nvGraphicFramePr>
-          <p:cNvPr id="3" name="Chart 0" descr=""/>
+          <p:cNvPr id="3" name="Chart 0"/>
           <p:cNvGraphicFramePr/>
           <p:nvPr/>
         </p:nvGraphicFramePr>
@@ -5699,9 +5495,9 @@
           <a:off x="548640" y="1417320"/>
           <a:ext cx="6583680" cy="4480560"/>
         </p:xfrm>
-        <a:graphic xmlns:a="http://schemas.openxmlformats.org/drawingml/2006/main">
+        <a:graphic>
           <a:graphicData uri="http://schemas.openxmlformats.org/drawingml/2006/chart">
-            <c:chart xmlns:c="http://schemas.openxmlformats.org/drawingml/2006/chart" r:id="rId1"/>
+            <c:chart xmlns:c="http://schemas.openxmlformats.org/drawingml/2006/chart" xmlns:r="http://schemas.openxmlformats.org/officeDocument/2006/relationships" r:id="rId3"/>
           </a:graphicData>
         </a:graphic>
       </p:graphicFrame>
@@ -5721,16 +5517,34 @@
         </p:nvGraphicFramePr>
         <p:xfrm>
           <a:off x="7498080" y="1600200"/>
-          <a:ext cx="4114800" cy="914400"/>
+          <a:ext cx="4114800" cy="2286000"/>
         </p:xfrm>
         <a:graphic>
           <a:graphicData uri="http://schemas.openxmlformats.org/drawingml/2006/table">
             <a:tbl>
               <a:tblPr/>
               <a:tblGrid>
-                <a:gridCol w="1737360"/>
-                <a:gridCol w="1188720"/>
-                <a:gridCol w="1188720"/>
+                <a:gridCol w="1737360">
+                  <a:extLst>
+                    <a:ext uri="{9D8B030D-6E8A-4147-A177-3AD203B41FA5}">
+                      <a16:colId xmlns:a16="http://schemas.microsoft.com/office/drawing/2014/main" val="20000"/>
+                    </a:ext>
+                  </a:extLst>
+                </a:gridCol>
+                <a:gridCol w="1188720">
+                  <a:extLst>
+                    <a:ext uri="{9D8B030D-6E8A-4147-A177-3AD203B41FA5}">
+                      <a16:colId xmlns:a16="http://schemas.microsoft.com/office/drawing/2014/main" val="20001"/>
+                    </a:ext>
+                  </a:extLst>
+                </a:gridCol>
+                <a:gridCol w="1188720">
+                  <a:extLst>
+                    <a:ext uri="{9D8B030D-6E8A-4147-A177-3AD203B41FA5}">
+                      <a16:colId xmlns:a16="http://schemas.microsoft.com/office/drawing/2014/main" val="20002"/>
+                    </a:ext>
+                  </a:extLst>
+                </a:gridCol>
               </a:tblGrid>
               <a:tr h="457200">
                 <a:tc>
@@ -5738,13 +5552,13 @@
                     <a:bodyPr/>
                     <a:lstStyle/>
                     <a:p>
-                      <a:pPr indent="0" marL="0">
+                      <a:pPr marL="0" indent="0">
                         <a:buNone/>
                       </a:pPr>
                       <a:endParaRPr lang="en-US" sz="1400" dirty="0"/>
                     </a:p>
                   </a:txBody>
-                  <a:tcPr marL="91440" marR="91440" marT="45720" marB="45720" anchor="ctr">
+                  <a:tcPr anchor="ctr">
                     <a:lnL w="0" cap="flat" cmpd="sng" algn="ctr">
                       <a:noFill/>
                     </a:lnL>
@@ -5767,7 +5581,7 @@
                     <a:bodyPr/>
                     <a:lstStyle/>
                     <a:p>
-                      <a:pPr indent="0" marL="0">
+                      <a:pPr marL="0" indent="0">
                         <a:buNone/>
                       </a:pPr>
                       <a:r>
@@ -5781,7 +5595,7 @@
                       <a:endParaRPr lang="en-US" sz="1400" dirty="0"/>
                     </a:p>
                   </a:txBody>
-                  <a:tcPr marL="91440" marR="91440" marT="45720" marB="45720" anchor="ctr">
+                  <a:tcPr anchor="ctr">
                     <a:lnL w="0" cap="flat" cmpd="sng" algn="ctr">
                       <a:noFill/>
                     </a:lnL>
@@ -5804,7 +5618,7 @@
                     <a:bodyPr/>
                     <a:lstStyle/>
                     <a:p>
-                      <a:pPr indent="0" marL="0">
+                      <a:pPr marL="0" indent="0">
                         <a:buNone/>
                       </a:pPr>
                       <a:r>
@@ -5818,7 +5632,7 @@
                       <a:endParaRPr lang="en-US" sz="1400" dirty="0"/>
                     </a:p>
                   </a:txBody>
-                  <a:tcPr marL="91440" marR="91440" marT="45720" marB="45720" anchor="ctr">
+                  <a:tcPr anchor="ctr">
                     <a:lnL w="0" cap="flat" cmpd="sng" algn="ctr">
                       <a:noFill/>
                     </a:lnL>
@@ -5836,6 +5650,11 @@
                     </a:solidFill>
                   </a:tcPr>
                 </a:tc>
+                <a:extLst>
+                  <a:ext uri="{0D108BD9-81ED-4DB2-BD59-A6C34878D82A}">
+                    <a16:rowId xmlns:a16="http://schemas.microsoft.com/office/drawing/2014/main" val="10000"/>
+                  </a:ext>
+                </a:extLst>
               </a:tr>
               <a:tr h="457200">
                 <a:tc>
@@ -5843,7 +5662,7 @@
                     <a:bodyPr/>
                     <a:lstStyle/>
                     <a:p>
-                      <a:pPr indent="0" marL="0">
+                      <a:pPr marL="0" indent="0">
                         <a:buNone/>
                       </a:pPr>
                       <a:r>
@@ -5857,7 +5676,7 @@
                       <a:endParaRPr lang="en-US" sz="1400" dirty="0"/>
                     </a:p>
                   </a:txBody>
-                  <a:tcPr marL="91440" marR="91440" marT="45720" marB="45720" anchor="ctr">
+                  <a:tcPr anchor="ctr">
                     <a:lnL w="0" cap="flat" cmpd="sng" algn="ctr">
                       <a:noFill/>
                     </a:lnL>
@@ -5880,7 +5699,7 @@
                     <a:bodyPr/>
                     <a:lstStyle/>
                     <a:p>
-                      <a:pPr indent="0" marL="0">
+                      <a:pPr marL="0" indent="0">
                         <a:buNone/>
                       </a:pPr>
                       <a:r>
@@ -5894,7 +5713,7 @@
                       <a:endParaRPr lang="en-US" sz="1400" dirty="0"/>
                     </a:p>
                   </a:txBody>
-                  <a:tcPr marL="91440" marR="91440" marT="45720" marB="45720" anchor="ctr">
+                  <a:tcPr anchor="ctr">
                     <a:lnL w="0" cap="flat" cmpd="sng" algn="ctr">
                       <a:noFill/>
                     </a:lnL>
@@ -5917,7 +5736,7 @@
                     <a:bodyPr/>
                     <a:lstStyle/>
                     <a:p>
-                      <a:pPr indent="0" marL="0">
+                      <a:pPr marL="0" indent="0">
                         <a:buNone/>
                       </a:pPr>
                       <a:r>
@@ -5931,7 +5750,7 @@
                       <a:endParaRPr lang="en-US" sz="1400" dirty="0"/>
                     </a:p>
                   </a:txBody>
-                  <a:tcPr marL="91440" marR="91440" marT="45720" marB="45720" anchor="ctr">
+                  <a:tcPr anchor="ctr">
                     <a:lnL w="0" cap="flat" cmpd="sng" algn="ctr">
                       <a:noFill/>
                     </a:lnL>
@@ -5949,6 +5768,11 @@
                     </a:solidFill>
                   </a:tcPr>
                 </a:tc>
+                <a:extLst>
+                  <a:ext uri="{0D108BD9-81ED-4DB2-BD59-A6C34878D82A}">
+                    <a16:rowId xmlns:a16="http://schemas.microsoft.com/office/drawing/2014/main" val="10001"/>
+                  </a:ext>
+                </a:extLst>
               </a:tr>
               <a:tr h="457200">
                 <a:tc>
@@ -5956,7 +5780,7 @@
                     <a:bodyPr/>
                     <a:lstStyle/>
                     <a:p>
-                      <a:pPr indent="0" marL="0">
+                      <a:pPr marL="0" indent="0">
                         <a:buNone/>
                       </a:pPr>
                       <a:r>
@@ -5970,7 +5794,7 @@
                       <a:endParaRPr lang="en-US" sz="1400" dirty="0"/>
                     </a:p>
                   </a:txBody>
-                  <a:tcPr marL="91440" marR="91440" marT="45720" marB="45720" anchor="ctr">
+                  <a:tcPr anchor="ctr">
                     <a:lnL w="0" cap="flat" cmpd="sng" algn="ctr">
                       <a:noFill/>
                     </a:lnL>
@@ -5993,7 +5817,7 @@
                     <a:bodyPr/>
                     <a:lstStyle/>
                     <a:p>
-                      <a:pPr indent="0" marL="0">
+                      <a:pPr marL="0" indent="0">
                         <a:buNone/>
                       </a:pPr>
                       <a:r>
@@ -6007,7 +5831,7 @@
                       <a:endParaRPr lang="en-US" sz="1400" dirty="0"/>
                     </a:p>
                   </a:txBody>
-                  <a:tcPr marL="91440" marR="91440" marT="45720" marB="45720" anchor="ctr">
+                  <a:tcPr anchor="ctr">
                     <a:lnL w="0" cap="flat" cmpd="sng" algn="ctr">
                       <a:noFill/>
                     </a:lnL>
@@ -6030,7 +5854,7 @@
                     <a:bodyPr/>
                     <a:lstStyle/>
                     <a:p>
-                      <a:pPr indent="0" marL="0">
+                      <a:pPr marL="0" indent="0">
                         <a:buNone/>
                       </a:pPr>
                       <a:r>
@@ -6044,7 +5868,7 @@
                       <a:endParaRPr lang="en-US" sz="1400" dirty="0"/>
                     </a:p>
                   </a:txBody>
-                  <a:tcPr marL="91440" marR="91440" marT="45720" marB="45720" anchor="ctr">
+                  <a:tcPr anchor="ctr">
                     <a:lnL w="0" cap="flat" cmpd="sng" algn="ctr">
                       <a:noFill/>
                     </a:lnL>
@@ -6062,6 +5886,11 @@
                     </a:solidFill>
                   </a:tcPr>
                 </a:tc>
+                <a:extLst>
+                  <a:ext uri="{0D108BD9-81ED-4DB2-BD59-A6C34878D82A}">
+                    <a16:rowId xmlns:a16="http://schemas.microsoft.com/office/drawing/2014/main" val="10002"/>
+                  </a:ext>
+                </a:extLst>
               </a:tr>
               <a:tr h="457200">
                 <a:tc>
@@ -6069,7 +5898,7 @@
                     <a:bodyPr/>
                     <a:lstStyle/>
                     <a:p>
-                      <a:pPr indent="0" marL="0">
+                      <a:pPr marL="0" indent="0">
                         <a:buNone/>
                       </a:pPr>
                       <a:r>
@@ -6083,7 +5912,7 @@
                       <a:endParaRPr lang="en-US" sz="1400" dirty="0"/>
                     </a:p>
                   </a:txBody>
-                  <a:tcPr marL="91440" marR="91440" marT="45720" marB="45720" anchor="ctr">
+                  <a:tcPr anchor="ctr">
                     <a:lnL w="0" cap="flat" cmpd="sng" algn="ctr">
                       <a:noFill/>
                     </a:lnL>
@@ -6106,7 +5935,7 @@
                     <a:bodyPr/>
                     <a:lstStyle/>
                     <a:p>
-                      <a:pPr indent="0" marL="0">
+                      <a:pPr marL="0" indent="0">
                         <a:buNone/>
                       </a:pPr>
                       <a:r>
@@ -6120,7 +5949,7 @@
                       <a:endParaRPr lang="en-US" sz="1400" dirty="0"/>
                     </a:p>
                   </a:txBody>
-                  <a:tcPr marL="91440" marR="91440" marT="45720" marB="45720" anchor="ctr">
+                  <a:tcPr anchor="ctr">
                     <a:lnL w="0" cap="flat" cmpd="sng" algn="ctr">
                       <a:noFill/>
                     </a:lnL>
@@ -6143,7 +5972,7 @@
                     <a:bodyPr/>
                     <a:lstStyle/>
                     <a:p>
-                      <a:pPr indent="0" marL="0">
+                      <a:pPr marL="0" indent="0">
                         <a:buNone/>
                       </a:pPr>
                       <a:r>
@@ -6157,7 +5986,7 @@
                       <a:endParaRPr lang="en-US" sz="1400" dirty="0"/>
                     </a:p>
                   </a:txBody>
-                  <a:tcPr marL="91440" marR="91440" marT="45720" marB="45720" anchor="ctr">
+                  <a:tcPr anchor="ctr">
                     <a:lnL w="0" cap="flat" cmpd="sng" algn="ctr">
                       <a:noFill/>
                     </a:lnL>
@@ -6175,6 +6004,11 @@
                     </a:solidFill>
                   </a:tcPr>
                 </a:tc>
+                <a:extLst>
+                  <a:ext uri="{0D108BD9-81ED-4DB2-BD59-A6C34878D82A}">
+                    <a16:rowId xmlns:a16="http://schemas.microsoft.com/office/drawing/2014/main" val="10003"/>
+                  </a:ext>
+                </a:extLst>
               </a:tr>
               <a:tr h="457200">
                 <a:tc>
@@ -6182,7 +6016,7 @@
                     <a:bodyPr/>
                     <a:lstStyle/>
                     <a:p>
-                      <a:pPr indent="0" marL="0">
+                      <a:pPr marL="0" indent="0">
                         <a:buNone/>
                       </a:pPr>
                       <a:r>
@@ -6196,7 +6030,7 @@
                       <a:endParaRPr lang="en-US" sz="1400" dirty="0"/>
                     </a:p>
                   </a:txBody>
-                  <a:tcPr marL="91440" marR="91440" marT="45720" marB="45720" anchor="ctr">
+                  <a:tcPr anchor="ctr">
                     <a:lnL w="0" cap="flat" cmpd="sng" algn="ctr">
                       <a:noFill/>
                     </a:lnL>
@@ -6219,7 +6053,7 @@
                     <a:bodyPr/>
                     <a:lstStyle/>
                     <a:p>
-                      <a:pPr indent="0" marL="0">
+                      <a:pPr marL="0" indent="0">
                         <a:buNone/>
                       </a:pPr>
                       <a:r>
@@ -6233,7 +6067,7 @@
                       <a:endParaRPr lang="en-US" sz="1400" dirty="0"/>
                     </a:p>
                   </a:txBody>
-                  <a:tcPr marL="91440" marR="91440" marT="45720" marB="45720" anchor="ctr">
+                  <a:tcPr anchor="ctr">
                     <a:lnL w="0" cap="flat" cmpd="sng" algn="ctr">
                       <a:noFill/>
                     </a:lnL>
@@ -6256,7 +6090,7 @@
                     <a:bodyPr/>
                     <a:lstStyle/>
                     <a:p>
-                      <a:pPr indent="0" marL="0">
+                      <a:pPr marL="0" indent="0">
                         <a:buNone/>
                       </a:pPr>
                       <a:r>
@@ -6270,7 +6104,7 @@
                       <a:endParaRPr lang="en-US" sz="1400" dirty="0"/>
                     </a:p>
                   </a:txBody>
-                  <a:tcPr marL="91440" marR="91440" marT="45720" marB="45720" anchor="ctr">
+                  <a:tcPr anchor="ctr">
                     <a:lnL w="0" cap="flat" cmpd="sng" algn="ctr">
                       <a:noFill/>
                     </a:lnL>
@@ -6288,6 +6122,11 @@
                     </a:solidFill>
                   </a:tcPr>
                 </a:tc>
+                <a:extLst>
+                  <a:ext uri="{0D108BD9-81ED-4DB2-BD59-A6C34878D82A}">
+                    <a16:rowId xmlns:a16="http://schemas.microsoft.com/office/drawing/2014/main" val="10004"/>
+                  </a:ext>
+                </a:extLst>
               </a:tr>
             </a:tbl>
           </a:graphicData>
@@ -6314,7 +6153,7 @@
           <a:bodyPr wrap="square" lIns="0" tIns="0" rIns="0" bIns="0" rtlCol="0" anchor="t"/>
           <a:lstStyle/>
           <a:p>
-            <a:pPr indent="0" marL="0">
+            <a:pPr marL="0" indent="0">
               <a:buNone/>
             </a:pPr>
             <a:r>
@@ -6349,7 +6188,7 @@
           </a:prstGeom>
           <a:extLst>
             <a:ext uri="{C572A759-6A51-4108-AA02-DFA0A04FC94B}">
-              <ma14:wrappingTextBoxFlag xmlns:ma14="http://schemas.microsoft.com/office/mac/drawingml/2011/main" val="0"/>
+              <ma14:wrappingTextBoxFlag xmlns="" xmlns:ma14="http://schemas.microsoft.com/office/mac/drawingml/2011/main" val="0"/>
             </a:ext>
           </a:extLst>
         </p:spPr>
@@ -6367,7 +6206,7 @@
           <a:p>
             <a:pPr algn="r"/>
             <a:fld id="{F7021451-1387-4CA6-816F-3879F97B5CBC}" type="slidenum">
-              <a:rPr b="0" lang="en-US"/>
+              <a:rPr lang="en-US" b="0"/>
               <a:t>13</a:t>
             </a:fld>
             <a:endParaRPr lang="en-US"/>
@@ -6402,9 +6241,11 @@
       <p:sp>
         <p:nvSpPr>
           <p:cNvPr id="2" name="Text 0"/>
-          <p:cNvSpPr/>
+          <p:cNvSpPr>
+            <a:spLocks noGrp="1"/>
+          </p:cNvSpPr>
           <p:nvPr>
-            <p:ph idx="100" type="title" hasCustomPrompt="1"/>
+            <p:ph type="title" idx="100" hasCustomPrompt="1"/>
           </p:nvPr>
         </p:nvSpPr>
         <p:spPr>
@@ -6422,7 +6263,7 @@
           <a:bodyPr wrap="square" lIns="0" tIns="0" rIns="0" bIns="0" rtlCol="0" anchor="ctr"/>
           <a:lstStyle/>
           <a:p>
-            <a:pPr algn="l" indent="0" marL="0">
+            <a:pPr marL="0" indent="0" algn="l">
               <a:buNone/>
             </a:pPr>
             <a:r>
@@ -6480,7 +6321,7 @@
           <a:bodyPr wrap="square" lIns="0" tIns="0" rIns="0" bIns="0" rtlCol="0" anchor="t"/>
           <a:lstStyle/>
           <a:p>
-            <a:pPr indent="0" marL="0">
+            <a:pPr marL="0" indent="0">
               <a:buNone/>
             </a:pPr>
             <a:r>
@@ -6516,7 +6357,7 @@
           <a:bodyPr wrap="square" lIns="0" tIns="0" rIns="0" bIns="0" rtlCol="0" anchor="t"/>
           <a:lstStyle/>
           <a:p>
-            <a:pPr indent="0" marL="0">
+            <a:pPr marL="0" indent="0">
               <a:buNone/>
             </a:pPr>
             <a:r>
@@ -6552,7 +6393,7 @@
           <a:bodyPr wrap="square" lIns="0" tIns="0" rIns="0" bIns="0" rtlCol="0" anchor="t"/>
           <a:lstStyle/>
           <a:p>
-            <a:pPr indent="0" marL="0">
+            <a:pPr marL="0" indent="0">
               <a:buNone/>
             </a:pPr>
             <a:r>
@@ -6610,7 +6451,7 @@
           <a:bodyPr wrap="square" lIns="0" tIns="0" rIns="0" bIns="0" rtlCol="0" anchor="t"/>
           <a:lstStyle/>
           <a:p>
-            <a:pPr indent="0" marL="0">
+            <a:pPr marL="0" indent="0">
               <a:buNone/>
             </a:pPr>
             <a:r>
@@ -6646,7 +6487,7 @@
           <a:bodyPr wrap="square" lIns="0" tIns="0" rIns="0" bIns="0" rtlCol="0" anchor="t"/>
           <a:lstStyle/>
           <a:p>
-            <a:pPr indent="0" marL="0">
+            <a:pPr marL="0" indent="0">
               <a:buNone/>
             </a:pPr>
             <a:r>
@@ -6682,7 +6523,7 @@
           <a:bodyPr wrap="square" lIns="0" tIns="0" rIns="0" bIns="0" rtlCol="0" anchor="t"/>
           <a:lstStyle/>
           <a:p>
-            <a:pPr indent="0" marL="0">
+            <a:pPr marL="0" indent="0">
               <a:buNone/>
             </a:pPr>
             <a:r>
@@ -6740,7 +6581,7 @@
           <a:bodyPr wrap="square" lIns="0" tIns="0" rIns="0" bIns="0" rtlCol="0" anchor="t"/>
           <a:lstStyle/>
           <a:p>
-            <a:pPr indent="0" marL="0">
+            <a:pPr marL="0" indent="0">
               <a:buNone/>
             </a:pPr>
             <a:r>
@@ -6776,7 +6617,7 @@
           <a:bodyPr wrap="square" lIns="0" tIns="0" rIns="0" bIns="0" rtlCol="0" anchor="t"/>
           <a:lstStyle/>
           <a:p>
-            <a:pPr indent="0" marL="0">
+            <a:pPr marL="0" indent="0">
               <a:buNone/>
             </a:pPr>
             <a:r>
@@ -6812,7 +6653,7 @@
           <a:bodyPr wrap="square" lIns="0" tIns="0" rIns="0" bIns="0" rtlCol="0" anchor="t"/>
           <a:lstStyle/>
           <a:p>
-            <a:pPr indent="0" marL="0">
+            <a:pPr marL="0" indent="0">
               <a:buNone/>
             </a:pPr>
             <a:r>
@@ -6870,7 +6711,7 @@
           <a:bodyPr wrap="square" lIns="0" tIns="0" rIns="0" bIns="0" rtlCol="0" anchor="t"/>
           <a:lstStyle/>
           <a:p>
-            <a:pPr indent="0" marL="0">
+            <a:pPr marL="0" indent="0">
               <a:buNone/>
             </a:pPr>
             <a:r>
@@ -6906,7 +6747,7 @@
           <a:bodyPr wrap="square" lIns="0" tIns="0" rIns="0" bIns="0" rtlCol="0" anchor="t"/>
           <a:lstStyle/>
           <a:p>
-            <a:pPr indent="0" marL="0">
+            <a:pPr marL="0" indent="0">
               <a:buNone/>
             </a:pPr>
             <a:r>
@@ -6942,7 +6783,7 @@
           <a:bodyPr wrap="square" lIns="0" tIns="0" rIns="0" bIns="0" rtlCol="0" anchor="t"/>
           <a:lstStyle/>
           <a:p>
-            <a:pPr indent="0" marL="0">
+            <a:pPr marL="0" indent="0">
               <a:buNone/>
             </a:pPr>
             <a:r>
@@ -7000,7 +6841,7 @@
           <a:bodyPr wrap="square" lIns="0" tIns="0" rIns="0" bIns="0" rtlCol="0" anchor="t"/>
           <a:lstStyle/>
           <a:p>
-            <a:pPr indent="0" marL="0">
+            <a:pPr marL="0" indent="0">
               <a:buNone/>
             </a:pPr>
             <a:r>
@@ -7036,7 +6877,7 @@
           <a:bodyPr wrap="square" lIns="0" tIns="0" rIns="0" bIns="0" rtlCol="0" anchor="t"/>
           <a:lstStyle/>
           <a:p>
-            <a:pPr indent="0" marL="0">
+            <a:pPr marL="0" indent="0">
               <a:buNone/>
             </a:pPr>
             <a:r>
@@ -7072,7 +6913,7 @@
           <a:bodyPr wrap="square" lIns="0" tIns="0" rIns="0" bIns="0" rtlCol="0" anchor="t"/>
           <a:lstStyle/>
           <a:p>
-            <a:pPr indent="0" marL="0">
+            <a:pPr marL="0" indent="0">
               <a:buNone/>
             </a:pPr>
             <a:r>
@@ -7130,7 +6971,7 @@
           <a:bodyPr wrap="square" lIns="0" tIns="0" rIns="0" bIns="0" rtlCol="0" anchor="t"/>
           <a:lstStyle/>
           <a:p>
-            <a:pPr indent="0" marL="0">
+            <a:pPr marL="0" indent="0">
               <a:buNone/>
             </a:pPr>
             <a:r>
@@ -7166,7 +7007,7 @@
           <a:bodyPr wrap="square" lIns="0" tIns="0" rIns="0" bIns="0" rtlCol="0" anchor="t"/>
           <a:lstStyle/>
           <a:p>
-            <a:pPr indent="0" marL="0">
+            <a:pPr marL="0" indent="0">
               <a:buNone/>
             </a:pPr>
             <a:r>
@@ -7202,7 +7043,7 @@
           <a:bodyPr wrap="square" lIns="0" tIns="0" rIns="0" bIns="0" rtlCol="0" anchor="t"/>
           <a:lstStyle/>
           <a:p>
-            <a:pPr indent="0" marL="0">
+            <a:pPr marL="0" indent="0">
               <a:buNone/>
             </a:pPr>
             <a:r>
@@ -7219,7 +7060,7 @@
       </p:sp>
       <p:sp>
         <p:nvSpPr>
-          <p:cNvPr id="25" name="Slide Number Placeholder 0"/>
+          <p:cNvPr id="27" name="Slide Number Placeholder 0"/>
           <p:cNvSpPr>
             <a:spLocks noGrp="1"/>
           </p:cNvSpPr>
@@ -7237,7 +7078,7 @@
           </a:prstGeom>
           <a:extLst>
             <a:ext uri="{C572A759-6A51-4108-AA02-DFA0A04FC94B}">
-              <ma14:wrappingTextBoxFlag xmlns:ma14="http://schemas.microsoft.com/office/mac/drawingml/2011/main" val="0"/>
+              <ma14:wrappingTextBoxFlag xmlns="" xmlns:ma14="http://schemas.microsoft.com/office/mac/drawingml/2011/main" val="0"/>
             </a:ext>
           </a:extLst>
         </p:spPr>
@@ -7255,7 +7096,7 @@
           <a:p>
             <a:pPr algn="r"/>
             <a:fld id="{F7021451-1387-4CA6-816F-3879F97B5CBC}" type="slidenum">
-              <a:rPr b="0" lang="en-US"/>
+              <a:rPr lang="en-US" b="0"/>
               <a:t>14</a:t>
             </a:fld>
             <a:endParaRPr lang="en-US"/>
@@ -7290,9 +7131,11 @@
       <p:sp>
         <p:nvSpPr>
           <p:cNvPr id="2" name="Text 0"/>
-          <p:cNvSpPr/>
+          <p:cNvSpPr>
+            <a:spLocks noGrp="1"/>
+          </p:cNvSpPr>
           <p:nvPr>
-            <p:ph idx="100" type="body" hasCustomPrompt="1"/>
+            <p:ph type="body" idx="100" hasCustomPrompt="1"/>
           </p:nvPr>
         </p:nvSpPr>
         <p:spPr>
@@ -7310,7 +7153,7 @@
           <a:bodyPr wrap="square" lIns="0" tIns="0" rIns="0" bIns="0" rtlCol="0"/>
           <a:lstStyle/>
           <a:p>
-            <a:pPr algn="l" indent="0" marL="0">
+            <a:pPr marL="0" indent="0" algn="l">
               <a:buNone/>
             </a:pPr>
             <a:r>
@@ -7328,9 +7171,11 @@
       <p:sp>
         <p:nvSpPr>
           <p:cNvPr id="3" name="Text 0"/>
-          <p:cNvSpPr/>
+          <p:cNvSpPr>
+            <a:spLocks noGrp="1"/>
+          </p:cNvSpPr>
           <p:nvPr>
-            <p:ph idx="101" type="title" hasCustomPrompt="1"/>
+            <p:ph type="title" idx="101" hasCustomPrompt="1"/>
           </p:nvPr>
         </p:nvSpPr>
         <p:spPr>
@@ -7348,7 +7193,7 @@
           <a:bodyPr wrap="square" lIns="0" tIns="0" rIns="0" bIns="0" rtlCol="0" anchor="t"/>
           <a:lstStyle/>
           <a:p>
-            <a:pPr algn="l" indent="0" marL="0">
+            <a:pPr marL="0" indent="0" algn="l">
               <a:buNone/>
             </a:pPr>
             <a:r>
@@ -7383,7 +7228,7 @@
           </a:prstGeom>
           <a:extLst>
             <a:ext uri="{C572A759-6A51-4108-AA02-DFA0A04FC94B}">
-              <ma14:wrappingTextBoxFlag xmlns:ma14="http://schemas.microsoft.com/office/mac/drawingml/2011/main" val="0"/>
+              <ma14:wrappingTextBoxFlag xmlns="" xmlns:ma14="http://schemas.microsoft.com/office/mac/drawingml/2011/main" val="0"/>
             </a:ext>
           </a:extLst>
         </p:spPr>
@@ -7401,7 +7246,7 @@
           <a:p>
             <a:pPr algn="r"/>
             <a:fld id="{F7021451-1387-4CA6-816F-3879F97B5CBC}" type="slidenum">
-              <a:rPr b="0" lang="en-US"/>
+              <a:rPr lang="en-US" b="0"/>
               <a:t>15</a:t>
             </a:fld>
             <a:endParaRPr lang="en-US"/>
@@ -7436,9 +7281,11 @@
       <p:sp>
         <p:nvSpPr>
           <p:cNvPr id="2" name="Text 0"/>
-          <p:cNvSpPr/>
+          <p:cNvSpPr>
+            <a:spLocks noGrp="1"/>
+          </p:cNvSpPr>
           <p:nvPr>
-            <p:ph idx="100" type="title" hasCustomPrompt="1"/>
+            <p:ph type="title" idx="100" hasCustomPrompt="1"/>
           </p:nvPr>
         </p:nvSpPr>
         <p:spPr>
@@ -7456,7 +7303,7 @@
           <a:bodyPr wrap="square" lIns="0" tIns="0" rIns="0" bIns="0" rtlCol="0" anchor="ctr"/>
           <a:lstStyle/>
           <a:p>
-            <a:pPr algn="l" indent="0" marL="0">
+            <a:pPr marL="0" indent="0" algn="l">
               <a:buNone/>
             </a:pPr>
             <a:r>
@@ -7514,7 +7361,7 @@
           <a:bodyPr wrap="square" lIns="0" tIns="0" rIns="0" bIns="0" rtlCol="0" anchor="t"/>
           <a:lstStyle/>
           <a:p>
-            <a:pPr indent="0" marL="0">
+            <a:pPr marL="0" indent="0">
               <a:buNone/>
             </a:pPr>
             <a:r>
@@ -7550,7 +7397,7 @@
           <a:bodyPr wrap="square" lIns="0" tIns="0" rIns="0" bIns="0" rtlCol="0" anchor="t"/>
           <a:lstStyle/>
           <a:p>
-            <a:pPr indent="0" marL="0">
+            <a:pPr marL="0" indent="0">
               <a:buNone/>
             </a:pPr>
             <a:r>
@@ -7608,7 +7455,7 @@
           <a:bodyPr wrap="square" lIns="0" tIns="0" rIns="0" bIns="0" rtlCol="0" anchor="t"/>
           <a:lstStyle/>
           <a:p>
-            <a:pPr indent="0" marL="0">
+            <a:pPr marL="0" indent="0">
               <a:buNone/>
             </a:pPr>
             <a:r>
@@ -7644,7 +7491,7 @@
           <a:bodyPr wrap="square" lIns="0" tIns="0" rIns="0" bIns="0" rtlCol="0" anchor="t"/>
           <a:lstStyle/>
           <a:p>
-            <a:pPr indent="0" marL="0">
+            <a:pPr marL="0" indent="0">
               <a:buNone/>
             </a:pPr>
             <a:r>
@@ -7702,7 +7549,7 @@
           <a:bodyPr wrap="square" lIns="0" tIns="0" rIns="0" bIns="0" rtlCol="0" anchor="t"/>
           <a:lstStyle/>
           <a:p>
-            <a:pPr indent="0" marL="0">
+            <a:pPr marL="0" indent="0">
               <a:buNone/>
             </a:pPr>
             <a:r>
@@ -7738,7 +7585,7 @@
           <a:bodyPr wrap="square" lIns="0" tIns="0" rIns="0" bIns="0" rtlCol="0" anchor="t"/>
           <a:lstStyle/>
           <a:p>
-            <a:pPr indent="0" marL="0">
+            <a:pPr marL="0" indent="0">
               <a:buNone/>
             </a:pPr>
             <a:r>
@@ -7796,7 +7643,7 @@
           <a:bodyPr wrap="square" lIns="0" tIns="0" rIns="0" bIns="0" rtlCol="0" anchor="t"/>
           <a:lstStyle/>
           <a:p>
-            <a:pPr indent="0" marL="0">
+            <a:pPr marL="0" indent="0">
               <a:buNone/>
             </a:pPr>
             <a:r>
@@ -7832,7 +7679,7 @@
           <a:bodyPr wrap="square" lIns="0" tIns="0" rIns="0" bIns="0" rtlCol="0" anchor="t"/>
           <a:lstStyle/>
           <a:p>
-            <a:pPr indent="0" marL="0">
+            <a:pPr marL="0" indent="0">
               <a:buNone/>
             </a:pPr>
             <a:r>
@@ -7867,7 +7714,7 @@
           </a:prstGeom>
           <a:extLst>
             <a:ext uri="{C572A759-6A51-4108-AA02-DFA0A04FC94B}">
-              <ma14:wrappingTextBoxFlag xmlns:ma14="http://schemas.microsoft.com/office/mac/drawingml/2011/main" val="0"/>
+              <ma14:wrappingTextBoxFlag xmlns="" xmlns:ma14="http://schemas.microsoft.com/office/mac/drawingml/2011/main" val="0"/>
             </a:ext>
           </a:extLst>
         </p:spPr>
@@ -7885,7 +7732,7 @@
           <a:p>
             <a:pPr algn="r"/>
             <a:fld id="{F7021451-1387-4CA6-816F-3879F97B5CBC}" type="slidenum">
-              <a:rPr b="0" lang="en-US"/>
+              <a:rPr lang="en-US" b="0"/>
               <a:t>16</a:t>
             </a:fld>
             <a:endParaRPr lang="en-US"/>
@@ -7920,9 +7767,11 @@
       <p:sp>
         <p:nvSpPr>
           <p:cNvPr id="2" name="Text 0"/>
-          <p:cNvSpPr/>
+          <p:cNvSpPr>
+            <a:spLocks noGrp="1"/>
+          </p:cNvSpPr>
           <p:nvPr>
-            <p:ph idx="100" type="title" hasCustomPrompt="1"/>
+            <p:ph type="title" idx="100" hasCustomPrompt="1"/>
           </p:nvPr>
         </p:nvSpPr>
         <p:spPr>
@@ -7940,7 +7789,7 @@
           <a:bodyPr wrap="square" lIns="0" tIns="0" rIns="0" bIns="0" rtlCol="0" anchor="ctr"/>
           <a:lstStyle/>
           <a:p>
-            <a:pPr algn="l" indent="0" marL="0">
+            <a:pPr marL="0" indent="0" algn="l">
               <a:buNone/>
             </a:pPr>
             <a:r>
@@ -7957,14 +7806,14 @@
       </p:sp>
       <p:pic>
         <p:nvPicPr>
-          <p:cNvPr id="3" name="03_esquema_backtest" descr="/home/claude/case/reports/figures/slides/03_esquema_backtest.png">    </p:cNvPr>
+          <p:cNvPr id="3" name="03_esquema_backtest" descr="/home/claude/case/reports/figures/slides/03_esquema_backtest.png"/>
           <p:cNvPicPr>
             <a:picLocks noChangeAspect="1"/>
           </p:cNvPicPr>
           <p:nvPr/>
         </p:nvPicPr>
         <p:blipFill>
-          <a:blip r:embed="rId1"/>
+          <a:blip r:embed="rId3"/>
           <a:stretch>
             <a:fillRect/>
           </a:stretch>
@@ -8022,7 +7871,7 @@
           <a:bodyPr wrap="square" lIns="0" tIns="0" rIns="0" bIns="0" rtlCol="0" anchor="t"/>
           <a:lstStyle/>
           <a:p>
-            <a:pPr indent="0" marL="0">
+            <a:pPr marL="0" indent="0">
               <a:buNone/>
             </a:pPr>
             <a:r>
@@ -8058,7 +7907,7 @@
           <a:bodyPr wrap="square" lIns="0" tIns="0" rIns="0" bIns="0" rtlCol="0" anchor="t"/>
           <a:lstStyle/>
           <a:p>
-            <a:pPr indent="0" marL="0">
+            <a:pPr marL="0" indent="0">
               <a:buNone/>
             </a:pPr>
             <a:r>
@@ -8116,7 +7965,7 @@
           <a:bodyPr wrap="square" lIns="0" tIns="0" rIns="0" bIns="0" rtlCol="0" anchor="t"/>
           <a:lstStyle/>
           <a:p>
-            <a:pPr indent="0" marL="0">
+            <a:pPr marL="0" indent="0">
               <a:buNone/>
             </a:pPr>
             <a:r>
@@ -8152,7 +8001,7 @@
           <a:bodyPr wrap="square" lIns="0" tIns="0" rIns="0" bIns="0" rtlCol="0" anchor="t"/>
           <a:lstStyle/>
           <a:p>
-            <a:pPr indent="0" marL="0">
+            <a:pPr marL="0" indent="0">
               <a:buNone/>
             </a:pPr>
             <a:r>
@@ -8210,7 +8059,7 @@
           <a:bodyPr wrap="square" lIns="0" tIns="0" rIns="0" bIns="0" rtlCol="0" anchor="t"/>
           <a:lstStyle/>
           <a:p>
-            <a:pPr indent="0" marL="0">
+            <a:pPr marL="0" indent="0">
               <a:buNone/>
             </a:pPr>
             <a:r>
@@ -8246,7 +8095,7 @@
           <a:bodyPr wrap="square" lIns="0" tIns="0" rIns="0" bIns="0" rtlCol="0" anchor="t"/>
           <a:lstStyle/>
           <a:p>
-            <a:pPr indent="0" marL="0">
+            <a:pPr marL="0" indent="0">
               <a:buNone/>
             </a:pPr>
             <a:r>
@@ -8281,7 +8130,7 @@
           </a:prstGeom>
           <a:extLst>
             <a:ext uri="{C572A759-6A51-4108-AA02-DFA0A04FC94B}">
-              <ma14:wrappingTextBoxFlag xmlns:ma14="http://schemas.microsoft.com/office/mac/drawingml/2011/main" val="0"/>
+              <ma14:wrappingTextBoxFlag xmlns="" xmlns:ma14="http://schemas.microsoft.com/office/mac/drawingml/2011/main" val="0"/>
             </a:ext>
           </a:extLst>
         </p:spPr>
@@ -8299,7 +8148,7 @@
           <a:p>
             <a:pPr algn="r"/>
             <a:fld id="{F7021451-1387-4CA6-816F-3879F97B5CBC}" type="slidenum">
-              <a:rPr b="0" lang="en-US"/>
+              <a:rPr lang="en-US" b="0"/>
               <a:t>17</a:t>
             </a:fld>
             <a:endParaRPr lang="en-US"/>
@@ -8334,9 +8183,11 @@
       <p:sp>
         <p:nvSpPr>
           <p:cNvPr id="2" name="Text 0"/>
-          <p:cNvSpPr/>
+          <p:cNvSpPr>
+            <a:spLocks noGrp="1"/>
+          </p:cNvSpPr>
           <p:nvPr>
-            <p:ph idx="100" type="title" hasCustomPrompt="1"/>
+            <p:ph type="title" idx="100" hasCustomPrompt="1"/>
           </p:nvPr>
         </p:nvSpPr>
         <p:spPr>
@@ -8354,7 +8205,7 @@
           <a:bodyPr wrap="square" lIns="0" tIns="0" rIns="0" bIns="0" rtlCol="0" anchor="ctr"/>
           <a:lstStyle/>
           <a:p>
-            <a:pPr algn="l" indent="0" marL="0">
+            <a:pPr marL="0" indent="0" algn="l">
               <a:buNone/>
             </a:pPr>
             <a:r>
@@ -8392,9 +8243,27 @@
             <a:tbl>
               <a:tblPr/>
               <a:tblGrid>
-                <a:gridCol w="3657600"/>
-                <a:gridCol w="5852160"/>
-                <a:gridCol w="1554480"/>
+                <a:gridCol w="3657600">
+                  <a:extLst>
+                    <a:ext uri="{9D8B030D-6E8A-4147-A177-3AD203B41FA5}">
+                      <a16:colId xmlns:a16="http://schemas.microsoft.com/office/drawing/2014/main" val="20000"/>
+                    </a:ext>
+                  </a:extLst>
+                </a:gridCol>
+                <a:gridCol w="5852160">
+                  <a:extLst>
+                    <a:ext uri="{9D8B030D-6E8A-4147-A177-3AD203B41FA5}">
+                      <a16:colId xmlns:a16="http://schemas.microsoft.com/office/drawing/2014/main" val="20001"/>
+                    </a:ext>
+                  </a:extLst>
+                </a:gridCol>
+                <a:gridCol w="1554480">
+                  <a:extLst>
+                    <a:ext uri="{9D8B030D-6E8A-4147-A177-3AD203B41FA5}">
+                      <a16:colId xmlns:a16="http://schemas.microsoft.com/office/drawing/2014/main" val="20002"/>
+                    </a:ext>
+                  </a:extLst>
+                </a:gridCol>
               </a:tblGrid>
               <a:tr h="566928">
                 <a:tc>
@@ -8402,7 +8271,7 @@
                     <a:bodyPr/>
                     <a:lstStyle/>
                     <a:p>
-                      <a:pPr indent="0" marL="0">
+                      <a:pPr marL="0" indent="0">
                         <a:buNone/>
                       </a:pPr>
                       <a:r>
@@ -8416,7 +8285,7 @@
                       <a:endParaRPr lang="en-US" sz="1500" dirty="0"/>
                     </a:p>
                   </a:txBody>
-                  <a:tcPr marL="91440" marR="91440" marT="45720" marB="45720" anchor="ctr">
+                  <a:tcPr anchor="ctr">
                     <a:lnL w="0" cap="flat" cmpd="sng" algn="ctr">
                       <a:noFill/>
                     </a:lnL>
@@ -8439,7 +8308,7 @@
                     <a:bodyPr/>
                     <a:lstStyle/>
                     <a:p>
-                      <a:pPr indent="0" marL="0">
+                      <a:pPr marL="0" indent="0">
                         <a:buNone/>
                       </a:pPr>
                       <a:r>
@@ -8453,7 +8322,7 @@
                       <a:endParaRPr lang="en-US" sz="1500" dirty="0"/>
                     </a:p>
                   </a:txBody>
-                  <a:tcPr marL="91440" marR="91440" marT="45720" marB="45720" anchor="ctr">
+                  <a:tcPr anchor="ctr">
                     <a:lnL w="0" cap="flat" cmpd="sng" algn="ctr">
                       <a:noFill/>
                     </a:lnL>
@@ -8476,7 +8345,7 @@
                     <a:bodyPr/>
                     <a:lstStyle/>
                     <a:p>
-                      <a:pPr indent="0" marL="0">
+                      <a:pPr marL="0" indent="0">
                         <a:buNone/>
                       </a:pPr>
                       <a:r>
@@ -8490,7 +8359,7 @@
                       <a:endParaRPr lang="en-US" sz="1500" dirty="0"/>
                     </a:p>
                   </a:txBody>
-                  <a:tcPr marL="91440" marR="91440" marT="45720" marB="45720" anchor="ctr">
+                  <a:tcPr anchor="ctr">
                     <a:lnL w="0" cap="flat" cmpd="sng" algn="ctr">
                       <a:noFill/>
                     </a:lnL>
@@ -8508,6 +8377,11 @@
                     </a:solidFill>
                   </a:tcPr>
                 </a:tc>
+                <a:extLst>
+                  <a:ext uri="{0D108BD9-81ED-4DB2-BD59-A6C34878D82A}">
+                    <a16:rowId xmlns:a16="http://schemas.microsoft.com/office/drawing/2014/main" val="10000"/>
+                  </a:ext>
+                </a:extLst>
               </a:tr>
               <a:tr h="566928">
                 <a:tc>
@@ -8515,7 +8389,7 @@
                     <a:bodyPr/>
                     <a:lstStyle/>
                     <a:p>
-                      <a:pPr indent="0" marL="0">
+                      <a:pPr marL="0" indent="0">
                         <a:buNone/>
                       </a:pPr>
                       <a:r>
@@ -8529,7 +8403,7 @@
                       <a:endParaRPr lang="en-US" sz="1500" dirty="0"/>
                     </a:p>
                   </a:txBody>
-                  <a:tcPr marL="91440" marR="91440" marT="45720" marB="45720" anchor="ctr">
+                  <a:tcPr anchor="ctr">
                     <a:lnL w="0" cap="flat" cmpd="sng" algn="ctr">
                       <a:noFill/>
                     </a:lnL>
@@ -8552,7 +8426,7 @@
                     <a:bodyPr/>
                     <a:lstStyle/>
                     <a:p>
-                      <a:pPr indent="0" marL="0">
+                      <a:pPr marL="0" indent="0">
                         <a:buNone/>
                       </a:pPr>
                       <a:r>
@@ -8566,7 +8440,7 @@
                       <a:endParaRPr lang="en-US" sz="1500" dirty="0"/>
                     </a:p>
                   </a:txBody>
-                  <a:tcPr marL="91440" marR="91440" marT="45720" marB="45720" anchor="ctr">
+                  <a:tcPr anchor="ctr">
                     <a:lnL w="0" cap="flat" cmpd="sng" algn="ctr">
                       <a:noFill/>
                     </a:lnL>
@@ -8589,7 +8463,7 @@
                     <a:bodyPr/>
                     <a:lstStyle/>
                     <a:p>
-                      <a:pPr indent="0" marL="0">
+                      <a:pPr marL="0" indent="0">
                         <a:buNone/>
                       </a:pPr>
                       <a:r>
@@ -8603,7 +8477,7 @@
                       <a:endParaRPr lang="en-US" sz="1500" dirty="0"/>
                     </a:p>
                   </a:txBody>
-                  <a:tcPr marL="91440" marR="91440" marT="45720" marB="45720" anchor="ctr">
+                  <a:tcPr anchor="ctr">
                     <a:lnL w="0" cap="flat" cmpd="sng" algn="ctr">
                       <a:noFill/>
                     </a:lnL>
@@ -8621,6 +8495,11 @@
                     </a:solidFill>
                   </a:tcPr>
                 </a:tc>
+                <a:extLst>
+                  <a:ext uri="{0D108BD9-81ED-4DB2-BD59-A6C34878D82A}">
+                    <a16:rowId xmlns:a16="http://schemas.microsoft.com/office/drawing/2014/main" val="10001"/>
+                  </a:ext>
+                </a:extLst>
               </a:tr>
               <a:tr h="566928">
                 <a:tc>
@@ -8628,7 +8507,7 @@
                     <a:bodyPr/>
                     <a:lstStyle/>
                     <a:p>
-                      <a:pPr indent="0" marL="0">
+                      <a:pPr marL="0" indent="0">
                         <a:buNone/>
                       </a:pPr>
                       <a:r>
@@ -8642,7 +8521,7 @@
                       <a:endParaRPr lang="en-US" sz="1500" dirty="0"/>
                     </a:p>
                   </a:txBody>
-                  <a:tcPr marL="91440" marR="91440" marT="45720" marB="45720" anchor="ctr">
+                  <a:tcPr anchor="ctr">
                     <a:lnL w="0" cap="flat" cmpd="sng" algn="ctr">
                       <a:noFill/>
                     </a:lnL>
@@ -8665,7 +8544,7 @@
                     <a:bodyPr/>
                     <a:lstStyle/>
                     <a:p>
-                      <a:pPr indent="0" marL="0">
+                      <a:pPr marL="0" indent="0">
                         <a:buNone/>
                       </a:pPr>
                       <a:r>
@@ -8679,7 +8558,7 @@
                       <a:endParaRPr lang="en-US" sz="1500" dirty="0"/>
                     </a:p>
                   </a:txBody>
-                  <a:tcPr marL="91440" marR="91440" marT="45720" marB="45720" anchor="ctr">
+                  <a:tcPr anchor="ctr">
                     <a:lnL w="0" cap="flat" cmpd="sng" algn="ctr">
                       <a:noFill/>
                     </a:lnL>
@@ -8702,7 +8581,7 @@
                     <a:bodyPr/>
                     <a:lstStyle/>
                     <a:p>
-                      <a:pPr indent="0" marL="0">
+                      <a:pPr marL="0" indent="0">
                         <a:buNone/>
                       </a:pPr>
                       <a:r>
@@ -8716,7 +8595,7 @@
                       <a:endParaRPr lang="en-US" sz="1500" dirty="0"/>
                     </a:p>
                   </a:txBody>
-                  <a:tcPr marL="91440" marR="91440" marT="45720" marB="45720" anchor="ctr">
+                  <a:tcPr anchor="ctr">
                     <a:lnL w="0" cap="flat" cmpd="sng" algn="ctr">
                       <a:noFill/>
                     </a:lnL>
@@ -8734,6 +8613,11 @@
                     </a:solidFill>
                   </a:tcPr>
                 </a:tc>
+                <a:extLst>
+                  <a:ext uri="{0D108BD9-81ED-4DB2-BD59-A6C34878D82A}">
+                    <a16:rowId xmlns:a16="http://schemas.microsoft.com/office/drawing/2014/main" val="10002"/>
+                  </a:ext>
+                </a:extLst>
               </a:tr>
               <a:tr h="566928">
                 <a:tc>
@@ -8741,7 +8625,7 @@
                     <a:bodyPr/>
                     <a:lstStyle/>
                     <a:p>
-                      <a:pPr indent="0" marL="0">
+                      <a:pPr marL="0" indent="0">
                         <a:buNone/>
                       </a:pPr>
                       <a:r>
@@ -8755,7 +8639,7 @@
                       <a:endParaRPr lang="en-US" sz="1500" dirty="0"/>
                     </a:p>
                   </a:txBody>
-                  <a:tcPr marL="91440" marR="91440" marT="45720" marB="45720" anchor="ctr">
+                  <a:tcPr anchor="ctr">
                     <a:lnL w="0" cap="flat" cmpd="sng" algn="ctr">
                       <a:noFill/>
                     </a:lnL>
@@ -8778,7 +8662,7 @@
                     <a:bodyPr/>
                     <a:lstStyle/>
                     <a:p>
-                      <a:pPr indent="0" marL="0">
+                      <a:pPr marL="0" indent="0">
                         <a:buNone/>
                       </a:pPr>
                       <a:r>
@@ -8792,7 +8676,7 @@
                       <a:endParaRPr lang="en-US" sz="1500" dirty="0"/>
                     </a:p>
                   </a:txBody>
-                  <a:tcPr marL="91440" marR="91440" marT="45720" marB="45720" anchor="ctr">
+                  <a:tcPr anchor="ctr">
                     <a:lnL w="0" cap="flat" cmpd="sng" algn="ctr">
                       <a:noFill/>
                     </a:lnL>
@@ -8815,7 +8699,7 @@
                     <a:bodyPr/>
                     <a:lstStyle/>
                     <a:p>
-                      <a:pPr indent="0" marL="0">
+                      <a:pPr marL="0" indent="0">
                         <a:buNone/>
                       </a:pPr>
                       <a:r>
@@ -8829,7 +8713,7 @@
                       <a:endParaRPr lang="en-US" sz="1500" dirty="0"/>
                     </a:p>
                   </a:txBody>
-                  <a:tcPr marL="91440" marR="91440" marT="45720" marB="45720" anchor="ctr">
+                  <a:tcPr anchor="ctr">
                     <a:lnL w="0" cap="flat" cmpd="sng" algn="ctr">
                       <a:noFill/>
                     </a:lnL>
@@ -8847,6 +8731,11 @@
                     </a:solidFill>
                   </a:tcPr>
                 </a:tc>
+                <a:extLst>
+                  <a:ext uri="{0D108BD9-81ED-4DB2-BD59-A6C34878D82A}">
+                    <a16:rowId xmlns:a16="http://schemas.microsoft.com/office/drawing/2014/main" val="10003"/>
+                  </a:ext>
+                </a:extLst>
               </a:tr>
               <a:tr h="566928">
                 <a:tc>
@@ -8854,7 +8743,7 @@
                     <a:bodyPr/>
                     <a:lstStyle/>
                     <a:p>
-                      <a:pPr indent="0" marL="0">
+                      <a:pPr marL="0" indent="0">
                         <a:buNone/>
                       </a:pPr>
                       <a:r>
@@ -8868,7 +8757,7 @@
                       <a:endParaRPr lang="en-US" sz="1500" dirty="0"/>
                     </a:p>
                   </a:txBody>
-                  <a:tcPr marL="91440" marR="91440" marT="45720" marB="45720" anchor="ctr">
+                  <a:tcPr anchor="ctr">
                     <a:lnL w="0" cap="flat" cmpd="sng" algn="ctr">
                       <a:noFill/>
                     </a:lnL>
@@ -8891,7 +8780,7 @@
                     <a:bodyPr/>
                     <a:lstStyle/>
                     <a:p>
-                      <a:pPr indent="0" marL="0">
+                      <a:pPr marL="0" indent="0">
                         <a:buNone/>
                       </a:pPr>
                       <a:r>
@@ -8905,7 +8794,7 @@
                       <a:endParaRPr lang="en-US" sz="1500" dirty="0"/>
                     </a:p>
                   </a:txBody>
-                  <a:tcPr marL="91440" marR="91440" marT="45720" marB="45720" anchor="ctr">
+                  <a:tcPr anchor="ctr">
                     <a:lnL w="0" cap="flat" cmpd="sng" algn="ctr">
                       <a:noFill/>
                     </a:lnL>
@@ -8928,7 +8817,7 @@
                     <a:bodyPr/>
                     <a:lstStyle/>
                     <a:p>
-                      <a:pPr indent="0" marL="0">
+                      <a:pPr marL="0" indent="0">
                         <a:buNone/>
                       </a:pPr>
                       <a:r>
@@ -8942,7 +8831,7 @@
                       <a:endParaRPr lang="en-US" sz="1500" dirty="0"/>
                     </a:p>
                   </a:txBody>
-                  <a:tcPr marL="91440" marR="91440" marT="45720" marB="45720" anchor="ctr">
+                  <a:tcPr anchor="ctr">
                     <a:lnL w="0" cap="flat" cmpd="sng" algn="ctr">
                       <a:noFill/>
                     </a:lnL>
@@ -8960,6 +8849,11 @@
                     </a:solidFill>
                   </a:tcPr>
                 </a:tc>
+                <a:extLst>
+                  <a:ext uri="{0D108BD9-81ED-4DB2-BD59-A6C34878D82A}">
+                    <a16:rowId xmlns:a16="http://schemas.microsoft.com/office/drawing/2014/main" val="10004"/>
+                  </a:ext>
+                </a:extLst>
               </a:tr>
             </a:tbl>
           </a:graphicData>
@@ -9008,7 +8902,7 @@
           <a:bodyPr wrap="square" lIns="0" tIns="0" rIns="0" bIns="0" rtlCol="0" anchor="ctr"/>
           <a:lstStyle/>
           <a:p>
-            <a:pPr indent="0" marL="0">
+            <a:pPr marL="0" indent="0">
               <a:buNone/>
             </a:pPr>
             <a:r>
@@ -9019,9 +8913,6 @@
               </a:rPr>
               <a:t>Por que não redes neurais: </a:t>
             </a:r>
-            <a:pPr indent="0" marL="0">
-              <a:buNone/>
-            </a:pPr>
             <a:r>
               <a:rPr lang="en-US" sz="1500" dirty="0">
                 <a:solidFill>
@@ -9054,7 +8945,7 @@
           </a:prstGeom>
           <a:extLst>
             <a:ext uri="{C572A759-6A51-4108-AA02-DFA0A04FC94B}">
-              <ma14:wrappingTextBoxFlag xmlns:ma14="http://schemas.microsoft.com/office/mac/drawingml/2011/main" val="0"/>
+              <ma14:wrappingTextBoxFlag xmlns="" xmlns:ma14="http://schemas.microsoft.com/office/mac/drawingml/2011/main" val="0"/>
             </a:ext>
           </a:extLst>
         </p:spPr>
@@ -9072,7 +8963,7 @@
           <a:p>
             <a:pPr algn="r"/>
             <a:fld id="{F7021451-1387-4CA6-816F-3879F97B5CBC}" type="slidenum">
-              <a:rPr b="0" lang="en-US"/>
+              <a:rPr lang="en-US" b="0"/>
               <a:t>18</a:t>
             </a:fld>
             <a:endParaRPr lang="en-US"/>
@@ -9107,9 +8998,11 @@
       <p:sp>
         <p:nvSpPr>
           <p:cNvPr id="2" name="Text 0"/>
-          <p:cNvSpPr/>
+          <p:cNvSpPr>
+            <a:spLocks noGrp="1"/>
+          </p:cNvSpPr>
           <p:nvPr>
-            <p:ph idx="100" type="title" hasCustomPrompt="1"/>
+            <p:ph type="title" idx="100" hasCustomPrompt="1"/>
           </p:nvPr>
         </p:nvSpPr>
         <p:spPr>
@@ -9127,7 +9020,7 @@
           <a:bodyPr wrap="square" lIns="0" tIns="0" rIns="0" bIns="0" rtlCol="0" anchor="ctr"/>
           <a:lstStyle/>
           <a:p>
-            <a:pPr algn="l" indent="0" marL="0">
+            <a:pPr marL="0" indent="0" algn="l">
               <a:buNone/>
             </a:pPr>
             <a:r>
@@ -9144,7 +9037,7 @@
       </p:sp>
       <p:graphicFrame>
         <p:nvGraphicFramePr>
-          <p:cNvPr id="3" name="Chart 0" descr=""/>
+          <p:cNvPr id="3" name="Chart 0"/>
           <p:cNvGraphicFramePr/>
           <p:nvPr/>
         </p:nvGraphicFramePr>
@@ -9152,9 +9045,9 @@
           <a:off x="548640" y="1417320"/>
           <a:ext cx="6766560" cy="4480560"/>
         </p:xfrm>
-        <a:graphic xmlns:a="http://schemas.openxmlformats.org/drawingml/2006/main">
+        <a:graphic>
           <a:graphicData uri="http://schemas.openxmlformats.org/drawingml/2006/chart">
-            <c:chart xmlns:c="http://schemas.openxmlformats.org/drawingml/2006/chart" r:id="rId1"/>
+            <c:chart xmlns:c="http://schemas.openxmlformats.org/drawingml/2006/chart" xmlns:r="http://schemas.openxmlformats.org/officeDocument/2006/relationships" r:id="rId3"/>
           </a:graphicData>
         </a:graphic>
       </p:graphicFrame>
@@ -9181,10 +9074,34 @@
             <a:tbl>
               <a:tblPr/>
               <a:tblGrid>
-                <a:gridCol w="1554480"/>
-                <a:gridCol w="822960"/>
-                <a:gridCol w="822960"/>
-                <a:gridCol w="822960"/>
+                <a:gridCol w="1554480">
+                  <a:extLst>
+                    <a:ext uri="{9D8B030D-6E8A-4147-A177-3AD203B41FA5}">
+                      <a16:colId xmlns:a16="http://schemas.microsoft.com/office/drawing/2014/main" val="20000"/>
+                    </a:ext>
+                  </a:extLst>
+                </a:gridCol>
+                <a:gridCol w="822960">
+                  <a:extLst>
+                    <a:ext uri="{9D8B030D-6E8A-4147-A177-3AD203B41FA5}">
+                      <a16:colId xmlns:a16="http://schemas.microsoft.com/office/drawing/2014/main" val="20001"/>
+                    </a:ext>
+                  </a:extLst>
+                </a:gridCol>
+                <a:gridCol w="822960">
+                  <a:extLst>
+                    <a:ext uri="{9D8B030D-6E8A-4147-A177-3AD203B41FA5}">
+                      <a16:colId xmlns:a16="http://schemas.microsoft.com/office/drawing/2014/main" val="20002"/>
+                    </a:ext>
+                  </a:extLst>
+                </a:gridCol>
+                <a:gridCol w="822960">
+                  <a:extLst>
+                    <a:ext uri="{9D8B030D-6E8A-4147-A177-3AD203B41FA5}">
+                      <a16:colId xmlns:a16="http://schemas.microsoft.com/office/drawing/2014/main" val="20003"/>
+                    </a:ext>
+                  </a:extLst>
+                </a:gridCol>
               </a:tblGrid>
               <a:tr h="438912">
                 <a:tc>
@@ -9192,13 +9109,13 @@
                     <a:bodyPr/>
                     <a:lstStyle/>
                     <a:p>
-                      <a:pPr indent="0" marL="0">
+                      <a:pPr marL="0" indent="0">
                         <a:buNone/>
                       </a:pPr>
                       <a:endParaRPr lang="en-US" sz="1400" dirty="0"/>
                     </a:p>
                   </a:txBody>
-                  <a:tcPr marL="91440" marR="91440" marT="45720" marB="45720" anchor="ctr">
+                  <a:tcPr anchor="ctr">
                     <a:lnL w="0" cap="flat" cmpd="sng" algn="ctr">
                       <a:noFill/>
                     </a:lnL>
@@ -9221,7 +9138,7 @@
                     <a:bodyPr/>
                     <a:lstStyle/>
                     <a:p>
-                      <a:pPr indent="0" marL="0">
+                      <a:pPr marL="0" indent="0">
                         <a:buNone/>
                       </a:pPr>
                       <a:r>
@@ -9235,7 +9152,7 @@
                       <a:endParaRPr lang="en-US" sz="1400" dirty="0"/>
                     </a:p>
                   </a:txBody>
-                  <a:tcPr marL="91440" marR="91440" marT="45720" marB="45720" anchor="ctr">
+                  <a:tcPr anchor="ctr">
                     <a:lnL w="0" cap="flat" cmpd="sng" algn="ctr">
                       <a:noFill/>
                     </a:lnL>
@@ -9258,7 +9175,7 @@
                     <a:bodyPr/>
                     <a:lstStyle/>
                     <a:p>
-                      <a:pPr indent="0" marL="0">
+                      <a:pPr marL="0" indent="0">
                         <a:buNone/>
                       </a:pPr>
                       <a:r>
@@ -9272,7 +9189,7 @@
                       <a:endParaRPr lang="en-US" sz="1400" dirty="0"/>
                     </a:p>
                   </a:txBody>
-                  <a:tcPr marL="91440" marR="91440" marT="45720" marB="45720" anchor="ctr">
+                  <a:tcPr anchor="ctr">
                     <a:lnL w="0" cap="flat" cmpd="sng" algn="ctr">
                       <a:noFill/>
                     </a:lnL>
@@ -9295,7 +9212,7 @@
                     <a:bodyPr/>
                     <a:lstStyle/>
                     <a:p>
-                      <a:pPr indent="0" marL="0">
+                      <a:pPr marL="0" indent="0">
                         <a:buNone/>
                       </a:pPr>
                       <a:r>
@@ -9309,7 +9226,7 @@
                       <a:endParaRPr lang="en-US" sz="1400" dirty="0"/>
                     </a:p>
                   </a:txBody>
-                  <a:tcPr marL="91440" marR="91440" marT="45720" marB="45720" anchor="ctr">
+                  <a:tcPr anchor="ctr">
                     <a:lnL w="0" cap="flat" cmpd="sng" algn="ctr">
                       <a:noFill/>
                     </a:lnL>
@@ -9327,6 +9244,11 @@
                     </a:solidFill>
                   </a:tcPr>
                 </a:tc>
+                <a:extLst>
+                  <a:ext uri="{0D108BD9-81ED-4DB2-BD59-A6C34878D82A}">
+                    <a16:rowId xmlns:a16="http://schemas.microsoft.com/office/drawing/2014/main" val="10000"/>
+                  </a:ext>
+                </a:extLst>
               </a:tr>
               <a:tr h="438912">
                 <a:tc>
@@ -9334,7 +9256,7 @@
                     <a:bodyPr/>
                     <a:lstStyle/>
                     <a:p>
-                      <a:pPr indent="0" marL="0">
+                      <a:pPr marL="0" indent="0">
                         <a:buNone/>
                       </a:pPr>
                       <a:r>
@@ -9348,7 +9270,7 @@
                       <a:endParaRPr lang="en-US" sz="1400" dirty="0"/>
                     </a:p>
                   </a:txBody>
-                  <a:tcPr marL="91440" marR="91440" marT="45720" marB="45720" anchor="ctr">
+                  <a:tcPr anchor="ctr">
                     <a:lnL w="0" cap="flat" cmpd="sng" algn="ctr">
                       <a:noFill/>
                     </a:lnL>
@@ -9371,7 +9293,7 @@
                     <a:bodyPr/>
                     <a:lstStyle/>
                     <a:p>
-                      <a:pPr indent="0" marL="0">
+                      <a:pPr marL="0" indent="0">
                         <a:buNone/>
                       </a:pPr>
                       <a:r>
@@ -9385,7 +9307,7 @@
                       <a:endParaRPr lang="en-US" sz="1400" dirty="0"/>
                     </a:p>
                   </a:txBody>
-                  <a:tcPr marL="91440" marR="91440" marT="45720" marB="45720" anchor="ctr">
+                  <a:tcPr anchor="ctr">
                     <a:lnL w="0" cap="flat" cmpd="sng" algn="ctr">
                       <a:noFill/>
                     </a:lnL>
@@ -9408,7 +9330,7 @@
                     <a:bodyPr/>
                     <a:lstStyle/>
                     <a:p>
-                      <a:pPr indent="0" marL="0">
+                      <a:pPr marL="0" indent="0">
                         <a:buNone/>
                       </a:pPr>
                       <a:r>
@@ -9422,7 +9344,7 @@
                       <a:endParaRPr lang="en-US" sz="1400" dirty="0"/>
                     </a:p>
                   </a:txBody>
-                  <a:tcPr marL="91440" marR="91440" marT="45720" marB="45720" anchor="ctr">
+                  <a:tcPr anchor="ctr">
                     <a:lnL w="0" cap="flat" cmpd="sng" algn="ctr">
                       <a:noFill/>
                     </a:lnL>
@@ -9445,7 +9367,7 @@
                     <a:bodyPr/>
                     <a:lstStyle/>
                     <a:p>
-                      <a:pPr indent="0" marL="0">
+                      <a:pPr marL="0" indent="0">
                         <a:buNone/>
                       </a:pPr>
                       <a:r>
@@ -9459,7 +9381,7 @@
                       <a:endParaRPr lang="en-US" sz="1400" dirty="0"/>
                     </a:p>
                   </a:txBody>
-                  <a:tcPr marL="91440" marR="91440" marT="45720" marB="45720" anchor="ctr">
+                  <a:tcPr anchor="ctr">
                     <a:lnL w="0" cap="flat" cmpd="sng" algn="ctr">
                       <a:noFill/>
                     </a:lnL>
@@ -9477,6 +9399,11 @@
                     </a:solidFill>
                   </a:tcPr>
                 </a:tc>
+                <a:extLst>
+                  <a:ext uri="{0D108BD9-81ED-4DB2-BD59-A6C34878D82A}">
+                    <a16:rowId xmlns:a16="http://schemas.microsoft.com/office/drawing/2014/main" val="10001"/>
+                  </a:ext>
+                </a:extLst>
               </a:tr>
               <a:tr h="438912">
                 <a:tc>
@@ -9484,7 +9411,7 @@
                     <a:bodyPr/>
                     <a:lstStyle/>
                     <a:p>
-                      <a:pPr indent="0" marL="0">
+                      <a:pPr marL="0" indent="0">
                         <a:buNone/>
                       </a:pPr>
                       <a:r>
@@ -9498,7 +9425,7 @@
                       <a:endParaRPr lang="en-US" sz="1400" dirty="0"/>
                     </a:p>
                   </a:txBody>
-                  <a:tcPr marL="91440" marR="91440" marT="45720" marB="45720" anchor="ctr">
+                  <a:tcPr anchor="ctr">
                     <a:lnL w="0" cap="flat" cmpd="sng" algn="ctr">
                       <a:noFill/>
                     </a:lnL>
@@ -9521,7 +9448,7 @@
                     <a:bodyPr/>
                     <a:lstStyle/>
                     <a:p>
-                      <a:pPr indent="0" marL="0">
+                      <a:pPr marL="0" indent="0">
                         <a:buNone/>
                       </a:pPr>
                       <a:r>
@@ -9535,7 +9462,7 @@
                       <a:endParaRPr lang="en-US" sz="1400" dirty="0"/>
                     </a:p>
                   </a:txBody>
-                  <a:tcPr marL="91440" marR="91440" marT="45720" marB="45720" anchor="ctr">
+                  <a:tcPr anchor="ctr">
                     <a:lnL w="0" cap="flat" cmpd="sng" algn="ctr">
                       <a:noFill/>
                     </a:lnL>
@@ -9558,7 +9485,7 @@
                     <a:bodyPr/>
                     <a:lstStyle/>
                     <a:p>
-                      <a:pPr indent="0" marL="0">
+                      <a:pPr marL="0" indent="0">
                         <a:buNone/>
                       </a:pPr>
                       <a:r>
@@ -9572,7 +9499,7 @@
                       <a:endParaRPr lang="en-US" sz="1400" dirty="0"/>
                     </a:p>
                   </a:txBody>
-                  <a:tcPr marL="91440" marR="91440" marT="45720" marB="45720" anchor="ctr">
+                  <a:tcPr anchor="ctr">
                     <a:lnL w="0" cap="flat" cmpd="sng" algn="ctr">
                       <a:noFill/>
                     </a:lnL>
@@ -9595,7 +9522,7 @@
                     <a:bodyPr/>
                     <a:lstStyle/>
                     <a:p>
-                      <a:pPr indent="0" marL="0">
+                      <a:pPr marL="0" indent="0">
                         <a:buNone/>
                       </a:pPr>
                       <a:r>
@@ -9609,7 +9536,7 @@
                       <a:endParaRPr lang="en-US" sz="1400" dirty="0"/>
                     </a:p>
                   </a:txBody>
-                  <a:tcPr marL="91440" marR="91440" marT="45720" marB="45720" anchor="ctr">
+                  <a:tcPr anchor="ctr">
                     <a:lnL w="0" cap="flat" cmpd="sng" algn="ctr">
                       <a:noFill/>
                     </a:lnL>
@@ -9627,6 +9554,11 @@
                     </a:solidFill>
                   </a:tcPr>
                 </a:tc>
+                <a:extLst>
+                  <a:ext uri="{0D108BD9-81ED-4DB2-BD59-A6C34878D82A}">
+                    <a16:rowId xmlns:a16="http://schemas.microsoft.com/office/drawing/2014/main" val="10002"/>
+                  </a:ext>
+                </a:extLst>
               </a:tr>
               <a:tr h="438912">
                 <a:tc>
@@ -9634,7 +9566,7 @@
                     <a:bodyPr/>
                     <a:lstStyle/>
                     <a:p>
-                      <a:pPr indent="0" marL="0">
+                      <a:pPr marL="0" indent="0">
                         <a:buNone/>
                       </a:pPr>
                       <a:r>
@@ -9648,7 +9580,7 @@
                       <a:endParaRPr lang="en-US" sz="1400" dirty="0"/>
                     </a:p>
                   </a:txBody>
-                  <a:tcPr marL="91440" marR="91440" marT="45720" marB="45720" anchor="ctr">
+                  <a:tcPr anchor="ctr">
                     <a:lnL w="0" cap="flat" cmpd="sng" algn="ctr">
                       <a:noFill/>
                     </a:lnL>
@@ -9671,7 +9603,7 @@
                     <a:bodyPr/>
                     <a:lstStyle/>
                     <a:p>
-                      <a:pPr indent="0" marL="0">
+                      <a:pPr marL="0" indent="0">
                         <a:buNone/>
                       </a:pPr>
                       <a:r>
@@ -9685,7 +9617,7 @@
                       <a:endParaRPr lang="en-US" sz="1400" dirty="0"/>
                     </a:p>
                   </a:txBody>
-                  <a:tcPr marL="91440" marR="91440" marT="45720" marB="45720" anchor="ctr">
+                  <a:tcPr anchor="ctr">
                     <a:lnL w="0" cap="flat" cmpd="sng" algn="ctr">
                       <a:noFill/>
                     </a:lnL>
@@ -9708,7 +9640,7 @@
                     <a:bodyPr/>
                     <a:lstStyle/>
                     <a:p>
-                      <a:pPr indent="0" marL="0">
+                      <a:pPr marL="0" indent="0">
                         <a:buNone/>
                       </a:pPr>
                       <a:r>
@@ -9722,7 +9654,7 @@
                       <a:endParaRPr lang="en-US" sz="1400" dirty="0"/>
                     </a:p>
                   </a:txBody>
-                  <a:tcPr marL="91440" marR="91440" marT="45720" marB="45720" anchor="ctr">
+                  <a:tcPr anchor="ctr">
                     <a:lnL w="0" cap="flat" cmpd="sng" algn="ctr">
                       <a:noFill/>
                     </a:lnL>
@@ -9745,7 +9677,7 @@
                     <a:bodyPr/>
                     <a:lstStyle/>
                     <a:p>
-                      <a:pPr indent="0" marL="0">
+                      <a:pPr marL="0" indent="0">
                         <a:buNone/>
                       </a:pPr>
                       <a:r>
@@ -9759,7 +9691,7 @@
                       <a:endParaRPr lang="en-US" sz="1400" dirty="0"/>
                     </a:p>
                   </a:txBody>
-                  <a:tcPr marL="91440" marR="91440" marT="45720" marB="45720" anchor="ctr">
+                  <a:tcPr anchor="ctr">
                     <a:lnL w="0" cap="flat" cmpd="sng" algn="ctr">
                       <a:noFill/>
                     </a:lnL>
@@ -9777,6 +9709,11 @@
                     </a:solidFill>
                   </a:tcPr>
                 </a:tc>
+                <a:extLst>
+                  <a:ext uri="{0D108BD9-81ED-4DB2-BD59-A6C34878D82A}">
+                    <a16:rowId xmlns:a16="http://schemas.microsoft.com/office/drawing/2014/main" val="10003"/>
+                  </a:ext>
+                </a:extLst>
               </a:tr>
             </a:tbl>
           </a:graphicData>
@@ -9803,7 +9740,7 @@
           <a:bodyPr wrap="square" lIns="0" tIns="0" rIns="0" bIns="0" rtlCol="0" anchor="t"/>
           <a:lstStyle/>
           <a:p>
-            <a:pPr indent="0" marL="0">
+            <a:pPr marL="0" indent="0">
               <a:buNone/>
             </a:pPr>
             <a:r>
@@ -9839,7 +9776,7 @@
           <a:bodyPr wrap="square" lIns="0" tIns="0" rIns="0" bIns="0" rtlCol="0" anchor="t"/>
           <a:lstStyle/>
           <a:p>
-            <a:pPr indent="0" marL="0">
+            <a:pPr marL="0" indent="0">
               <a:buNone/>
             </a:pPr>
             <a:r>
@@ -9874,7 +9811,7 @@
           </a:prstGeom>
           <a:extLst>
             <a:ext uri="{C572A759-6A51-4108-AA02-DFA0A04FC94B}">
-              <ma14:wrappingTextBoxFlag xmlns:ma14="http://schemas.microsoft.com/office/mac/drawingml/2011/main" val="0"/>
+              <ma14:wrappingTextBoxFlag xmlns="" xmlns:ma14="http://schemas.microsoft.com/office/mac/drawingml/2011/main" val="0"/>
             </a:ext>
           </a:extLst>
         </p:spPr>
@@ -9892,7 +9829,7 @@
           <a:p>
             <a:pPr algn="r"/>
             <a:fld id="{F7021451-1387-4CA6-816F-3879F97B5CBC}" type="slidenum">
-              <a:rPr b="0" lang="en-US"/>
+              <a:rPr lang="en-US" b="0"/>
               <a:t>19</a:t>
             </a:fld>
             <a:endParaRPr lang="en-US"/>
@@ -9927,9 +9864,11 @@
       <p:sp>
         <p:nvSpPr>
           <p:cNvPr id="2" name="Text 0"/>
-          <p:cNvSpPr/>
+          <p:cNvSpPr>
+            <a:spLocks noGrp="1"/>
+          </p:cNvSpPr>
           <p:nvPr>
-            <p:ph idx="100" type="title" hasCustomPrompt="1"/>
+            <p:ph type="title" idx="100" hasCustomPrompt="1"/>
           </p:nvPr>
         </p:nvSpPr>
         <p:spPr>
@@ -9947,7 +9886,7 @@
           <a:bodyPr wrap="square" lIns="0" tIns="0" rIns="0" bIns="0" rtlCol="0" anchor="ctr"/>
           <a:lstStyle/>
           <a:p>
-            <a:pPr algn="l" indent="0" marL="0">
+            <a:pPr marL="0" indent="0" algn="l">
               <a:buNone/>
             </a:pPr>
             <a:r>
@@ -10005,7 +9944,7 @@
           <a:bodyPr wrap="square" lIns="0" tIns="0" rIns="0" bIns="0" rtlCol="0" anchor="t"/>
           <a:lstStyle/>
           <a:p>
-            <a:pPr indent="0" marL="0">
+            <a:pPr marL="0" indent="0">
               <a:buNone/>
             </a:pPr>
             <a:r>
@@ -10041,7 +9980,7 @@
           <a:bodyPr wrap="square" lIns="0" tIns="0" rIns="0" bIns="0" rtlCol="0" anchor="t"/>
           <a:lstStyle/>
           <a:p>
-            <a:pPr indent="0" marL="0">
+            <a:pPr marL="0" indent="0">
               <a:buNone/>
             </a:pPr>
             <a:r>
@@ -10077,7 +10016,7 @@
           <a:bodyPr wrap="square" lIns="0" tIns="0" rIns="0" bIns="0" rtlCol="0" anchor="t"/>
           <a:lstStyle/>
           <a:p>
-            <a:pPr indent="0" marL="0">
+            <a:pPr marL="0" indent="0">
               <a:buNone/>
             </a:pPr>
             <a:r>
@@ -10113,7 +10052,7 @@
           <a:bodyPr wrap="square" lIns="0" tIns="0" rIns="0" bIns="0" rtlCol="0" anchor="t"/>
           <a:lstStyle/>
           <a:p>
-            <a:pPr indent="0" marL="0">
+            <a:pPr marL="0" indent="0">
               <a:buNone/>
             </a:pPr>
             <a:r>
@@ -10171,7 +10110,7 @@
           <a:bodyPr wrap="square" lIns="0" tIns="0" rIns="0" bIns="0" rtlCol="0" anchor="t"/>
           <a:lstStyle/>
           <a:p>
-            <a:pPr indent="0" marL="0">
+            <a:pPr marL="0" indent="0">
               <a:buNone/>
             </a:pPr>
             <a:r>
@@ -10207,7 +10146,7 @@
           <a:bodyPr wrap="square" lIns="0" tIns="0" rIns="0" bIns="0" rtlCol="0" anchor="t"/>
           <a:lstStyle/>
           <a:p>
-            <a:pPr indent="0" marL="0">
+            <a:pPr marL="0" indent="0">
               <a:buNone/>
             </a:pPr>
             <a:r>
@@ -10243,7 +10182,7 @@
           <a:bodyPr wrap="square" lIns="0" tIns="0" rIns="0" bIns="0" rtlCol="0" anchor="t"/>
           <a:lstStyle/>
           <a:p>
-            <a:pPr indent="0" marL="0">
+            <a:pPr marL="0" indent="0">
               <a:buNone/>
             </a:pPr>
             <a:r>
@@ -10279,7 +10218,7 @@
           <a:bodyPr wrap="square" lIns="0" tIns="0" rIns="0" bIns="0" rtlCol="0" anchor="t"/>
           <a:lstStyle/>
           <a:p>
-            <a:pPr indent="0" marL="0">
+            <a:pPr marL="0" indent="0">
               <a:buNone/>
             </a:pPr>
             <a:r>
@@ -10337,7 +10276,7 @@
           <a:bodyPr wrap="square" lIns="0" tIns="0" rIns="0" bIns="0" rtlCol="0" anchor="t"/>
           <a:lstStyle/>
           <a:p>
-            <a:pPr indent="0" marL="0">
+            <a:pPr marL="0" indent="0">
               <a:buNone/>
             </a:pPr>
             <a:r>
@@ -10373,7 +10312,7 @@
           <a:bodyPr wrap="square" lIns="0" tIns="0" rIns="0" bIns="0" rtlCol="0" anchor="t"/>
           <a:lstStyle/>
           <a:p>
-            <a:pPr indent="0" marL="0">
+            <a:pPr marL="0" indent="0">
               <a:buNone/>
             </a:pPr>
             <a:r>
@@ -10409,7 +10348,7 @@
           <a:bodyPr wrap="square" lIns="0" tIns="0" rIns="0" bIns="0" rtlCol="0" anchor="t"/>
           <a:lstStyle/>
           <a:p>
-            <a:pPr indent="0" marL="0">
+            <a:pPr marL="0" indent="0">
               <a:buNone/>
             </a:pPr>
             <a:r>
@@ -10445,7 +10384,7 @@
           <a:bodyPr wrap="square" lIns="0" tIns="0" rIns="0" bIns="0" rtlCol="0" anchor="t"/>
           <a:lstStyle/>
           <a:p>
-            <a:pPr indent="0" marL="0">
+            <a:pPr marL="0" indent="0">
               <a:buNone/>
             </a:pPr>
             <a:r>
@@ -10503,7 +10442,7 @@
           <a:bodyPr wrap="square" lIns="0" tIns="0" rIns="0" bIns="0" rtlCol="0" anchor="t"/>
           <a:lstStyle/>
           <a:p>
-            <a:pPr indent="0" marL="0">
+            <a:pPr marL="0" indent="0">
               <a:buNone/>
             </a:pPr>
             <a:r>
@@ -10539,7 +10478,7 @@
           <a:bodyPr wrap="square" lIns="0" tIns="0" rIns="0" bIns="0" rtlCol="0" anchor="t"/>
           <a:lstStyle/>
           <a:p>
-            <a:pPr indent="0" marL="0">
+            <a:pPr marL="0" indent="0">
               <a:buNone/>
             </a:pPr>
             <a:r>
@@ -10575,7 +10514,7 @@
           <a:bodyPr wrap="square" lIns="0" tIns="0" rIns="0" bIns="0" rtlCol="0" anchor="t"/>
           <a:lstStyle/>
           <a:p>
-            <a:pPr indent="0" marL="0">
+            <a:pPr marL="0" indent="0">
               <a:buNone/>
             </a:pPr>
             <a:r>
@@ -10611,7 +10550,7 @@
           <a:bodyPr wrap="square" lIns="0" tIns="0" rIns="0" bIns="0" rtlCol="0" anchor="t"/>
           <a:lstStyle/>
           <a:p>
-            <a:pPr indent="0" marL="0">
+            <a:pPr marL="0" indent="0">
               <a:buNone/>
             </a:pPr>
             <a:r>
@@ -10646,7 +10585,7 @@
           </a:prstGeom>
           <a:extLst>
             <a:ext uri="{C572A759-6A51-4108-AA02-DFA0A04FC94B}">
-              <ma14:wrappingTextBoxFlag xmlns:ma14="http://schemas.microsoft.com/office/mac/drawingml/2011/main" val="0"/>
+              <ma14:wrappingTextBoxFlag xmlns="" xmlns:ma14="http://schemas.microsoft.com/office/mac/drawingml/2011/main" val="0"/>
             </a:ext>
           </a:extLst>
         </p:spPr>
@@ -10664,7 +10603,7 @@
           <a:p>
             <a:pPr algn="r"/>
             <a:fld id="{F7021451-1387-4CA6-816F-3879F97B5CBC}" type="slidenum">
-              <a:rPr b="0" lang="en-US"/>
+              <a:rPr lang="en-US" b="0"/>
               <a:t>2</a:t>
             </a:fld>
             <a:endParaRPr lang="en-US"/>
@@ -10699,9 +10638,11 @@
       <p:sp>
         <p:nvSpPr>
           <p:cNvPr id="2" name="Text 0"/>
-          <p:cNvSpPr/>
+          <p:cNvSpPr>
+            <a:spLocks noGrp="1"/>
+          </p:cNvSpPr>
           <p:nvPr>
-            <p:ph idx="100" type="title" hasCustomPrompt="1"/>
+            <p:ph type="title" idx="100" hasCustomPrompt="1"/>
           </p:nvPr>
         </p:nvSpPr>
         <p:spPr>
@@ -10719,7 +10660,7 @@
           <a:bodyPr wrap="square" lIns="0" tIns="0" rIns="0" bIns="0" rtlCol="0" anchor="ctr"/>
           <a:lstStyle/>
           <a:p>
-            <a:pPr algn="l" indent="0" marL="0">
+            <a:pPr marL="0" indent="0" algn="l">
               <a:buNone/>
             </a:pPr>
             <a:r>
@@ -10736,14 +10677,14 @@
       </p:sp>
       <p:pic>
         <p:nvPicPr>
-          <p:cNvPr id="3" name="03_real_vs_previsto" descr="/home/claude/case/reports/figures/slides/03_real_vs_previsto.png">    </p:cNvPr>
+          <p:cNvPr id="3" name="03_real_vs_previsto" descr="/home/claude/case/reports/figures/slides/03_real_vs_previsto.png"/>
           <p:cNvPicPr>
             <a:picLocks noChangeAspect="1"/>
           </p:cNvPicPr>
           <p:nvPr/>
         </p:nvPicPr>
         <p:blipFill>
-          <a:blip r:embed="rId1"/>
+          <a:blip r:embed="rId3"/>
           <a:stretch>
             <a:fillRect/>
           </a:stretch>
@@ -10779,7 +10720,7 @@
           <a:bodyPr wrap="square" lIns="0" tIns="0" rIns="0" bIns="0" rtlCol="0" anchor="t"/>
           <a:lstStyle/>
           <a:p>
-            <a:pPr indent="0" marL="0">
+            <a:pPr marL="0" indent="0">
               <a:buNone/>
             </a:pPr>
             <a:r>
@@ -10815,7 +10756,7 @@
           <a:bodyPr wrap="square" lIns="0" tIns="0" rIns="0" bIns="0" rtlCol="0" anchor="t"/>
           <a:lstStyle/>
           <a:p>
-            <a:pPr indent="0" marL="0">
+            <a:pPr marL="0" indent="0">
               <a:buNone/>
             </a:pPr>
             <a:r>
@@ -10851,7 +10792,7 @@
           <a:bodyPr wrap="square" lIns="0" tIns="0" rIns="0" bIns="0" rtlCol="0" anchor="t"/>
           <a:lstStyle/>
           <a:p>
-            <a:pPr indent="0" marL="0">
+            <a:pPr marL="0" indent="0">
               <a:buNone/>
             </a:pPr>
             <a:r>
@@ -10887,7 +10828,7 @@
           <a:bodyPr wrap="square" lIns="0" tIns="0" rIns="0" bIns="0" rtlCol="0" anchor="t"/>
           <a:lstStyle/>
           <a:p>
-            <a:pPr indent="0" marL="0">
+            <a:pPr marL="0" indent="0">
               <a:buNone/>
             </a:pPr>
             <a:r>
@@ -10923,7 +10864,7 @@
           <a:bodyPr wrap="square" lIns="0" tIns="0" rIns="0" bIns="0" rtlCol="0" anchor="t"/>
           <a:lstStyle/>
           <a:p>
-            <a:pPr indent="0" marL="0">
+            <a:pPr marL="0" indent="0">
               <a:buNone/>
             </a:pPr>
             <a:r>
@@ -10958,7 +10899,7 @@
           </a:prstGeom>
           <a:extLst>
             <a:ext uri="{C572A759-6A51-4108-AA02-DFA0A04FC94B}">
-              <ma14:wrappingTextBoxFlag xmlns:ma14="http://schemas.microsoft.com/office/mac/drawingml/2011/main" val="0"/>
+              <ma14:wrappingTextBoxFlag xmlns="" xmlns:ma14="http://schemas.microsoft.com/office/mac/drawingml/2011/main" val="0"/>
             </a:ext>
           </a:extLst>
         </p:spPr>
@@ -10976,7 +10917,7 @@
           <a:p>
             <a:pPr algn="r"/>
             <a:fld id="{F7021451-1387-4CA6-816F-3879F97B5CBC}" type="slidenum">
-              <a:rPr b="0" lang="en-US"/>
+              <a:rPr lang="en-US" b="0"/>
               <a:t>20</a:t>
             </a:fld>
             <a:endParaRPr lang="en-US"/>
@@ -11011,9 +10952,11 @@
       <p:sp>
         <p:nvSpPr>
           <p:cNvPr id="2" name="Text 0"/>
-          <p:cNvSpPr/>
+          <p:cNvSpPr>
+            <a:spLocks noGrp="1"/>
+          </p:cNvSpPr>
           <p:nvPr>
-            <p:ph idx="100" type="title" hasCustomPrompt="1"/>
+            <p:ph type="title" idx="100" hasCustomPrompt="1"/>
           </p:nvPr>
         </p:nvSpPr>
         <p:spPr>
@@ -11031,7 +10974,7 @@
           <a:bodyPr wrap="square" lIns="0" tIns="0" rIns="0" bIns="0" rtlCol="0" anchor="ctr"/>
           <a:lstStyle/>
           <a:p>
-            <a:pPr algn="l" indent="0" marL="0">
+            <a:pPr marL="0" indent="0" algn="l">
               <a:buNone/>
             </a:pPr>
             <a:r>
@@ -11048,14 +10991,14 @@
       </p:sp>
       <p:pic>
         <p:nvPicPr>
-          <p:cNvPr id="3" name="03_importancia_shap" descr="/home/claude/case/reports/figures/slides/03_importancia_shap.png">    </p:cNvPr>
+          <p:cNvPr id="3" name="03_importancia_shap" descr="/home/claude/case/reports/figures/slides/03_importancia_shap.png"/>
           <p:cNvPicPr>
             <a:picLocks noChangeAspect="1"/>
           </p:cNvPicPr>
           <p:nvPr/>
         </p:nvPicPr>
         <p:blipFill>
-          <a:blip r:embed="rId1"/>
+          <a:blip r:embed="rId3"/>
           <a:stretch>
             <a:fillRect/>
           </a:stretch>
@@ -11113,7 +11056,7 @@
           <a:bodyPr wrap="square" lIns="0" tIns="0" rIns="0" bIns="0" rtlCol="0" anchor="t"/>
           <a:lstStyle/>
           <a:p>
-            <a:pPr indent="0" marL="0">
+            <a:pPr marL="0" indent="0">
               <a:buNone/>
             </a:pPr>
             <a:r>
@@ -11149,7 +11092,7 @@
           <a:bodyPr wrap="square" lIns="0" tIns="0" rIns="0" bIns="0" rtlCol="0" anchor="t"/>
           <a:lstStyle/>
           <a:p>
-            <a:pPr indent="0" marL="0">
+            <a:pPr marL="0" indent="0">
               <a:buNone/>
             </a:pPr>
             <a:r>
@@ -11185,7 +11128,7 @@
           <a:bodyPr wrap="square" lIns="0" tIns="0" rIns="0" bIns="0" rtlCol="0" anchor="t"/>
           <a:lstStyle/>
           <a:p>
-            <a:pPr indent="0" marL="0">
+            <a:pPr marL="0" indent="0">
               <a:buNone/>
             </a:pPr>
             <a:r>
@@ -11243,7 +11186,7 @@
           <a:bodyPr wrap="square" lIns="0" tIns="0" rIns="0" bIns="0" rtlCol="0" anchor="t"/>
           <a:lstStyle/>
           <a:p>
-            <a:pPr indent="0" marL="0">
+            <a:pPr marL="0" indent="0">
               <a:buNone/>
             </a:pPr>
             <a:r>
@@ -11279,7 +11222,7 @@
           <a:bodyPr wrap="square" lIns="0" tIns="0" rIns="0" bIns="0" rtlCol="0" anchor="t"/>
           <a:lstStyle/>
           <a:p>
-            <a:pPr indent="0" marL="0">
+            <a:pPr marL="0" indent="0">
               <a:buNone/>
             </a:pPr>
             <a:r>
@@ -11315,7 +11258,7 @@
           <a:bodyPr wrap="square" lIns="0" tIns="0" rIns="0" bIns="0" rtlCol="0" anchor="t"/>
           <a:lstStyle/>
           <a:p>
-            <a:pPr indent="0" marL="0">
+            <a:pPr marL="0" indent="0">
               <a:buNone/>
             </a:pPr>
             <a:r>
@@ -11373,7 +11316,7 @@
           <a:bodyPr wrap="square" lIns="0" tIns="0" rIns="0" bIns="0" rtlCol="0" anchor="t"/>
           <a:lstStyle/>
           <a:p>
-            <a:pPr indent="0" marL="0">
+            <a:pPr marL="0" indent="0">
               <a:buNone/>
             </a:pPr>
             <a:r>
@@ -11409,7 +11352,7 @@
           <a:bodyPr wrap="square" lIns="0" tIns="0" rIns="0" bIns="0" rtlCol="0" anchor="t"/>
           <a:lstStyle/>
           <a:p>
-            <a:pPr indent="0" marL="0">
+            <a:pPr marL="0" indent="0">
               <a:buNone/>
             </a:pPr>
             <a:r>
@@ -11445,7 +11388,7 @@
           <a:bodyPr wrap="square" lIns="0" tIns="0" rIns="0" bIns="0" rtlCol="0" anchor="t"/>
           <a:lstStyle/>
           <a:p>
-            <a:pPr indent="0" marL="0">
+            <a:pPr marL="0" indent="0">
               <a:buNone/>
             </a:pPr>
             <a:r>
@@ -11480,7 +11423,7 @@
           </a:prstGeom>
           <a:extLst>
             <a:ext uri="{C572A759-6A51-4108-AA02-DFA0A04FC94B}">
-              <ma14:wrappingTextBoxFlag xmlns:ma14="http://schemas.microsoft.com/office/mac/drawingml/2011/main" val="0"/>
+              <ma14:wrappingTextBoxFlag xmlns="" xmlns:ma14="http://schemas.microsoft.com/office/mac/drawingml/2011/main" val="0"/>
             </a:ext>
           </a:extLst>
         </p:spPr>
@@ -11498,7 +11441,7 @@
           <a:p>
             <a:pPr algn="r"/>
             <a:fld id="{F7021451-1387-4CA6-816F-3879F97B5CBC}" type="slidenum">
-              <a:rPr b="0" lang="en-US"/>
+              <a:rPr lang="en-US" b="0"/>
               <a:t>21</a:t>
             </a:fld>
             <a:endParaRPr lang="en-US"/>
@@ -11533,9 +11476,11 @@
       <p:sp>
         <p:nvSpPr>
           <p:cNvPr id="2" name="Text 0"/>
-          <p:cNvSpPr/>
+          <p:cNvSpPr>
+            <a:spLocks noGrp="1"/>
+          </p:cNvSpPr>
           <p:nvPr>
-            <p:ph idx="100" type="title" hasCustomPrompt="1"/>
+            <p:ph type="title" idx="100" hasCustomPrompt="1"/>
           </p:nvPr>
         </p:nvSpPr>
         <p:spPr>
@@ -11553,7 +11498,7 @@
           <a:bodyPr wrap="square" lIns="0" tIns="0" rIns="0" bIns="0" rtlCol="0" anchor="ctr"/>
           <a:lstStyle/>
           <a:p>
-            <a:pPr algn="l" indent="0" marL="0">
+            <a:pPr marL="0" indent="0" algn="l">
               <a:buNone/>
             </a:pPr>
             <a:r>
@@ -11584,16 +11529,34 @@
         </p:nvGraphicFramePr>
         <p:xfrm>
           <a:off x="548640" y="1600200"/>
-          <a:ext cx="5120640" cy="914400"/>
+          <a:ext cx="5120640" cy="3803904"/>
         </p:xfrm>
         <a:graphic>
           <a:graphicData uri="http://schemas.openxmlformats.org/drawingml/2006/table">
             <a:tbl>
               <a:tblPr/>
               <a:tblGrid>
-                <a:gridCol w="1645920"/>
-                <a:gridCol w="1554480"/>
-                <a:gridCol w="1920240"/>
+                <a:gridCol w="1645920">
+                  <a:extLst>
+                    <a:ext uri="{9D8B030D-6E8A-4147-A177-3AD203B41FA5}">
+                      <a16:colId xmlns:a16="http://schemas.microsoft.com/office/drawing/2014/main" val="20000"/>
+                    </a:ext>
+                  </a:extLst>
+                </a:gridCol>
+                <a:gridCol w="1554480">
+                  <a:extLst>
+                    <a:ext uri="{9D8B030D-6E8A-4147-A177-3AD203B41FA5}">
+                      <a16:colId xmlns:a16="http://schemas.microsoft.com/office/drawing/2014/main" val="20001"/>
+                    </a:ext>
+                  </a:extLst>
+                </a:gridCol>
+                <a:gridCol w="1920240">
+                  <a:extLst>
+                    <a:ext uri="{9D8B030D-6E8A-4147-A177-3AD203B41FA5}">
+                      <a16:colId xmlns:a16="http://schemas.microsoft.com/office/drawing/2014/main" val="20002"/>
+                    </a:ext>
+                  </a:extLst>
+                </a:gridCol>
               </a:tblGrid>
               <a:tr h="475488">
                 <a:tc>
@@ -11601,7 +11564,7 @@
                     <a:bodyPr/>
                     <a:lstStyle/>
                     <a:p>
-                      <a:pPr algn="l" indent="0" marL="0">
+                      <a:pPr marL="0" indent="0" algn="l">
                         <a:buNone/>
                       </a:pPr>
                       <a:r>
@@ -11615,7 +11578,7 @@
                       <a:endParaRPr lang="en-US" sz="1400" dirty="0"/>
                     </a:p>
                   </a:txBody>
-                  <a:tcPr marL="91440" marR="91440" marT="45720" marB="45720" anchor="ctr">
+                  <a:tcPr anchor="ctr">
                     <a:lnL w="0" cap="flat" cmpd="sng" algn="ctr">
                       <a:noFill/>
                     </a:lnL>
@@ -11638,7 +11601,7 @@
                     <a:bodyPr/>
                     <a:lstStyle/>
                     <a:p>
-                      <a:pPr algn="r" indent="0" marL="0">
+                      <a:pPr marL="0" indent="0" algn="r">
                         <a:buNone/>
                       </a:pPr>
                       <a:r>
@@ -11652,7 +11615,7 @@
                       <a:endParaRPr lang="en-US" sz="1400" dirty="0"/>
                     </a:p>
                   </a:txBody>
-                  <a:tcPr marL="91440" marR="91440" marT="45720" marB="45720" anchor="ctr">
+                  <a:tcPr anchor="ctr">
                     <a:lnL w="0" cap="flat" cmpd="sng" algn="ctr">
                       <a:noFill/>
                     </a:lnL>
@@ -11675,7 +11638,7 @@
                     <a:bodyPr/>
                     <a:lstStyle/>
                     <a:p>
-                      <a:pPr algn="r" indent="0" marL="0">
+                      <a:pPr marL="0" indent="0" algn="r">
                         <a:buNone/>
                       </a:pPr>
                       <a:r>
@@ -11689,7 +11652,7 @@
                       <a:endParaRPr lang="en-US" sz="1400" dirty="0"/>
                     </a:p>
                   </a:txBody>
-                  <a:tcPr marL="91440" marR="91440" marT="45720" marB="45720" anchor="ctr">
+                  <a:tcPr anchor="ctr">
                     <a:lnL w="0" cap="flat" cmpd="sng" algn="ctr">
                       <a:noFill/>
                     </a:lnL>
@@ -11707,6 +11670,11 @@
                     </a:solidFill>
                   </a:tcPr>
                 </a:tc>
+                <a:extLst>
+                  <a:ext uri="{0D108BD9-81ED-4DB2-BD59-A6C34878D82A}">
+                    <a16:rowId xmlns:a16="http://schemas.microsoft.com/office/drawing/2014/main" val="10000"/>
+                  </a:ext>
+                </a:extLst>
               </a:tr>
               <a:tr h="475488">
                 <a:tc>
@@ -11714,7 +11682,7 @@
                     <a:bodyPr/>
                     <a:lstStyle/>
                     <a:p>
-                      <a:pPr algn="l" indent="0" marL="0">
+                      <a:pPr marL="0" indent="0" algn="l">
                         <a:buNone/>
                       </a:pPr>
                       <a:r>
@@ -11728,7 +11696,7 @@
                       <a:endParaRPr lang="en-US" sz="1400" dirty="0"/>
                     </a:p>
                   </a:txBody>
-                  <a:tcPr marL="91440" marR="91440" marT="45720" marB="45720" anchor="ctr">
+                  <a:tcPr anchor="ctr">
                     <a:lnL w="0" cap="flat" cmpd="sng" algn="ctr">
                       <a:noFill/>
                     </a:lnL>
@@ -11751,7 +11719,7 @@
                     <a:bodyPr/>
                     <a:lstStyle/>
                     <a:p>
-                      <a:pPr algn="r" indent="0" marL="0">
+                      <a:pPr marL="0" indent="0" algn="r">
                         <a:buNone/>
                       </a:pPr>
                       <a:r>
@@ -11765,7 +11733,7 @@
                       <a:endParaRPr lang="en-US" sz="1400" dirty="0"/>
                     </a:p>
                   </a:txBody>
-                  <a:tcPr marL="91440" marR="91440" marT="45720" marB="45720" anchor="ctr">
+                  <a:tcPr anchor="ctr">
                     <a:lnL w="0" cap="flat" cmpd="sng" algn="ctr">
                       <a:noFill/>
                     </a:lnL>
@@ -11788,7 +11756,7 @@
                     <a:bodyPr/>
                     <a:lstStyle/>
                     <a:p>
-                      <a:pPr algn="r" indent="0" marL="0">
+                      <a:pPr marL="0" indent="0" algn="r">
                         <a:buNone/>
                       </a:pPr>
                       <a:r>
@@ -11802,7 +11770,7 @@
                       <a:endParaRPr lang="en-US" sz="1400" dirty="0"/>
                     </a:p>
                   </a:txBody>
-                  <a:tcPr marL="91440" marR="91440" marT="45720" marB="45720" anchor="ctr">
+                  <a:tcPr anchor="ctr">
                     <a:lnL w="0" cap="flat" cmpd="sng" algn="ctr">
                       <a:noFill/>
                     </a:lnL>
@@ -11820,6 +11788,11 @@
                     </a:solidFill>
                   </a:tcPr>
                 </a:tc>
+                <a:extLst>
+                  <a:ext uri="{0D108BD9-81ED-4DB2-BD59-A6C34878D82A}">
+                    <a16:rowId xmlns:a16="http://schemas.microsoft.com/office/drawing/2014/main" val="10001"/>
+                  </a:ext>
+                </a:extLst>
               </a:tr>
               <a:tr h="475488">
                 <a:tc>
@@ -11827,7 +11800,7 @@
                     <a:bodyPr/>
                     <a:lstStyle/>
                     <a:p>
-                      <a:pPr algn="l" indent="0" marL="0">
+                      <a:pPr marL="0" indent="0" algn="l">
                         <a:buNone/>
                       </a:pPr>
                       <a:r>
@@ -11841,7 +11814,7 @@
                       <a:endParaRPr lang="en-US" sz="1400" dirty="0"/>
                     </a:p>
                   </a:txBody>
-                  <a:tcPr marL="91440" marR="91440" marT="45720" marB="45720" anchor="ctr">
+                  <a:tcPr anchor="ctr">
                     <a:lnL w="0" cap="flat" cmpd="sng" algn="ctr">
                       <a:noFill/>
                     </a:lnL>
@@ -11864,7 +11837,7 @@
                     <a:bodyPr/>
                     <a:lstStyle/>
                     <a:p>
-                      <a:pPr algn="r" indent="0" marL="0">
+                      <a:pPr marL="0" indent="0" algn="r">
                         <a:buNone/>
                       </a:pPr>
                       <a:r>
@@ -11878,7 +11851,7 @@
                       <a:endParaRPr lang="en-US" sz="1400" dirty="0"/>
                     </a:p>
                   </a:txBody>
-                  <a:tcPr marL="91440" marR="91440" marT="45720" marB="45720" anchor="ctr">
+                  <a:tcPr anchor="ctr">
                     <a:lnL w="0" cap="flat" cmpd="sng" algn="ctr">
                       <a:noFill/>
                     </a:lnL>
@@ -11901,7 +11874,7 @@
                     <a:bodyPr/>
                     <a:lstStyle/>
                     <a:p>
-                      <a:pPr algn="r" indent="0" marL="0">
+                      <a:pPr marL="0" indent="0" algn="r">
                         <a:buNone/>
                       </a:pPr>
                       <a:r>
@@ -11915,7 +11888,7 @@
                       <a:endParaRPr lang="en-US" sz="1400" dirty="0"/>
                     </a:p>
                   </a:txBody>
-                  <a:tcPr marL="91440" marR="91440" marT="45720" marB="45720" anchor="ctr">
+                  <a:tcPr anchor="ctr">
                     <a:lnL w="0" cap="flat" cmpd="sng" algn="ctr">
                       <a:noFill/>
                     </a:lnL>
@@ -11933,6 +11906,11 @@
                     </a:solidFill>
                   </a:tcPr>
                 </a:tc>
+                <a:extLst>
+                  <a:ext uri="{0D108BD9-81ED-4DB2-BD59-A6C34878D82A}">
+                    <a16:rowId xmlns:a16="http://schemas.microsoft.com/office/drawing/2014/main" val="10002"/>
+                  </a:ext>
+                </a:extLst>
               </a:tr>
               <a:tr h="475488">
                 <a:tc>
@@ -11940,7 +11918,7 @@
                     <a:bodyPr/>
                     <a:lstStyle/>
                     <a:p>
-                      <a:pPr algn="l" indent="0" marL="0">
+                      <a:pPr marL="0" indent="0" algn="l">
                         <a:buNone/>
                       </a:pPr>
                       <a:r>
@@ -11954,7 +11932,7 @@
                       <a:endParaRPr lang="en-US" sz="1400" dirty="0"/>
                     </a:p>
                   </a:txBody>
-                  <a:tcPr marL="91440" marR="91440" marT="45720" marB="45720" anchor="ctr">
+                  <a:tcPr anchor="ctr">
                     <a:lnL w="0" cap="flat" cmpd="sng" algn="ctr">
                       <a:noFill/>
                     </a:lnL>
@@ -11977,7 +11955,7 @@
                     <a:bodyPr/>
                     <a:lstStyle/>
                     <a:p>
-                      <a:pPr algn="r" indent="0" marL="0">
+                      <a:pPr marL="0" indent="0" algn="r">
                         <a:buNone/>
                       </a:pPr>
                       <a:r>
@@ -11991,7 +11969,7 @@
                       <a:endParaRPr lang="en-US" sz="1400" dirty="0"/>
                     </a:p>
                   </a:txBody>
-                  <a:tcPr marL="91440" marR="91440" marT="45720" marB="45720" anchor="ctr">
+                  <a:tcPr anchor="ctr">
                     <a:lnL w="0" cap="flat" cmpd="sng" algn="ctr">
                       <a:noFill/>
                     </a:lnL>
@@ -12014,7 +11992,7 @@
                     <a:bodyPr/>
                     <a:lstStyle/>
                     <a:p>
-                      <a:pPr algn="r" indent="0" marL="0">
+                      <a:pPr marL="0" indent="0" algn="r">
                         <a:buNone/>
                       </a:pPr>
                       <a:r>
@@ -12028,7 +12006,7 @@
                       <a:endParaRPr lang="en-US" sz="1400" dirty="0"/>
                     </a:p>
                   </a:txBody>
-                  <a:tcPr marL="91440" marR="91440" marT="45720" marB="45720" anchor="ctr">
+                  <a:tcPr anchor="ctr">
                     <a:lnL w="0" cap="flat" cmpd="sng" algn="ctr">
                       <a:noFill/>
                     </a:lnL>
@@ -12046,6 +12024,11 @@
                     </a:solidFill>
                   </a:tcPr>
                 </a:tc>
+                <a:extLst>
+                  <a:ext uri="{0D108BD9-81ED-4DB2-BD59-A6C34878D82A}">
+                    <a16:rowId xmlns:a16="http://schemas.microsoft.com/office/drawing/2014/main" val="10003"/>
+                  </a:ext>
+                </a:extLst>
               </a:tr>
               <a:tr h="475488">
                 <a:tc>
@@ -12053,7 +12036,7 @@
                     <a:bodyPr/>
                     <a:lstStyle/>
                     <a:p>
-                      <a:pPr algn="l" indent="0" marL="0">
+                      <a:pPr marL="0" indent="0" algn="l">
                         <a:buNone/>
                       </a:pPr>
                       <a:r>
@@ -12067,7 +12050,7 @@
                       <a:endParaRPr lang="en-US" sz="1400" dirty="0"/>
                     </a:p>
                   </a:txBody>
-                  <a:tcPr marL="91440" marR="91440" marT="45720" marB="45720" anchor="ctr">
+                  <a:tcPr anchor="ctr">
                     <a:lnL w="0" cap="flat" cmpd="sng" algn="ctr">
                       <a:noFill/>
                     </a:lnL>
@@ -12090,7 +12073,7 @@
                     <a:bodyPr/>
                     <a:lstStyle/>
                     <a:p>
-                      <a:pPr algn="r" indent="0" marL="0">
+                      <a:pPr marL="0" indent="0" algn="r">
                         <a:buNone/>
                       </a:pPr>
                       <a:r>
@@ -12104,7 +12087,7 @@
                       <a:endParaRPr lang="en-US" sz="1400" dirty="0"/>
                     </a:p>
                   </a:txBody>
-                  <a:tcPr marL="91440" marR="91440" marT="45720" marB="45720" anchor="ctr">
+                  <a:tcPr anchor="ctr">
                     <a:lnL w="0" cap="flat" cmpd="sng" algn="ctr">
                       <a:noFill/>
                     </a:lnL>
@@ -12127,7 +12110,7 @@
                     <a:bodyPr/>
                     <a:lstStyle/>
                     <a:p>
-                      <a:pPr algn="r" indent="0" marL="0">
+                      <a:pPr marL="0" indent="0" algn="r">
                         <a:buNone/>
                       </a:pPr>
                       <a:r>
@@ -12141,7 +12124,7 @@
                       <a:endParaRPr lang="en-US" sz="1400" dirty="0"/>
                     </a:p>
                   </a:txBody>
-                  <a:tcPr marL="91440" marR="91440" marT="45720" marB="45720" anchor="ctr">
+                  <a:tcPr anchor="ctr">
                     <a:lnL w="0" cap="flat" cmpd="sng" algn="ctr">
                       <a:noFill/>
                     </a:lnL>
@@ -12159,6 +12142,11 @@
                     </a:solidFill>
                   </a:tcPr>
                 </a:tc>
+                <a:extLst>
+                  <a:ext uri="{0D108BD9-81ED-4DB2-BD59-A6C34878D82A}">
+                    <a16:rowId xmlns:a16="http://schemas.microsoft.com/office/drawing/2014/main" val="10004"/>
+                  </a:ext>
+                </a:extLst>
               </a:tr>
               <a:tr h="475488">
                 <a:tc>
@@ -12166,7 +12154,7 @@
                     <a:bodyPr/>
                     <a:lstStyle/>
                     <a:p>
-                      <a:pPr algn="l" indent="0" marL="0">
+                      <a:pPr marL="0" indent="0" algn="l">
                         <a:buNone/>
                       </a:pPr>
                       <a:r>
@@ -12180,7 +12168,7 @@
                       <a:endParaRPr lang="en-US" sz="1400" dirty="0"/>
                     </a:p>
                   </a:txBody>
-                  <a:tcPr marL="91440" marR="91440" marT="45720" marB="45720" anchor="ctr">
+                  <a:tcPr anchor="ctr">
                     <a:lnL w="0" cap="flat" cmpd="sng" algn="ctr">
                       <a:noFill/>
                     </a:lnL>
@@ -12203,7 +12191,7 @@
                     <a:bodyPr/>
                     <a:lstStyle/>
                     <a:p>
-                      <a:pPr algn="r" indent="0" marL="0">
+                      <a:pPr marL="0" indent="0" algn="r">
                         <a:buNone/>
                       </a:pPr>
                       <a:r>
@@ -12217,7 +12205,7 @@
                       <a:endParaRPr lang="en-US" sz="1400" dirty="0"/>
                     </a:p>
                   </a:txBody>
-                  <a:tcPr marL="91440" marR="91440" marT="45720" marB="45720" anchor="ctr">
+                  <a:tcPr anchor="ctr">
                     <a:lnL w="0" cap="flat" cmpd="sng" algn="ctr">
                       <a:noFill/>
                     </a:lnL>
@@ -12240,7 +12228,7 @@
                     <a:bodyPr/>
                     <a:lstStyle/>
                     <a:p>
-                      <a:pPr algn="r" indent="0" marL="0">
+                      <a:pPr marL="0" indent="0" algn="r">
                         <a:buNone/>
                       </a:pPr>
                       <a:r>
@@ -12254,7 +12242,7 @@
                       <a:endParaRPr lang="en-US" sz="1400" dirty="0"/>
                     </a:p>
                   </a:txBody>
-                  <a:tcPr marL="91440" marR="91440" marT="45720" marB="45720" anchor="ctr">
+                  <a:tcPr anchor="ctr">
                     <a:lnL w="0" cap="flat" cmpd="sng" algn="ctr">
                       <a:noFill/>
                     </a:lnL>
@@ -12272,6 +12260,11 @@
                     </a:solidFill>
                   </a:tcPr>
                 </a:tc>
+                <a:extLst>
+                  <a:ext uri="{0D108BD9-81ED-4DB2-BD59-A6C34878D82A}">
+                    <a16:rowId xmlns:a16="http://schemas.microsoft.com/office/drawing/2014/main" val="10005"/>
+                  </a:ext>
+                </a:extLst>
               </a:tr>
               <a:tr h="475488">
                 <a:tc>
@@ -12279,7 +12272,7 @@
                     <a:bodyPr/>
                     <a:lstStyle/>
                     <a:p>
-                      <a:pPr algn="l" indent="0" marL="0">
+                      <a:pPr marL="0" indent="0" algn="l">
                         <a:buNone/>
                       </a:pPr>
                       <a:r>
@@ -12293,7 +12286,7 @@
                       <a:endParaRPr lang="en-US" sz="1400" dirty="0"/>
                     </a:p>
                   </a:txBody>
-                  <a:tcPr marL="91440" marR="91440" marT="45720" marB="45720" anchor="ctr">
+                  <a:tcPr anchor="ctr">
                     <a:lnL w="0" cap="flat" cmpd="sng" algn="ctr">
                       <a:noFill/>
                     </a:lnL>
@@ -12316,7 +12309,7 @@
                     <a:bodyPr/>
                     <a:lstStyle/>
                     <a:p>
-                      <a:pPr algn="r" indent="0" marL="0">
+                      <a:pPr marL="0" indent="0" algn="r">
                         <a:buNone/>
                       </a:pPr>
                       <a:r>
@@ -12330,7 +12323,7 @@
                       <a:endParaRPr lang="en-US" sz="1400" dirty="0"/>
                     </a:p>
                   </a:txBody>
-                  <a:tcPr marL="91440" marR="91440" marT="45720" marB="45720" anchor="ctr">
+                  <a:tcPr anchor="ctr">
                     <a:lnL w="0" cap="flat" cmpd="sng" algn="ctr">
                       <a:noFill/>
                     </a:lnL>
@@ -12353,7 +12346,7 @@
                     <a:bodyPr/>
                     <a:lstStyle/>
                     <a:p>
-                      <a:pPr algn="r" indent="0" marL="0">
+                      <a:pPr marL="0" indent="0" algn="r">
                         <a:buNone/>
                       </a:pPr>
                       <a:r>
@@ -12367,7 +12360,7 @@
                       <a:endParaRPr lang="en-US" sz="1400" dirty="0"/>
                     </a:p>
                   </a:txBody>
-                  <a:tcPr marL="91440" marR="91440" marT="45720" marB="45720" anchor="ctr">
+                  <a:tcPr anchor="ctr">
                     <a:lnL w="0" cap="flat" cmpd="sng" algn="ctr">
                       <a:noFill/>
                     </a:lnL>
@@ -12385,6 +12378,11 @@
                     </a:solidFill>
                   </a:tcPr>
                 </a:tc>
+                <a:extLst>
+                  <a:ext uri="{0D108BD9-81ED-4DB2-BD59-A6C34878D82A}">
+                    <a16:rowId xmlns:a16="http://schemas.microsoft.com/office/drawing/2014/main" val="10006"/>
+                  </a:ext>
+                </a:extLst>
               </a:tr>
               <a:tr h="475488">
                 <a:tc>
@@ -12392,7 +12390,7 @@
                     <a:bodyPr/>
                     <a:lstStyle/>
                     <a:p>
-                      <a:pPr algn="l" indent="0" marL="0">
+                      <a:pPr marL="0" indent="0" algn="l">
                         <a:buNone/>
                       </a:pPr>
                       <a:r>
@@ -12406,7 +12404,7 @@
                       <a:endParaRPr lang="en-US" sz="1400" dirty="0"/>
                     </a:p>
                   </a:txBody>
-                  <a:tcPr marL="91440" marR="91440" marT="45720" marB="45720" anchor="ctr">
+                  <a:tcPr anchor="ctr">
                     <a:lnL w="0" cap="flat" cmpd="sng" algn="ctr">
                       <a:noFill/>
                     </a:lnL>
@@ -12429,7 +12427,7 @@
                     <a:bodyPr/>
                     <a:lstStyle/>
                     <a:p>
-                      <a:pPr algn="r" indent="0" marL="0">
+                      <a:pPr marL="0" indent="0" algn="r">
                         <a:buNone/>
                       </a:pPr>
                       <a:r>
@@ -12443,7 +12441,7 @@
                       <a:endParaRPr lang="en-US" sz="1400" dirty="0"/>
                     </a:p>
                   </a:txBody>
-                  <a:tcPr marL="91440" marR="91440" marT="45720" marB="45720" anchor="ctr">
+                  <a:tcPr anchor="ctr">
                     <a:lnL w="0" cap="flat" cmpd="sng" algn="ctr">
                       <a:noFill/>
                     </a:lnL>
@@ -12466,7 +12464,7 @@
                     <a:bodyPr/>
                     <a:lstStyle/>
                     <a:p>
-                      <a:pPr algn="r" indent="0" marL="0">
+                      <a:pPr marL="0" indent="0" algn="r">
                         <a:buNone/>
                       </a:pPr>
                       <a:r>
@@ -12480,7 +12478,7 @@
                       <a:endParaRPr lang="en-US" sz="1400" dirty="0"/>
                     </a:p>
                   </a:txBody>
-                  <a:tcPr marL="91440" marR="91440" marT="45720" marB="45720" anchor="ctr">
+                  <a:tcPr anchor="ctr">
                     <a:lnL w="0" cap="flat" cmpd="sng" algn="ctr">
                       <a:noFill/>
                     </a:lnL>
@@ -12498,6 +12496,11 @@
                     </a:solidFill>
                   </a:tcPr>
                 </a:tc>
+                <a:extLst>
+                  <a:ext uri="{0D108BD9-81ED-4DB2-BD59-A6C34878D82A}">
+                    <a16:rowId xmlns:a16="http://schemas.microsoft.com/office/drawing/2014/main" val="10007"/>
+                  </a:ext>
+                </a:extLst>
               </a:tr>
             </a:tbl>
           </a:graphicData>
@@ -12505,14 +12508,14 @@
       </p:graphicFrame>
       <p:pic>
         <p:nvPicPr>
-          <p:cNvPr id="4" name="03_faixa_previsao" descr="/home/claude/case/reports/figures/slides/03_faixa_previsao.png">    </p:cNvPr>
+          <p:cNvPr id="4" name="03_faixa_previsao" descr="/home/claude/case/reports/figures/slides/03_faixa_previsao.png"/>
           <p:cNvPicPr>
             <a:picLocks noChangeAspect="1"/>
           </p:cNvPicPr>
           <p:nvPr/>
         </p:nvPicPr>
         <p:blipFill>
-          <a:blip r:embed="rId1"/>
+          <a:blip r:embed="rId3"/>
           <a:stretch>
             <a:fillRect/>
           </a:stretch>
@@ -12548,7 +12551,7 @@
           <a:bodyPr wrap="square" lIns="0" tIns="0" rIns="0" bIns="0" rtlCol="0" anchor="t"/>
           <a:lstStyle/>
           <a:p>
-            <a:pPr indent="0" marL="0">
+            <a:pPr marL="0" indent="0">
               <a:buNone/>
             </a:pPr>
             <a:r>
@@ -12583,7 +12586,7 @@
           </a:prstGeom>
           <a:extLst>
             <a:ext uri="{C572A759-6A51-4108-AA02-DFA0A04FC94B}">
-              <ma14:wrappingTextBoxFlag xmlns:ma14="http://schemas.microsoft.com/office/mac/drawingml/2011/main" val="0"/>
+              <ma14:wrappingTextBoxFlag xmlns="" xmlns:ma14="http://schemas.microsoft.com/office/mac/drawingml/2011/main" val="0"/>
             </a:ext>
           </a:extLst>
         </p:spPr>
@@ -12601,7 +12604,7 @@
           <a:p>
             <a:pPr algn="r"/>
             <a:fld id="{F7021451-1387-4CA6-816F-3879F97B5CBC}" type="slidenum">
-              <a:rPr b="0" lang="en-US"/>
+              <a:rPr lang="en-US" b="0"/>
               <a:t>22</a:t>
             </a:fld>
             <a:endParaRPr lang="en-US"/>
@@ -12636,9 +12639,11 @@
       <p:sp>
         <p:nvSpPr>
           <p:cNvPr id="2" name="Text 0"/>
-          <p:cNvSpPr/>
+          <p:cNvSpPr>
+            <a:spLocks noGrp="1"/>
+          </p:cNvSpPr>
           <p:nvPr>
-            <p:ph idx="100" type="title" hasCustomPrompt="1"/>
+            <p:ph type="title" idx="100" hasCustomPrompt="1"/>
           </p:nvPr>
         </p:nvSpPr>
         <p:spPr>
@@ -12656,7 +12661,7 @@
           <a:bodyPr wrap="square" lIns="0" tIns="0" rIns="0" bIns="0" rtlCol="0" anchor="ctr"/>
           <a:lstStyle/>
           <a:p>
-            <a:pPr algn="l" indent="0" marL="0">
+            <a:pPr marL="0" indent="0" algn="l">
               <a:buNone/>
             </a:pPr>
             <a:r>
@@ -12736,7 +12741,7 @@
           <a:bodyPr wrap="square" lIns="0" tIns="0" rIns="0" bIns="0" rtlCol="0" anchor="t"/>
           <a:lstStyle/>
           <a:p>
-            <a:pPr indent="0" marL="0">
+            <a:pPr marL="0" indent="0">
               <a:buNone/>
             </a:pPr>
             <a:r>
@@ -12866,7 +12871,7 @@
           <a:bodyPr wrap="square" lIns="0" tIns="0" rIns="0" bIns="0" rtlCol="0" anchor="t"/>
           <a:lstStyle/>
           <a:p>
-            <a:pPr indent="0" marL="0">
+            <a:pPr marL="0" indent="0">
               <a:buNone/>
             </a:pPr>
             <a:r>
@@ -12908,7 +12913,7 @@
               </a:spcAft>
               <a:buSzPct val="100000"/>
               <a:buFont typeface="+mj-lt"/>
-              <a:buAutoNum type="arabicPeriod" startAt="1"/>
+              <a:buAutoNum type="arabicPeriod"/>
             </a:pPr>
             <a:r>
               <a:rPr lang="en-US" sz="1500" dirty="0">
@@ -12927,7 +12932,7 @@
               </a:spcAft>
               <a:buSzPct val="100000"/>
               <a:buFont typeface="+mj-lt"/>
-              <a:buAutoNum type="arabicPeriod" startAt="1"/>
+              <a:buAutoNum type="arabicPeriod"/>
             </a:pPr>
             <a:r>
               <a:rPr lang="en-US" sz="1500" dirty="0">
@@ -12946,7 +12951,7 @@
               </a:spcAft>
               <a:buSzPct val="100000"/>
               <a:buFont typeface="+mj-lt"/>
-              <a:buAutoNum type="arabicPeriod" startAt="1"/>
+              <a:buAutoNum type="arabicPeriod"/>
             </a:pPr>
             <a:r>
               <a:rPr lang="en-US" sz="1500" dirty="0">
@@ -12965,7 +12970,7 @@
               </a:spcAft>
               <a:buSzPct val="100000"/>
               <a:buFont typeface="+mj-lt"/>
-              <a:buAutoNum type="arabicPeriod" startAt="1"/>
+              <a:buAutoNum type="arabicPeriod"/>
             </a:pPr>
             <a:r>
               <a:rPr lang="en-US" sz="1500" dirty="0">
@@ -12984,7 +12989,7 @@
               </a:spcAft>
               <a:buSzPct val="100000"/>
               <a:buFont typeface="+mj-lt"/>
-              <a:buAutoNum type="arabicPeriod" startAt="1"/>
+              <a:buAutoNum type="arabicPeriod"/>
             </a:pPr>
             <a:r>
               <a:rPr lang="en-US" sz="1500" dirty="0">
@@ -13018,7 +13023,7 @@
           </a:prstGeom>
           <a:extLst>
             <a:ext uri="{C572A759-6A51-4108-AA02-DFA0A04FC94B}">
-              <ma14:wrappingTextBoxFlag xmlns:ma14="http://schemas.microsoft.com/office/mac/drawingml/2011/main" val="0"/>
+              <ma14:wrappingTextBoxFlag xmlns="" xmlns:ma14="http://schemas.microsoft.com/office/mac/drawingml/2011/main" val="0"/>
             </a:ext>
           </a:extLst>
         </p:spPr>
@@ -13036,7 +13041,7 @@
           <a:p>
             <a:pPr algn="r"/>
             <a:fld id="{F7021451-1387-4CA6-816F-3879F97B5CBC}" type="slidenum">
-              <a:rPr b="0" lang="en-US"/>
+              <a:rPr lang="en-US" b="0"/>
               <a:t>23</a:t>
             </a:fld>
             <a:endParaRPr lang="en-US"/>
@@ -13071,9 +13076,11 @@
       <p:sp>
         <p:nvSpPr>
           <p:cNvPr id="2" name="Text 0"/>
-          <p:cNvSpPr/>
+          <p:cNvSpPr>
+            <a:spLocks noGrp="1"/>
+          </p:cNvSpPr>
           <p:nvPr>
-            <p:ph idx="100" type="body" hasCustomPrompt="1"/>
+            <p:ph type="body" idx="100" hasCustomPrompt="1"/>
           </p:nvPr>
         </p:nvSpPr>
         <p:spPr>
@@ -13091,7 +13098,7 @@
           <a:bodyPr wrap="square" lIns="0" tIns="0" rIns="0" bIns="0" rtlCol="0"/>
           <a:lstStyle/>
           <a:p>
-            <a:pPr algn="l" indent="0" marL="0">
+            <a:pPr marL="0" indent="0" algn="l">
               <a:buNone/>
             </a:pPr>
             <a:r>
@@ -13109,9 +13116,11 @@
       <p:sp>
         <p:nvSpPr>
           <p:cNvPr id="3" name="Text 0"/>
-          <p:cNvSpPr/>
+          <p:cNvSpPr>
+            <a:spLocks noGrp="1"/>
+          </p:cNvSpPr>
           <p:nvPr>
-            <p:ph idx="101" type="title" hasCustomPrompt="1"/>
+            <p:ph type="title" idx="101" hasCustomPrompt="1"/>
           </p:nvPr>
         </p:nvSpPr>
         <p:spPr>
@@ -13129,7 +13138,7 @@
           <a:bodyPr wrap="square" lIns="0" tIns="0" rIns="0" bIns="0" rtlCol="0" anchor="t"/>
           <a:lstStyle/>
           <a:p>
-            <a:pPr algn="l" indent="0" marL="0">
+            <a:pPr marL="0" indent="0" algn="l">
               <a:buNone/>
             </a:pPr>
             <a:r>
@@ -13164,7 +13173,7 @@
           </a:prstGeom>
           <a:extLst>
             <a:ext uri="{C572A759-6A51-4108-AA02-DFA0A04FC94B}">
-              <ma14:wrappingTextBoxFlag xmlns:ma14="http://schemas.microsoft.com/office/mac/drawingml/2011/main" val="0"/>
+              <ma14:wrappingTextBoxFlag xmlns="" xmlns:ma14="http://schemas.microsoft.com/office/mac/drawingml/2011/main" val="0"/>
             </a:ext>
           </a:extLst>
         </p:spPr>
@@ -13182,7 +13191,7 @@
           <a:p>
             <a:pPr algn="r"/>
             <a:fld id="{F7021451-1387-4CA6-816F-3879F97B5CBC}" type="slidenum">
-              <a:rPr b="0" lang="en-US"/>
+              <a:rPr lang="en-US" b="0"/>
               <a:t>24</a:t>
             </a:fld>
             <a:endParaRPr lang="en-US"/>
@@ -13217,9 +13226,11 @@
       <p:sp>
         <p:nvSpPr>
           <p:cNvPr id="2" name="Text 0"/>
-          <p:cNvSpPr/>
+          <p:cNvSpPr>
+            <a:spLocks noGrp="1"/>
+          </p:cNvSpPr>
           <p:nvPr>
-            <p:ph idx="100" type="title" hasCustomPrompt="1"/>
+            <p:ph type="title" idx="100" hasCustomPrompt="1"/>
           </p:nvPr>
         </p:nvSpPr>
         <p:spPr>
@@ -13237,7 +13248,7 @@
           <a:bodyPr wrap="square" lIns="0" tIns="0" rIns="0" bIns="0" rtlCol="0" anchor="ctr"/>
           <a:lstStyle/>
           <a:p>
-            <a:pPr algn="l" indent="0" marL="0">
+            <a:pPr marL="0" indent="0" algn="l">
               <a:buNone/>
             </a:pPr>
             <a:r>
@@ -13295,7 +13306,7 @@
           <a:bodyPr wrap="square" lIns="0" tIns="0" rIns="0" bIns="0" rtlCol="0" anchor="t"/>
           <a:lstStyle/>
           <a:p>
-            <a:pPr indent="0" marL="0">
+            <a:pPr marL="0" indent="0">
               <a:buNone/>
             </a:pPr>
             <a:r>
@@ -13331,7 +13342,7 @@
           <a:bodyPr wrap="square" lIns="0" tIns="0" rIns="0" bIns="0" rtlCol="0" anchor="t"/>
           <a:lstStyle/>
           <a:p>
-            <a:pPr indent="0" marL="0">
+            <a:pPr marL="0" indent="0">
               <a:buNone/>
             </a:pPr>
             <a:r>
@@ -13367,7 +13378,7 @@
           <a:bodyPr wrap="square" lIns="0" tIns="0" rIns="0" bIns="0" rtlCol="0" anchor="t"/>
           <a:lstStyle/>
           <a:p>
-            <a:pPr indent="0" marL="0">
+            <a:pPr marL="0" indent="0">
               <a:buNone/>
             </a:pPr>
             <a:r>
@@ -13425,7 +13436,7 @@
           <a:bodyPr wrap="square" lIns="0" tIns="0" rIns="0" bIns="0" rtlCol="0" anchor="t"/>
           <a:lstStyle/>
           <a:p>
-            <a:pPr indent="0" marL="0">
+            <a:pPr marL="0" indent="0">
               <a:buNone/>
             </a:pPr>
             <a:r>
@@ -13461,7 +13472,7 @@
           <a:bodyPr wrap="square" lIns="0" tIns="0" rIns="0" bIns="0" rtlCol="0" anchor="t"/>
           <a:lstStyle/>
           <a:p>
-            <a:pPr indent="0" marL="0">
+            <a:pPr marL="0" indent="0">
               <a:buNone/>
             </a:pPr>
             <a:r>
@@ -13497,7 +13508,7 @@
           <a:bodyPr wrap="square" lIns="0" tIns="0" rIns="0" bIns="0" rtlCol="0" anchor="t"/>
           <a:lstStyle/>
           <a:p>
-            <a:pPr indent="0" marL="0">
+            <a:pPr marL="0" indent="0">
               <a:buNone/>
             </a:pPr>
             <a:r>
@@ -13555,7 +13566,7 @@
           <a:bodyPr wrap="square" lIns="0" tIns="0" rIns="0" bIns="0" rtlCol="0" anchor="t"/>
           <a:lstStyle/>
           <a:p>
-            <a:pPr indent="0" marL="0">
+            <a:pPr marL="0" indent="0">
               <a:buNone/>
             </a:pPr>
             <a:r>
@@ -13591,7 +13602,7 @@
           <a:bodyPr wrap="square" lIns="0" tIns="0" rIns="0" bIns="0" rtlCol="0" anchor="t"/>
           <a:lstStyle/>
           <a:p>
-            <a:pPr indent="0" marL="0">
+            <a:pPr marL="0" indent="0">
               <a:buNone/>
             </a:pPr>
             <a:r>
@@ -13627,7 +13638,7 @@
           <a:bodyPr wrap="square" lIns="0" tIns="0" rIns="0" bIns="0" rtlCol="0" anchor="t"/>
           <a:lstStyle/>
           <a:p>
-            <a:pPr indent="0" marL="0">
+            <a:pPr marL="0" indent="0">
               <a:buNone/>
             </a:pPr>
             <a:r>
@@ -13685,7 +13696,7 @@
           <a:bodyPr wrap="square" lIns="0" tIns="0" rIns="0" bIns="0" rtlCol="0" anchor="t"/>
           <a:lstStyle/>
           <a:p>
-            <a:pPr indent="0" marL="0">
+            <a:pPr marL="0" indent="0">
               <a:buNone/>
             </a:pPr>
             <a:r>
@@ -13721,7 +13732,7 @@
           <a:bodyPr wrap="square" lIns="0" tIns="0" rIns="0" bIns="0" rtlCol="0" anchor="t"/>
           <a:lstStyle/>
           <a:p>
-            <a:pPr indent="0" marL="0">
+            <a:pPr marL="0" indent="0">
               <a:buNone/>
             </a:pPr>
             <a:r>
@@ -13757,7 +13768,7 @@
           <a:bodyPr wrap="square" lIns="0" tIns="0" rIns="0" bIns="0" rtlCol="0" anchor="t"/>
           <a:lstStyle/>
           <a:p>
-            <a:pPr indent="0" marL="0">
+            <a:pPr marL="0" indent="0">
               <a:buNone/>
             </a:pPr>
             <a:r>
@@ -13815,7 +13826,7 @@
           <a:bodyPr wrap="square" lIns="0" tIns="0" rIns="0" bIns="0" rtlCol="0" anchor="t"/>
           <a:lstStyle/>
           <a:p>
-            <a:pPr indent="0" marL="0">
+            <a:pPr marL="0" indent="0">
               <a:buNone/>
             </a:pPr>
             <a:r>
@@ -13851,7 +13862,7 @@
           <a:bodyPr wrap="square" lIns="0" tIns="0" rIns="0" bIns="0" rtlCol="0" anchor="t"/>
           <a:lstStyle/>
           <a:p>
-            <a:pPr indent="0" marL="0">
+            <a:pPr marL="0" indent="0">
               <a:buNone/>
             </a:pPr>
             <a:r>
@@ -13887,7 +13898,7 @@
           <a:bodyPr wrap="square" lIns="0" tIns="0" rIns="0" bIns="0" rtlCol="0" anchor="t"/>
           <a:lstStyle/>
           <a:p>
-            <a:pPr indent="0" marL="0">
+            <a:pPr marL="0" indent="0">
               <a:buNone/>
             </a:pPr>
             <a:r>
@@ -13922,7 +13933,7 @@
           </a:prstGeom>
           <a:extLst>
             <a:ext uri="{C572A759-6A51-4108-AA02-DFA0A04FC94B}">
-              <ma14:wrappingTextBoxFlag xmlns:ma14="http://schemas.microsoft.com/office/mac/drawingml/2011/main" val="0"/>
+              <ma14:wrappingTextBoxFlag xmlns="" xmlns:ma14="http://schemas.microsoft.com/office/mac/drawingml/2011/main" val="0"/>
             </a:ext>
           </a:extLst>
         </p:spPr>
@@ -13940,7 +13951,7 @@
           <a:p>
             <a:pPr algn="r"/>
             <a:fld id="{F7021451-1387-4CA6-816F-3879F97B5CBC}" type="slidenum">
-              <a:rPr b="0" lang="en-US"/>
+              <a:rPr lang="en-US" b="0"/>
               <a:t>25</a:t>
             </a:fld>
             <a:endParaRPr lang="en-US"/>
@@ -13975,9 +13986,11 @@
       <p:sp>
         <p:nvSpPr>
           <p:cNvPr id="2" name="Text 0"/>
-          <p:cNvSpPr/>
+          <p:cNvSpPr>
+            <a:spLocks noGrp="1"/>
+          </p:cNvSpPr>
           <p:nvPr>
-            <p:ph idx="100" type="title" hasCustomPrompt="1"/>
+            <p:ph type="title" idx="100" hasCustomPrompt="1"/>
           </p:nvPr>
         </p:nvSpPr>
         <p:spPr>
@@ -13995,7 +14008,7 @@
           <a:bodyPr wrap="square" lIns="0" tIns="0" rIns="0" bIns="0" rtlCol="0" anchor="ctr"/>
           <a:lstStyle/>
           <a:p>
-            <a:pPr algn="l" indent="0" marL="0">
+            <a:pPr marL="0" indent="0" algn="l">
               <a:buNone/>
             </a:pPr>
             <a:r>
@@ -14053,7 +14066,7 @@
           <a:bodyPr wrap="square" lIns="0" tIns="0" rIns="0" bIns="0" rtlCol="0" anchor="t"/>
           <a:lstStyle/>
           <a:p>
-            <a:pPr indent="0" marL="0">
+            <a:pPr marL="0" indent="0">
               <a:buNone/>
             </a:pPr>
             <a:r>
@@ -14089,7 +14102,7 @@
           <a:bodyPr wrap="square" lIns="0" tIns="0" rIns="0" bIns="0" rtlCol="0" anchor="t"/>
           <a:lstStyle/>
           <a:p>
-            <a:pPr indent="0" marL="0">
+            <a:pPr marL="0" indent="0">
               <a:buNone/>
             </a:pPr>
             <a:r>
@@ -14167,7 +14180,7 @@
           <a:bodyPr wrap="square" lIns="0" tIns="0" rIns="0" bIns="0" rtlCol="0" anchor="t"/>
           <a:lstStyle/>
           <a:p>
-            <a:pPr indent="0" marL="0">
+            <a:pPr marL="0" indent="0">
               <a:buNone/>
             </a:pPr>
             <a:r>
@@ -14203,7 +14216,7 @@
           <a:bodyPr wrap="square" lIns="0" tIns="0" rIns="0" bIns="0" rtlCol="0" anchor="t"/>
           <a:lstStyle/>
           <a:p>
-            <a:pPr indent="0" marL="0">
+            <a:pPr marL="0" indent="0">
               <a:buNone/>
             </a:pPr>
             <a:r>
@@ -14281,7 +14294,7 @@
           <a:bodyPr wrap="square" lIns="0" tIns="0" rIns="0" bIns="0" rtlCol="0" anchor="t"/>
           <a:lstStyle/>
           <a:p>
-            <a:pPr indent="0" marL="0">
+            <a:pPr marL="0" indent="0">
               <a:buNone/>
             </a:pPr>
             <a:r>
@@ -14317,7 +14330,7 @@
           <a:bodyPr wrap="square" lIns="0" tIns="0" rIns="0" bIns="0" rtlCol="0" anchor="t"/>
           <a:lstStyle/>
           <a:p>
-            <a:pPr indent="0" marL="0">
+            <a:pPr marL="0" indent="0">
               <a:buNone/>
             </a:pPr>
             <a:r>
@@ -14395,7 +14408,7 @@
           <a:bodyPr wrap="square" lIns="0" tIns="0" rIns="0" bIns="0" rtlCol="0" anchor="t"/>
           <a:lstStyle/>
           <a:p>
-            <a:pPr indent="0" marL="0">
+            <a:pPr marL="0" indent="0">
               <a:buNone/>
             </a:pPr>
             <a:r>
@@ -14431,7 +14444,7 @@
           <a:bodyPr wrap="square" lIns="0" tIns="0" rIns="0" bIns="0" rtlCol="0" anchor="t"/>
           <a:lstStyle/>
           <a:p>
-            <a:pPr indent="0" marL="0">
+            <a:pPr marL="0" indent="0">
               <a:buNone/>
             </a:pPr>
             <a:r>
@@ -14509,7 +14522,7 @@
           <a:bodyPr wrap="square" lIns="0" tIns="0" rIns="0" bIns="0" rtlCol="0" anchor="t"/>
           <a:lstStyle/>
           <a:p>
-            <a:pPr indent="0" marL="0">
+            <a:pPr marL="0" indent="0">
               <a:buNone/>
             </a:pPr>
             <a:r>
@@ -14545,7 +14558,7 @@
           <a:bodyPr wrap="square" lIns="0" tIns="0" rIns="0" bIns="0" rtlCol="0" anchor="t"/>
           <a:lstStyle/>
           <a:p>
-            <a:pPr indent="0" marL="0">
+            <a:pPr marL="0" indent="0">
               <a:buNone/>
             </a:pPr>
             <a:r>
@@ -14603,7 +14616,7 @@
           <a:bodyPr wrap="square" lIns="0" tIns="0" rIns="0" bIns="0" rtlCol="0" anchor="ctr"/>
           <a:lstStyle/>
           <a:p>
-            <a:pPr indent="0" marL="0">
+            <a:pPr marL="0" indent="0">
               <a:buNone/>
             </a:pPr>
             <a:r>
@@ -14614,9 +14627,6 @@
               </a:rPr>
               <a:t>Ressalva obrigatória: </a:t>
             </a:r>
-            <a:pPr indent="0" marL="0">
-              <a:buNone/>
-            </a:pPr>
             <a:r>
               <a:rPr lang="en-US" sz="1500" dirty="0">
                 <a:solidFill>
@@ -14649,7 +14659,7 @@
           </a:prstGeom>
           <a:extLst>
             <a:ext uri="{C572A759-6A51-4108-AA02-DFA0A04FC94B}">
-              <ma14:wrappingTextBoxFlag xmlns:ma14="http://schemas.microsoft.com/office/mac/drawingml/2011/main" val="0"/>
+              <ma14:wrappingTextBoxFlag xmlns="" xmlns:ma14="http://schemas.microsoft.com/office/mac/drawingml/2011/main" val="0"/>
             </a:ext>
           </a:extLst>
         </p:spPr>
@@ -14667,7 +14677,7 @@
           <a:p>
             <a:pPr algn="r"/>
             <a:fld id="{F7021451-1387-4CA6-816F-3879F97B5CBC}" type="slidenum">
-              <a:rPr b="0" lang="en-US"/>
+              <a:rPr lang="en-US" b="0"/>
               <a:t>26</a:t>
             </a:fld>
             <a:endParaRPr lang="en-US"/>
@@ -14702,9 +14712,11 @@
       <p:sp>
         <p:nvSpPr>
           <p:cNvPr id="2" name="Text 0"/>
-          <p:cNvSpPr/>
+          <p:cNvSpPr>
+            <a:spLocks noGrp="1"/>
+          </p:cNvSpPr>
           <p:nvPr>
-            <p:ph idx="100" type="title" hasCustomPrompt="1"/>
+            <p:ph type="title" idx="100" hasCustomPrompt="1"/>
           </p:nvPr>
         </p:nvSpPr>
         <p:spPr>
@@ -14722,7 +14734,7 @@
           <a:bodyPr wrap="square" lIns="0" tIns="0" rIns="0" bIns="0" rtlCol="0" anchor="ctr"/>
           <a:lstStyle/>
           <a:p>
-            <a:pPr algn="l" indent="0" marL="0">
+            <a:pPr marL="0" indent="0" algn="l">
               <a:buNone/>
             </a:pPr>
             <a:r>
@@ -14753,15 +14765,27 @@
         </p:nvGraphicFramePr>
         <p:xfrm>
           <a:off x="548640" y="1600200"/>
-          <a:ext cx="5394960" cy="914400"/>
+          <a:ext cx="5394960" cy="2267712"/>
         </p:xfrm>
         <a:graphic>
           <a:graphicData uri="http://schemas.openxmlformats.org/drawingml/2006/table">
             <a:tbl>
               <a:tblPr/>
               <a:tblGrid>
-                <a:gridCol w="1280160"/>
-                <a:gridCol w="4114800"/>
+                <a:gridCol w="1280160">
+                  <a:extLst>
+                    <a:ext uri="{9D8B030D-6E8A-4147-A177-3AD203B41FA5}">
+                      <a16:colId xmlns:a16="http://schemas.microsoft.com/office/drawing/2014/main" val="20000"/>
+                    </a:ext>
+                  </a:extLst>
+                </a:gridCol>
+                <a:gridCol w="4114800">
+                  <a:extLst>
+                    <a:ext uri="{9D8B030D-6E8A-4147-A177-3AD203B41FA5}">
+                      <a16:colId xmlns:a16="http://schemas.microsoft.com/office/drawing/2014/main" val="20001"/>
+                    </a:ext>
+                  </a:extLst>
+                </a:gridCol>
               </a:tblGrid>
               <a:tr h="566928">
                 <a:tc>
@@ -14769,7 +14793,7 @@
                     <a:bodyPr/>
                     <a:lstStyle/>
                     <a:p>
-                      <a:pPr indent="0" marL="0">
+                      <a:pPr marL="0" indent="0">
                         <a:buNone/>
                       </a:pPr>
                       <a:r>
@@ -14783,7 +14807,7 @@
                       <a:endParaRPr lang="en-US" sz="1400" dirty="0"/>
                     </a:p>
                   </a:txBody>
-                  <a:tcPr marL="91440" marR="91440" marT="45720" marB="45720" anchor="ctr">
+                  <a:tcPr anchor="ctr">
                     <a:lnL w="25400" cap="flat" cmpd="sng" algn="ctr">
                       <a:solidFill>
                         <a:srgbClr val="FFFFFF"/>
@@ -14830,7 +14854,7 @@
                     <a:bodyPr/>
                     <a:lstStyle/>
                     <a:p>
-                      <a:pPr indent="0" marL="0">
+                      <a:pPr marL="0" indent="0">
                         <a:buNone/>
                       </a:pPr>
                       <a:r>
@@ -14844,7 +14868,7 @@
                       <a:endParaRPr lang="en-US" sz="1400" dirty="0"/>
                     </a:p>
                   </a:txBody>
-                  <a:tcPr marL="91440" marR="91440" marT="45720" marB="45720" anchor="ctr">
+                  <a:tcPr anchor="ctr">
                     <a:lnL w="25400" cap="flat" cmpd="sng" algn="ctr">
                       <a:solidFill>
                         <a:srgbClr val="FFFFFF"/>
@@ -14886,6 +14910,11 @@
                     </a:solidFill>
                   </a:tcPr>
                 </a:tc>
+                <a:extLst>
+                  <a:ext uri="{0D108BD9-81ED-4DB2-BD59-A6C34878D82A}">
+                    <a16:rowId xmlns:a16="http://schemas.microsoft.com/office/drawing/2014/main" val="10000"/>
+                  </a:ext>
+                </a:extLst>
               </a:tr>
               <a:tr h="566928">
                 <a:tc>
@@ -14893,7 +14922,7 @@
                     <a:bodyPr/>
                     <a:lstStyle/>
                     <a:p>
-                      <a:pPr indent="0" marL="0">
+                      <a:pPr marL="0" indent="0">
                         <a:buNone/>
                       </a:pPr>
                       <a:r>
@@ -14907,7 +14936,7 @@
                       <a:endParaRPr lang="en-US" sz="1400" dirty="0"/>
                     </a:p>
                   </a:txBody>
-                  <a:tcPr marL="91440" marR="91440" marT="45720" marB="45720" anchor="ctr">
+                  <a:tcPr anchor="ctr">
                     <a:lnL w="25400" cap="flat" cmpd="sng" algn="ctr">
                       <a:solidFill>
                         <a:srgbClr val="FFFFFF"/>
@@ -14954,7 +14983,7 @@
                     <a:bodyPr/>
                     <a:lstStyle/>
                     <a:p>
-                      <a:pPr indent="0" marL="0">
+                      <a:pPr marL="0" indent="0">
                         <a:buNone/>
                       </a:pPr>
                       <a:r>
@@ -14968,7 +14997,7 @@
                       <a:endParaRPr lang="en-US" sz="1400" dirty="0"/>
                     </a:p>
                   </a:txBody>
-                  <a:tcPr marL="91440" marR="91440" marT="45720" marB="45720" anchor="ctr">
+                  <a:tcPr anchor="ctr">
                     <a:lnL w="25400" cap="flat" cmpd="sng" algn="ctr">
                       <a:solidFill>
                         <a:srgbClr val="FFFFFF"/>
@@ -15010,6 +15039,11 @@
                     </a:solidFill>
                   </a:tcPr>
                 </a:tc>
+                <a:extLst>
+                  <a:ext uri="{0D108BD9-81ED-4DB2-BD59-A6C34878D82A}">
+                    <a16:rowId xmlns:a16="http://schemas.microsoft.com/office/drawing/2014/main" val="10001"/>
+                  </a:ext>
+                </a:extLst>
               </a:tr>
               <a:tr h="566928">
                 <a:tc>
@@ -15017,7 +15051,7 @@
                     <a:bodyPr/>
                     <a:lstStyle/>
                     <a:p>
-                      <a:pPr indent="0" marL="0">
+                      <a:pPr marL="0" indent="0">
                         <a:buNone/>
                       </a:pPr>
                       <a:r>
@@ -15031,7 +15065,7 @@
                       <a:endParaRPr lang="en-US" sz="1400" dirty="0"/>
                     </a:p>
                   </a:txBody>
-                  <a:tcPr marL="91440" marR="91440" marT="45720" marB="45720" anchor="ctr">
+                  <a:tcPr anchor="ctr">
                     <a:lnL w="25400" cap="flat" cmpd="sng" algn="ctr">
                       <a:solidFill>
                         <a:srgbClr val="FFFFFF"/>
@@ -15078,7 +15112,7 @@
                     <a:bodyPr/>
                     <a:lstStyle/>
                     <a:p>
-                      <a:pPr indent="0" marL="0">
+                      <a:pPr marL="0" indent="0">
                         <a:buNone/>
                       </a:pPr>
                       <a:r>
@@ -15092,7 +15126,7 @@
                       <a:endParaRPr lang="en-US" sz="1400" dirty="0"/>
                     </a:p>
                   </a:txBody>
-                  <a:tcPr marL="91440" marR="91440" marT="45720" marB="45720" anchor="ctr">
+                  <a:tcPr anchor="ctr">
                     <a:lnL w="25400" cap="flat" cmpd="sng" algn="ctr">
                       <a:solidFill>
                         <a:srgbClr val="FFFFFF"/>
@@ -15134,6 +15168,11 @@
                     </a:solidFill>
                   </a:tcPr>
                 </a:tc>
+                <a:extLst>
+                  <a:ext uri="{0D108BD9-81ED-4DB2-BD59-A6C34878D82A}">
+                    <a16:rowId xmlns:a16="http://schemas.microsoft.com/office/drawing/2014/main" val="10002"/>
+                  </a:ext>
+                </a:extLst>
               </a:tr>
               <a:tr h="566928">
                 <a:tc>
@@ -15141,7 +15180,7 @@
                     <a:bodyPr/>
                     <a:lstStyle/>
                     <a:p>
-                      <a:pPr indent="0" marL="0">
+                      <a:pPr marL="0" indent="0">
                         <a:buNone/>
                       </a:pPr>
                       <a:r>
@@ -15155,7 +15194,7 @@
                       <a:endParaRPr lang="en-US" sz="1400" dirty="0"/>
                     </a:p>
                   </a:txBody>
-                  <a:tcPr marL="91440" marR="91440" marT="45720" marB="45720" anchor="ctr">
+                  <a:tcPr anchor="ctr">
                     <a:lnL w="25400" cap="flat" cmpd="sng" algn="ctr">
                       <a:solidFill>
                         <a:srgbClr val="FFFFFF"/>
@@ -15202,7 +15241,7 @@
                     <a:bodyPr/>
                     <a:lstStyle/>
                     <a:p>
-                      <a:pPr indent="0" marL="0">
+                      <a:pPr marL="0" indent="0">
                         <a:buNone/>
                       </a:pPr>
                       <a:r>
@@ -15216,7 +15255,7 @@
                       <a:endParaRPr lang="en-US" sz="1400" dirty="0"/>
                     </a:p>
                   </a:txBody>
-                  <a:tcPr marL="91440" marR="91440" marT="45720" marB="45720" anchor="ctr">
+                  <a:tcPr anchor="ctr">
                     <a:lnL w="25400" cap="flat" cmpd="sng" algn="ctr">
                       <a:solidFill>
                         <a:srgbClr val="FFFFFF"/>
@@ -15258,6 +15297,11 @@
                     </a:solidFill>
                   </a:tcPr>
                 </a:tc>
+                <a:extLst>
+                  <a:ext uri="{0D108BD9-81ED-4DB2-BD59-A6C34878D82A}">
+                    <a16:rowId xmlns:a16="http://schemas.microsoft.com/office/drawing/2014/main" val="10003"/>
+                  </a:ext>
+                </a:extLst>
               </a:tr>
             </a:tbl>
           </a:graphicData>
@@ -15306,7 +15350,7 @@
           <a:bodyPr wrap="square" lIns="0" tIns="0" rIns="0" bIns="0" rtlCol="0" anchor="t"/>
           <a:lstStyle/>
           <a:p>
-            <a:pPr indent="0" marL="0">
+            <a:pPr marL="0" indent="0">
               <a:buNone/>
             </a:pPr>
             <a:r>
@@ -15342,7 +15386,7 @@
           <a:bodyPr wrap="square" lIns="0" tIns="0" rIns="0" bIns="0" rtlCol="0" anchor="t"/>
           <a:lstStyle/>
           <a:p>
-            <a:pPr indent="0" marL="0">
+            <a:pPr marL="0" indent="0">
               <a:buNone/>
             </a:pPr>
             <a:r>
@@ -15378,7 +15422,7 @@
           <a:bodyPr wrap="square" lIns="0" tIns="0" rIns="0" bIns="0" rtlCol="0" anchor="t"/>
           <a:lstStyle/>
           <a:p>
-            <a:pPr indent="0" marL="0">
+            <a:pPr marL="0" indent="0">
               <a:buNone/>
             </a:pPr>
             <a:r>
@@ -15436,7 +15480,7 @@
           <a:bodyPr wrap="square" lIns="0" tIns="0" rIns="0" bIns="0" rtlCol="0" anchor="t"/>
           <a:lstStyle/>
           <a:p>
-            <a:pPr indent="0" marL="0">
+            <a:pPr marL="0" indent="0">
               <a:buNone/>
             </a:pPr>
             <a:r>
@@ -15472,7 +15516,7 @@
           <a:bodyPr wrap="square" lIns="0" tIns="0" rIns="0" bIns="0" rtlCol="0" anchor="t"/>
           <a:lstStyle/>
           <a:p>
-            <a:pPr indent="0" marL="0">
+            <a:pPr marL="0" indent="0">
               <a:buNone/>
             </a:pPr>
             <a:r>
@@ -15508,7 +15552,7 @@
           <a:bodyPr wrap="square" lIns="0" tIns="0" rIns="0" bIns="0" rtlCol="0" anchor="t"/>
           <a:lstStyle/>
           <a:p>
-            <a:pPr indent="0" marL="0">
+            <a:pPr marL="0" indent="0">
               <a:buNone/>
             </a:pPr>
             <a:r>
@@ -15566,7 +15610,7 @@
           <a:bodyPr wrap="square" lIns="0" tIns="0" rIns="0" bIns="0" rtlCol="0" anchor="t"/>
           <a:lstStyle/>
           <a:p>
-            <a:pPr indent="0" marL="0">
+            <a:pPr marL="0" indent="0">
               <a:buNone/>
             </a:pPr>
             <a:r>
@@ -15602,7 +15646,7 @@
           <a:bodyPr wrap="square" lIns="0" tIns="0" rIns="0" bIns="0" rtlCol="0" anchor="t"/>
           <a:lstStyle/>
           <a:p>
-            <a:pPr indent="0" marL="0">
+            <a:pPr marL="0" indent="0">
               <a:buNone/>
             </a:pPr>
             <a:r>
@@ -15638,7 +15682,7 @@
           <a:bodyPr wrap="square" lIns="0" tIns="0" rIns="0" bIns="0" rtlCol="0" anchor="t"/>
           <a:lstStyle/>
           <a:p>
-            <a:pPr indent="0" marL="0">
+            <a:pPr marL="0" indent="0">
               <a:buNone/>
             </a:pPr>
             <a:r>
@@ -15674,7 +15718,7 @@
           <a:bodyPr wrap="square" lIns="0" tIns="0" rIns="0" bIns="0" rtlCol="0" anchor="t"/>
           <a:lstStyle/>
           <a:p>
-            <a:pPr indent="0" marL="0">
+            <a:pPr marL="0" indent="0">
               <a:buNone/>
             </a:pPr>
             <a:r>
@@ -15732,7 +15776,7 @@
           <a:bodyPr wrap="square" lIns="0" tIns="0" rIns="0" bIns="0" rtlCol="0" anchor="ctr"/>
           <a:lstStyle/>
           <a:p>
-            <a:pPr indent="0" marL="0">
+            <a:pPr marL="0" indent="0">
               <a:buNone/>
             </a:pPr>
             <a:r>
@@ -15763,17 +15807,41 @@
         </p:nvGraphicFramePr>
         <p:xfrm>
           <a:off x="6309360" y="3108960"/>
-          <a:ext cx="5303520" cy="914400"/>
+          <a:ext cx="5303520" cy="1645920"/>
         </p:xfrm>
         <a:graphic>
           <a:graphicData uri="http://schemas.openxmlformats.org/drawingml/2006/table">
             <a:tbl>
               <a:tblPr/>
               <a:tblGrid>
-                <a:gridCol w="1828800"/>
-                <a:gridCol w="1097280"/>
-                <a:gridCol w="1097280"/>
-                <a:gridCol w="1280160"/>
+                <a:gridCol w="1828800">
+                  <a:extLst>
+                    <a:ext uri="{9D8B030D-6E8A-4147-A177-3AD203B41FA5}">
+                      <a16:colId xmlns:a16="http://schemas.microsoft.com/office/drawing/2014/main" val="20000"/>
+                    </a:ext>
+                  </a:extLst>
+                </a:gridCol>
+                <a:gridCol w="1097280">
+                  <a:extLst>
+                    <a:ext uri="{9D8B030D-6E8A-4147-A177-3AD203B41FA5}">
+                      <a16:colId xmlns:a16="http://schemas.microsoft.com/office/drawing/2014/main" val="20001"/>
+                    </a:ext>
+                  </a:extLst>
+                </a:gridCol>
+                <a:gridCol w="1097280">
+                  <a:extLst>
+                    <a:ext uri="{9D8B030D-6E8A-4147-A177-3AD203B41FA5}">
+                      <a16:colId xmlns:a16="http://schemas.microsoft.com/office/drawing/2014/main" val="20002"/>
+                    </a:ext>
+                  </a:extLst>
+                </a:gridCol>
+                <a:gridCol w="1280160">
+                  <a:extLst>
+                    <a:ext uri="{9D8B030D-6E8A-4147-A177-3AD203B41FA5}">
+                      <a16:colId xmlns:a16="http://schemas.microsoft.com/office/drawing/2014/main" val="20003"/>
+                    </a:ext>
+                  </a:extLst>
+                </a:gridCol>
               </a:tblGrid>
               <a:tr h="411480">
                 <a:tc>
@@ -15781,7 +15849,7 @@
                     <a:bodyPr/>
                     <a:lstStyle/>
                     <a:p>
-                      <a:pPr indent="0" marL="0">
+                      <a:pPr marL="0" indent="0">
                         <a:buNone/>
                       </a:pPr>
                       <a:r>
@@ -15795,7 +15863,7 @@
                       <a:endParaRPr lang="en-US" sz="1300" dirty="0"/>
                     </a:p>
                   </a:txBody>
-                  <a:tcPr marL="91440" marR="91440" marT="45720" marB="45720" anchor="ctr">
+                  <a:tcPr anchor="ctr">
                     <a:lnL w="0" cap="flat" cmpd="sng" algn="ctr">
                       <a:noFill/>
                     </a:lnL>
@@ -15818,7 +15886,7 @@
                     <a:bodyPr/>
                     <a:lstStyle/>
                     <a:p>
-                      <a:pPr indent="0" marL="0">
+                      <a:pPr marL="0" indent="0">
                         <a:buNone/>
                       </a:pPr>
                       <a:r>
@@ -15832,7 +15900,7 @@
                       <a:endParaRPr lang="en-US" sz="1300" dirty="0"/>
                     </a:p>
                   </a:txBody>
-                  <a:tcPr marL="91440" marR="91440" marT="45720" marB="45720" anchor="ctr">
+                  <a:tcPr anchor="ctr">
                     <a:lnL w="0" cap="flat" cmpd="sng" algn="ctr">
                       <a:noFill/>
                     </a:lnL>
@@ -15855,7 +15923,7 @@
                     <a:bodyPr/>
                     <a:lstStyle/>
                     <a:p>
-                      <a:pPr indent="0" marL="0">
+                      <a:pPr marL="0" indent="0">
                         <a:buNone/>
                       </a:pPr>
                       <a:r>
@@ -15869,7 +15937,7 @@
                       <a:endParaRPr lang="en-US" sz="1300" dirty="0"/>
                     </a:p>
                   </a:txBody>
-                  <a:tcPr marL="91440" marR="91440" marT="45720" marB="45720" anchor="ctr">
+                  <a:tcPr anchor="ctr">
                     <a:lnL w="0" cap="flat" cmpd="sng" algn="ctr">
                       <a:noFill/>
                     </a:lnL>
@@ -15892,7 +15960,7 @@
                     <a:bodyPr/>
                     <a:lstStyle/>
                     <a:p>
-                      <a:pPr indent="0" marL="0">
+                      <a:pPr marL="0" indent="0">
                         <a:buNone/>
                       </a:pPr>
                       <a:r>
@@ -15906,7 +15974,7 @@
                       <a:endParaRPr lang="en-US" sz="1300" dirty="0"/>
                     </a:p>
                   </a:txBody>
-                  <a:tcPr marL="91440" marR="91440" marT="45720" marB="45720" anchor="ctr">
+                  <a:tcPr anchor="ctr">
                     <a:lnL w="0" cap="flat" cmpd="sng" algn="ctr">
                       <a:noFill/>
                     </a:lnL>
@@ -15924,6 +15992,11 @@
                     </a:solidFill>
                   </a:tcPr>
                 </a:tc>
+                <a:extLst>
+                  <a:ext uri="{0D108BD9-81ED-4DB2-BD59-A6C34878D82A}">
+                    <a16:rowId xmlns:a16="http://schemas.microsoft.com/office/drawing/2014/main" val="10000"/>
+                  </a:ext>
+                </a:extLst>
               </a:tr>
               <a:tr h="411480">
                 <a:tc>
@@ -15931,7 +16004,7 @@
                     <a:bodyPr/>
                     <a:lstStyle/>
                     <a:p>
-                      <a:pPr indent="0" marL="0">
+                      <a:pPr marL="0" indent="0">
                         <a:buNone/>
                       </a:pPr>
                       <a:r>
@@ -15945,7 +16018,7 @@
                       <a:endParaRPr lang="en-US" sz="1300" dirty="0"/>
                     </a:p>
                   </a:txBody>
-                  <a:tcPr marL="91440" marR="91440" marT="45720" marB="45720" anchor="ctr">
+                  <a:tcPr anchor="ctr">
                     <a:lnL w="0" cap="flat" cmpd="sng" algn="ctr">
                       <a:noFill/>
                     </a:lnL>
@@ -15968,7 +16041,7 @@
                     <a:bodyPr/>
                     <a:lstStyle/>
                     <a:p>
-                      <a:pPr indent="0" marL="0">
+                      <a:pPr marL="0" indent="0">
                         <a:buNone/>
                       </a:pPr>
                       <a:r>
@@ -15982,7 +16055,7 @@
                       <a:endParaRPr lang="en-US" sz="1300" dirty="0"/>
                     </a:p>
                   </a:txBody>
-                  <a:tcPr marL="91440" marR="91440" marT="45720" marB="45720" anchor="ctr">
+                  <a:tcPr anchor="ctr">
                     <a:lnL w="0" cap="flat" cmpd="sng" algn="ctr">
                       <a:noFill/>
                     </a:lnL>
@@ -16005,7 +16078,7 @@
                     <a:bodyPr/>
                     <a:lstStyle/>
                     <a:p>
-                      <a:pPr indent="0" marL="0">
+                      <a:pPr marL="0" indent="0">
                         <a:buNone/>
                       </a:pPr>
                       <a:r>
@@ -16019,7 +16092,7 @@
                       <a:endParaRPr lang="en-US" sz="1300" dirty="0"/>
                     </a:p>
                   </a:txBody>
-                  <a:tcPr marL="91440" marR="91440" marT="45720" marB="45720" anchor="ctr">
+                  <a:tcPr anchor="ctr">
                     <a:lnL w="0" cap="flat" cmpd="sng" algn="ctr">
                       <a:noFill/>
                     </a:lnL>
@@ -16042,7 +16115,7 @@
                     <a:bodyPr/>
                     <a:lstStyle/>
                     <a:p>
-                      <a:pPr indent="0" marL="0">
+                      <a:pPr marL="0" indent="0">
                         <a:buNone/>
                       </a:pPr>
                       <a:r>
@@ -16056,7 +16129,7 @@
                       <a:endParaRPr lang="en-US" sz="1300" dirty="0"/>
                     </a:p>
                   </a:txBody>
-                  <a:tcPr marL="91440" marR="91440" marT="45720" marB="45720" anchor="ctr">
+                  <a:tcPr anchor="ctr">
                     <a:lnL w="0" cap="flat" cmpd="sng" algn="ctr">
                       <a:noFill/>
                     </a:lnL>
@@ -16074,6 +16147,11 @@
                     </a:solidFill>
                   </a:tcPr>
                 </a:tc>
+                <a:extLst>
+                  <a:ext uri="{0D108BD9-81ED-4DB2-BD59-A6C34878D82A}">
+                    <a16:rowId xmlns:a16="http://schemas.microsoft.com/office/drawing/2014/main" val="10001"/>
+                  </a:ext>
+                </a:extLst>
               </a:tr>
               <a:tr h="411480">
                 <a:tc>
@@ -16081,7 +16159,7 @@
                     <a:bodyPr/>
                     <a:lstStyle/>
                     <a:p>
-                      <a:pPr indent="0" marL="0">
+                      <a:pPr marL="0" indent="0">
                         <a:buNone/>
                       </a:pPr>
                       <a:r>
@@ -16095,7 +16173,7 @@
                       <a:endParaRPr lang="en-US" sz="1300" dirty="0"/>
                     </a:p>
                   </a:txBody>
-                  <a:tcPr marL="91440" marR="91440" marT="45720" marB="45720" anchor="ctr">
+                  <a:tcPr anchor="ctr">
                     <a:lnL w="0" cap="flat" cmpd="sng" algn="ctr">
                       <a:noFill/>
                     </a:lnL>
@@ -16118,7 +16196,7 @@
                     <a:bodyPr/>
                     <a:lstStyle/>
                     <a:p>
-                      <a:pPr indent="0" marL="0">
+                      <a:pPr marL="0" indent="0">
                         <a:buNone/>
                       </a:pPr>
                       <a:r>
@@ -16132,7 +16210,7 @@
                       <a:endParaRPr lang="en-US" sz="1300" dirty="0"/>
                     </a:p>
                   </a:txBody>
-                  <a:tcPr marL="91440" marR="91440" marT="45720" marB="45720" anchor="ctr">
+                  <a:tcPr anchor="ctr">
                     <a:lnL w="0" cap="flat" cmpd="sng" algn="ctr">
                       <a:noFill/>
                     </a:lnL>
@@ -16155,7 +16233,7 @@
                     <a:bodyPr/>
                     <a:lstStyle/>
                     <a:p>
-                      <a:pPr indent="0" marL="0">
+                      <a:pPr marL="0" indent="0">
                         <a:buNone/>
                       </a:pPr>
                       <a:r>
@@ -16169,7 +16247,7 @@
                       <a:endParaRPr lang="en-US" sz="1300" dirty="0"/>
                     </a:p>
                   </a:txBody>
-                  <a:tcPr marL="91440" marR="91440" marT="45720" marB="45720" anchor="ctr">
+                  <a:tcPr anchor="ctr">
                     <a:lnL w="0" cap="flat" cmpd="sng" algn="ctr">
                       <a:noFill/>
                     </a:lnL>
@@ -16192,7 +16270,7 @@
                     <a:bodyPr/>
                     <a:lstStyle/>
                     <a:p>
-                      <a:pPr indent="0" marL="0">
+                      <a:pPr marL="0" indent="0">
                         <a:buNone/>
                       </a:pPr>
                       <a:r>
@@ -16206,7 +16284,7 @@
                       <a:endParaRPr lang="en-US" sz="1300" dirty="0"/>
                     </a:p>
                   </a:txBody>
-                  <a:tcPr marL="91440" marR="91440" marT="45720" marB="45720" anchor="ctr">
+                  <a:tcPr anchor="ctr">
                     <a:lnL w="0" cap="flat" cmpd="sng" algn="ctr">
                       <a:noFill/>
                     </a:lnL>
@@ -16224,6 +16302,11 @@
                     </a:solidFill>
                   </a:tcPr>
                 </a:tc>
+                <a:extLst>
+                  <a:ext uri="{0D108BD9-81ED-4DB2-BD59-A6C34878D82A}">
+                    <a16:rowId xmlns:a16="http://schemas.microsoft.com/office/drawing/2014/main" val="10002"/>
+                  </a:ext>
+                </a:extLst>
               </a:tr>
               <a:tr h="411480">
                 <a:tc>
@@ -16231,7 +16314,7 @@
                     <a:bodyPr/>
                     <a:lstStyle/>
                     <a:p>
-                      <a:pPr indent="0" marL="0">
+                      <a:pPr marL="0" indent="0">
                         <a:buNone/>
                       </a:pPr>
                       <a:r>
@@ -16245,7 +16328,7 @@
                       <a:endParaRPr lang="en-US" sz="1300" dirty="0"/>
                     </a:p>
                   </a:txBody>
-                  <a:tcPr marL="91440" marR="91440" marT="45720" marB="45720" anchor="ctr">
+                  <a:tcPr anchor="ctr">
                     <a:lnL w="0" cap="flat" cmpd="sng" algn="ctr">
                       <a:noFill/>
                     </a:lnL>
@@ -16268,7 +16351,7 @@
                     <a:bodyPr/>
                     <a:lstStyle/>
                     <a:p>
-                      <a:pPr indent="0" marL="0">
+                      <a:pPr marL="0" indent="0">
                         <a:buNone/>
                       </a:pPr>
                       <a:r>
@@ -16282,7 +16365,7 @@
                       <a:endParaRPr lang="en-US" sz="1300" dirty="0"/>
                     </a:p>
                   </a:txBody>
-                  <a:tcPr marL="91440" marR="91440" marT="45720" marB="45720" anchor="ctr">
+                  <a:tcPr anchor="ctr">
                     <a:lnL w="0" cap="flat" cmpd="sng" algn="ctr">
                       <a:noFill/>
                     </a:lnL>
@@ -16305,7 +16388,7 @@
                     <a:bodyPr/>
                     <a:lstStyle/>
                     <a:p>
-                      <a:pPr indent="0" marL="0">
+                      <a:pPr marL="0" indent="0">
                         <a:buNone/>
                       </a:pPr>
                       <a:r>
@@ -16319,7 +16402,7 @@
                       <a:endParaRPr lang="en-US" sz="1300" dirty="0"/>
                     </a:p>
                   </a:txBody>
-                  <a:tcPr marL="91440" marR="91440" marT="45720" marB="45720" anchor="ctr">
+                  <a:tcPr anchor="ctr">
                     <a:lnL w="0" cap="flat" cmpd="sng" algn="ctr">
                       <a:noFill/>
                     </a:lnL>
@@ -16342,7 +16425,7 @@
                     <a:bodyPr/>
                     <a:lstStyle/>
                     <a:p>
-                      <a:pPr indent="0" marL="0">
+                      <a:pPr marL="0" indent="0">
                         <a:buNone/>
                       </a:pPr>
                       <a:r>
@@ -16356,7 +16439,7 @@
                       <a:endParaRPr lang="en-US" sz="1300" dirty="0"/>
                     </a:p>
                   </a:txBody>
-                  <a:tcPr marL="91440" marR="91440" marT="45720" marB="45720" anchor="ctr">
+                  <a:tcPr anchor="ctr">
                     <a:lnL w="0" cap="flat" cmpd="sng" algn="ctr">
                       <a:noFill/>
                     </a:lnL>
@@ -16374,6 +16457,11 @@
                     </a:solidFill>
                   </a:tcPr>
                 </a:tc>
+                <a:extLst>
+                  <a:ext uri="{0D108BD9-81ED-4DB2-BD59-A6C34878D82A}">
+                    <a16:rowId xmlns:a16="http://schemas.microsoft.com/office/drawing/2014/main" val="10003"/>
+                  </a:ext>
+                </a:extLst>
               </a:tr>
             </a:tbl>
           </a:graphicData>
@@ -16400,7 +16488,7 @@
           <a:bodyPr wrap="square" lIns="0" tIns="0" rIns="0" bIns="0" rtlCol="0" anchor="t"/>
           <a:lstStyle/>
           <a:p>
-            <a:pPr indent="0" marL="0">
+            <a:pPr marL="0" indent="0">
               <a:buNone/>
             </a:pPr>
             <a:r>
@@ -16435,7 +16523,7 @@
           </a:prstGeom>
           <a:extLst>
             <a:ext uri="{C572A759-6A51-4108-AA02-DFA0A04FC94B}">
-              <ma14:wrappingTextBoxFlag xmlns:ma14="http://schemas.microsoft.com/office/mac/drawingml/2011/main" val="0"/>
+              <ma14:wrappingTextBoxFlag xmlns="" xmlns:ma14="http://schemas.microsoft.com/office/mac/drawingml/2011/main" val="0"/>
             </a:ext>
           </a:extLst>
         </p:spPr>
@@ -16453,7 +16541,7 @@
           <a:p>
             <a:pPr algn="r"/>
             <a:fld id="{F7021451-1387-4CA6-816F-3879F97B5CBC}" type="slidenum">
-              <a:rPr b="0" lang="en-US"/>
+              <a:rPr lang="en-US" b="0"/>
               <a:t>27</a:t>
             </a:fld>
             <a:endParaRPr lang="en-US"/>
@@ -16488,9 +16576,11 @@
       <p:sp>
         <p:nvSpPr>
           <p:cNvPr id="2" name="Text 0"/>
-          <p:cNvSpPr/>
+          <p:cNvSpPr>
+            <a:spLocks noGrp="1"/>
+          </p:cNvSpPr>
           <p:nvPr>
-            <p:ph idx="100" type="title" hasCustomPrompt="1"/>
+            <p:ph type="title" idx="100" hasCustomPrompt="1"/>
           </p:nvPr>
         </p:nvSpPr>
         <p:spPr>
@@ -16508,7 +16598,7 @@
           <a:bodyPr wrap="square" lIns="0" tIns="0" rIns="0" bIns="0" rtlCol="0" anchor="ctr"/>
           <a:lstStyle/>
           <a:p>
-            <a:pPr algn="l" indent="0" marL="0">
+            <a:pPr marL="0" indent="0" algn="l">
               <a:buNone/>
             </a:pPr>
             <a:r>
@@ -16566,7 +16656,7 @@
           <a:bodyPr wrap="square" lIns="0" tIns="0" rIns="0" bIns="0" rtlCol="0" anchor="ctr"/>
           <a:lstStyle/>
           <a:p>
-            <a:pPr indent="0" marL="0">
+            <a:pPr marL="0" indent="0">
               <a:buNone/>
             </a:pPr>
             <a:r>
@@ -16602,7 +16692,7 @@
           <a:bodyPr wrap="square" lIns="0" tIns="0" rIns="0" bIns="0" rtlCol="0" anchor="ctr"/>
           <a:lstStyle/>
           <a:p>
-            <a:pPr indent="0" marL="0">
+            <a:pPr marL="0" indent="0">
               <a:buNone/>
             </a:pPr>
             <a:r>
@@ -16660,7 +16750,7 @@
           <a:bodyPr wrap="square" lIns="0" tIns="0" rIns="0" bIns="0" rtlCol="0" anchor="ctr"/>
           <a:lstStyle/>
           <a:p>
-            <a:pPr indent="0" marL="0">
+            <a:pPr marL="0" indent="0">
               <a:buNone/>
             </a:pPr>
             <a:r>
@@ -16696,7 +16786,7 @@
           <a:bodyPr wrap="square" lIns="0" tIns="0" rIns="0" bIns="0" rtlCol="0" anchor="ctr"/>
           <a:lstStyle/>
           <a:p>
-            <a:pPr indent="0" marL="0">
+            <a:pPr marL="0" indent="0">
               <a:buNone/>
             </a:pPr>
             <a:r>
@@ -16754,7 +16844,7 @@
           <a:bodyPr wrap="square" lIns="0" tIns="0" rIns="0" bIns="0" rtlCol="0" anchor="ctr"/>
           <a:lstStyle/>
           <a:p>
-            <a:pPr indent="0" marL="0">
+            <a:pPr marL="0" indent="0">
               <a:buNone/>
             </a:pPr>
             <a:r>
@@ -16790,7 +16880,7 @@
           <a:bodyPr wrap="square" lIns="0" tIns="0" rIns="0" bIns="0" rtlCol="0" anchor="ctr"/>
           <a:lstStyle/>
           <a:p>
-            <a:pPr indent="0" marL="0">
+            <a:pPr marL="0" indent="0">
               <a:buNone/>
             </a:pPr>
             <a:r>
@@ -16848,7 +16938,7 @@
           <a:bodyPr wrap="square" lIns="0" tIns="0" rIns="0" bIns="0" rtlCol="0" anchor="ctr"/>
           <a:lstStyle/>
           <a:p>
-            <a:pPr indent="0" marL="0">
+            <a:pPr marL="0" indent="0">
               <a:buNone/>
             </a:pPr>
             <a:r>
@@ -16884,7 +16974,7 @@
           <a:bodyPr wrap="square" lIns="0" tIns="0" rIns="0" bIns="0" rtlCol="0" anchor="ctr"/>
           <a:lstStyle/>
           <a:p>
-            <a:pPr indent="0" marL="0">
+            <a:pPr marL="0" indent="0">
               <a:buNone/>
             </a:pPr>
             <a:r>
@@ -16942,7 +17032,7 @@
           <a:bodyPr wrap="square" lIns="0" tIns="0" rIns="0" bIns="0" rtlCol="0" anchor="t"/>
           <a:lstStyle/>
           <a:p>
-            <a:pPr indent="0" marL="0">
+            <a:pPr marL="0" indent="0">
               <a:buNone/>
             </a:pPr>
             <a:r>
@@ -16956,7 +17046,7 @@
             <a:endParaRPr lang="en-US" sz="1400" dirty="0"/>
           </a:p>
           <a:p>
-            <a:pPr indent="0" marL="0">
+            <a:pPr marL="0" indent="0">
               <a:buNone/>
             </a:pPr>
             <a:r>
@@ -16970,7 +17060,7 @@
             <a:endParaRPr lang="en-US" sz="1400" dirty="0"/>
           </a:p>
           <a:p>
-            <a:pPr indent="0" marL="0">
+            <a:pPr marL="0" indent="0">
               <a:buNone/>
             </a:pPr>
             <a:r>
@@ -16984,7 +17074,7 @@
             <a:endParaRPr lang="en-US" sz="1400" dirty="0"/>
           </a:p>
           <a:p>
-            <a:pPr indent="0" marL="0">
+            <a:pPr marL="0" indent="0">
               <a:buNone/>
             </a:pPr>
             <a:r>
@@ -16998,7 +17088,7 @@
             <a:endParaRPr lang="en-US" sz="1400" dirty="0"/>
           </a:p>
           <a:p>
-            <a:pPr indent="0" marL="0">
+            <a:pPr marL="0" indent="0">
               <a:buNone/>
             </a:pPr>
             <a:r>
@@ -17033,7 +17123,7 @@
           </a:prstGeom>
           <a:extLst>
             <a:ext uri="{C572A759-6A51-4108-AA02-DFA0A04FC94B}">
-              <ma14:wrappingTextBoxFlag xmlns:ma14="http://schemas.microsoft.com/office/mac/drawingml/2011/main" val="0"/>
+              <ma14:wrappingTextBoxFlag xmlns="" xmlns:ma14="http://schemas.microsoft.com/office/mac/drawingml/2011/main" val="0"/>
             </a:ext>
           </a:extLst>
         </p:spPr>
@@ -17051,7 +17141,7 @@
           <a:p>
             <a:pPr algn="r"/>
             <a:fld id="{F7021451-1387-4CA6-816F-3879F97B5CBC}" type="slidenum">
-              <a:rPr b="0" lang="en-US"/>
+              <a:rPr lang="en-US" b="0"/>
               <a:t>28</a:t>
             </a:fld>
             <a:endParaRPr lang="en-US"/>
@@ -17086,9 +17176,11 @@
       <p:sp>
         <p:nvSpPr>
           <p:cNvPr id="2" name="Text 0"/>
-          <p:cNvSpPr/>
+          <p:cNvSpPr>
+            <a:spLocks noGrp="1"/>
+          </p:cNvSpPr>
           <p:nvPr>
-            <p:ph idx="100" type="title" hasCustomPrompt="1"/>
+            <p:ph type="title" idx="100" hasCustomPrompt="1"/>
           </p:nvPr>
         </p:nvSpPr>
         <p:spPr>
@@ -17106,7 +17198,7 @@
           <a:bodyPr wrap="square" lIns="0" tIns="0" rIns="0" bIns="0" rtlCol="0" anchor="b"/>
           <a:lstStyle/>
           <a:p>
-            <a:pPr algn="l" indent="0" marL="0">
+            <a:pPr marL="0" indent="0" algn="l">
               <a:buNone/>
             </a:pPr>
             <a:r>
@@ -17124,9 +17216,11 @@
       <p:sp>
         <p:nvSpPr>
           <p:cNvPr id="3" name="Text 0"/>
-          <p:cNvSpPr/>
+          <p:cNvSpPr>
+            <a:spLocks noGrp="1"/>
+          </p:cNvSpPr>
           <p:nvPr>
-            <p:ph idx="101" type="body" hasCustomPrompt="1"/>
+            <p:ph type="body" idx="101" hasCustomPrompt="1"/>
           </p:nvPr>
         </p:nvSpPr>
         <p:spPr>
@@ -17144,7 +17238,7 @@
           <a:bodyPr wrap="square" lIns="0" tIns="0" rIns="0" bIns="0" rtlCol="0" anchor="t"/>
           <a:lstStyle/>
           <a:p>
-            <a:pPr algn="l" indent="0" marL="0">
+            <a:pPr marL="0" indent="0" algn="l">
               <a:buNone/>
             </a:pPr>
             <a:r>
@@ -17187,9 +17281,11 @@
       <p:sp>
         <p:nvSpPr>
           <p:cNvPr id="2" name="Text 0"/>
-          <p:cNvSpPr/>
+          <p:cNvSpPr>
+            <a:spLocks noGrp="1"/>
+          </p:cNvSpPr>
           <p:nvPr>
-            <p:ph idx="100" type="title" hasCustomPrompt="1"/>
+            <p:ph type="title" idx="100" hasCustomPrompt="1"/>
           </p:nvPr>
         </p:nvSpPr>
         <p:spPr>
@@ -17207,16 +17303,32 @@
           <a:bodyPr wrap="square" lIns="0" tIns="0" rIns="0" bIns="0" rtlCol="0" anchor="ctr"/>
           <a:lstStyle/>
           <a:p>
-            <a:pPr algn="l" indent="0" marL="0">
+            <a:pPr marL="0" indent="0" algn="l">
               <a:buNone/>
             </a:pPr>
             <a:r>
+              <a:rPr lang="en-US" sz="2800" b="1" dirty="0" err="1">
+                <a:solidFill>
+                  <a:schemeClr val="tx2"/>
+                </a:solidFill>
+              </a:rPr>
+              <a:t>Resumo</a:t>
+            </a:r>
+            <a:r>
               <a:rPr lang="en-US" sz="2800" b="1" dirty="0">
                 <a:solidFill>
                   <a:schemeClr val="tx2"/>
                 </a:solidFill>
               </a:rPr>
-              <a:t>Resumo executivo: se só houver tempo para um slide</a:t>
+              <a:t> </a:t>
+            </a:r>
+            <a:r>
+              <a:rPr lang="en-US" sz="2800" b="1" dirty="0" err="1" smtClean="0">
+                <a:solidFill>
+                  <a:schemeClr val="tx2"/>
+                </a:solidFill>
+              </a:rPr>
+              <a:t>executivo</a:t>
             </a:r>
             <a:endParaRPr lang="en-US" sz="2800" dirty="0"/>
           </a:p>
@@ -17265,11 +17377,11 @@
           <a:bodyPr wrap="square" lIns="0" tIns="0" rIns="0" bIns="0" rtlCol="0" anchor="t"/>
           <a:lstStyle/>
           <a:p>
-            <a:pPr indent="0" marL="0">
+            <a:pPr marL="0" indent="0">
               <a:buNone/>
             </a:pPr>
             <a:r>
-              <a:rPr lang="en-US" sz="1200" b="1" spc="200" kern="0" dirty="0">
+              <a:rPr lang="en-US" sz="1200" b="1" kern="0" spc="200" dirty="0">
                 <a:solidFill>
                   <a:schemeClr val="accent2"/>
                 </a:solidFill>
@@ -17301,7 +17413,7 @@
           <a:bodyPr wrap="square" lIns="0" tIns="0" rIns="0" bIns="0" rtlCol="0" anchor="t"/>
           <a:lstStyle/>
           <a:p>
-            <a:pPr indent="0" marL="0">
+            <a:pPr marL="0" indent="0">
               <a:buNone/>
             </a:pPr>
             <a:r>
@@ -17337,7 +17449,7 @@
           <a:bodyPr wrap="square" lIns="0" tIns="0" rIns="0" bIns="0" rtlCol="0" anchor="t"/>
           <a:lstStyle/>
           <a:p>
-            <a:pPr indent="0" marL="0">
+            <a:pPr marL="0" indent="0">
               <a:buNone/>
             </a:pPr>
             <a:r>
@@ -17395,11 +17507,11 @@
           <a:bodyPr wrap="square" lIns="0" tIns="0" rIns="0" bIns="0" rtlCol="0" anchor="t"/>
           <a:lstStyle/>
           <a:p>
-            <a:pPr indent="0" marL="0">
+            <a:pPr marL="0" indent="0">
               <a:buNone/>
             </a:pPr>
             <a:r>
-              <a:rPr lang="en-US" sz="1200" b="1" spc="200" kern="0" dirty="0">
+              <a:rPr lang="en-US" sz="1200" b="1" kern="0" spc="200" dirty="0">
                 <a:solidFill>
                   <a:schemeClr val="accent2"/>
                 </a:solidFill>
@@ -17431,7 +17543,7 @@
           <a:bodyPr wrap="square" lIns="0" tIns="0" rIns="0" bIns="0" rtlCol="0" anchor="t"/>
           <a:lstStyle/>
           <a:p>
-            <a:pPr indent="0" marL="0">
+            <a:pPr marL="0" indent="0">
               <a:buNone/>
             </a:pPr>
             <a:r>
@@ -17454,7 +17566,7 @@
         </p:nvSpPr>
         <p:spPr>
           <a:xfrm>
-            <a:off x="4572000" y="3657600"/>
+            <a:off x="4572000" y="3682767"/>
             <a:ext cx="3017520" cy="2011680"/>
           </a:xfrm>
           <a:prstGeom prst="rect">
@@ -17467,7 +17579,7 @@
           <a:bodyPr wrap="square" lIns="0" tIns="0" rIns="0" bIns="0" rtlCol="0" anchor="t"/>
           <a:lstStyle/>
           <a:p>
-            <a:pPr indent="0" marL="0">
+            <a:pPr marL="0" indent="0">
               <a:buNone/>
             </a:pPr>
             <a:r>
@@ -17525,11 +17637,11 @@
           <a:bodyPr wrap="square" lIns="0" tIns="0" rIns="0" bIns="0" rtlCol="0" anchor="t"/>
           <a:lstStyle/>
           <a:p>
-            <a:pPr indent="0" marL="0">
+            <a:pPr marL="0" indent="0">
               <a:buNone/>
             </a:pPr>
             <a:r>
-              <a:rPr lang="en-US" sz="1200" b="1" spc="200" kern="0" dirty="0">
+              <a:rPr lang="en-US" sz="1200" b="1" kern="0" spc="200" dirty="0">
                 <a:solidFill>
                   <a:schemeClr val="accent2"/>
                 </a:solidFill>
@@ -17561,7 +17673,7 @@
           <a:bodyPr wrap="square" lIns="0" tIns="0" rIns="0" bIns="0" rtlCol="0" anchor="t"/>
           <a:lstStyle/>
           <a:p>
-            <a:pPr indent="0" marL="0">
+            <a:pPr marL="0" indent="0">
               <a:buNone/>
             </a:pPr>
             <a:r>
@@ -17597,7 +17709,7 @@
           <a:bodyPr wrap="square" lIns="0" tIns="0" rIns="0" bIns="0" rtlCol="0" anchor="t"/>
           <a:lstStyle/>
           <a:p>
-            <a:pPr indent="0" marL="0">
+            <a:pPr marL="0" indent="0">
               <a:buNone/>
             </a:pPr>
             <a:r>
@@ -17632,7 +17744,7 @@
           </a:prstGeom>
           <a:extLst>
             <a:ext uri="{C572A759-6A51-4108-AA02-DFA0A04FC94B}">
-              <ma14:wrappingTextBoxFlag xmlns:ma14="http://schemas.microsoft.com/office/mac/drawingml/2011/main" val="0"/>
+              <ma14:wrappingTextBoxFlag xmlns="" xmlns:ma14="http://schemas.microsoft.com/office/mac/drawingml/2011/main" val="0"/>
             </a:ext>
           </a:extLst>
         </p:spPr>
@@ -17650,7 +17762,7 @@
           <a:p>
             <a:pPr algn="r"/>
             <a:fld id="{F7021451-1387-4CA6-816F-3879F97B5CBC}" type="slidenum">
-              <a:rPr b="0" lang="en-US"/>
+              <a:rPr lang="en-US" b="0"/>
               <a:t>3</a:t>
             </a:fld>
             <a:endParaRPr lang="en-US"/>
@@ -17685,9 +17797,11 @@
       <p:sp>
         <p:nvSpPr>
           <p:cNvPr id="2" name="Text 0"/>
-          <p:cNvSpPr/>
+          <p:cNvSpPr>
+            <a:spLocks noGrp="1"/>
+          </p:cNvSpPr>
           <p:nvPr>
-            <p:ph idx="100" type="body" hasCustomPrompt="1"/>
+            <p:ph type="body" idx="100" hasCustomPrompt="1"/>
           </p:nvPr>
         </p:nvSpPr>
         <p:spPr>
@@ -17705,7 +17819,7 @@
           <a:bodyPr wrap="square" lIns="0" tIns="0" rIns="0" bIns="0" rtlCol="0"/>
           <a:lstStyle/>
           <a:p>
-            <a:pPr algn="l" indent="0" marL="0">
+            <a:pPr marL="0" indent="0" algn="l">
               <a:buNone/>
             </a:pPr>
             <a:r>
@@ -17723,9 +17837,11 @@
       <p:sp>
         <p:nvSpPr>
           <p:cNvPr id="3" name="Text 0"/>
-          <p:cNvSpPr/>
+          <p:cNvSpPr>
+            <a:spLocks noGrp="1"/>
+          </p:cNvSpPr>
           <p:nvPr>
-            <p:ph idx="101" type="title" hasCustomPrompt="1"/>
+            <p:ph type="title" idx="101" hasCustomPrompt="1"/>
           </p:nvPr>
         </p:nvSpPr>
         <p:spPr>
@@ -17743,7 +17859,7 @@
           <a:bodyPr wrap="square" lIns="0" tIns="0" rIns="0" bIns="0" rtlCol="0" anchor="t"/>
           <a:lstStyle/>
           <a:p>
-            <a:pPr algn="l" indent="0" marL="0">
+            <a:pPr marL="0" indent="0" algn="l">
               <a:buNone/>
             </a:pPr>
             <a:r>
@@ -17778,7 +17894,7 @@
           </a:prstGeom>
           <a:extLst>
             <a:ext uri="{C572A759-6A51-4108-AA02-DFA0A04FC94B}">
-              <ma14:wrappingTextBoxFlag xmlns:ma14="http://schemas.microsoft.com/office/mac/drawingml/2011/main" val="0"/>
+              <ma14:wrappingTextBoxFlag xmlns="" xmlns:ma14="http://schemas.microsoft.com/office/mac/drawingml/2011/main" val="0"/>
             </a:ext>
           </a:extLst>
         </p:spPr>
@@ -17796,7 +17912,7 @@
           <a:p>
             <a:pPr algn="r"/>
             <a:fld id="{F7021451-1387-4CA6-816F-3879F97B5CBC}" type="slidenum">
-              <a:rPr b="0" lang="en-US"/>
+              <a:rPr lang="en-US" b="0"/>
               <a:t>4</a:t>
             </a:fld>
             <a:endParaRPr lang="en-US"/>
@@ -17831,9 +17947,11 @@
       <p:sp>
         <p:nvSpPr>
           <p:cNvPr id="2" name="Text 0"/>
-          <p:cNvSpPr/>
+          <p:cNvSpPr>
+            <a:spLocks noGrp="1"/>
+          </p:cNvSpPr>
           <p:nvPr>
-            <p:ph idx="100" type="title" hasCustomPrompt="1"/>
+            <p:ph type="title" idx="100" hasCustomPrompt="1"/>
           </p:nvPr>
         </p:nvSpPr>
         <p:spPr>
@@ -17851,7 +17969,7 @@
           <a:bodyPr wrap="square" lIns="0" tIns="0" rIns="0" bIns="0" rtlCol="0" anchor="ctr"/>
           <a:lstStyle/>
           <a:p>
-            <a:pPr algn="l" indent="0" marL="0">
+            <a:pPr marL="0" indent="0" algn="l">
               <a:buNone/>
             </a:pPr>
             <a:r>
@@ -17909,7 +18027,7 @@
           <a:bodyPr wrap="square" lIns="0" tIns="0" rIns="0" bIns="0" rtlCol="0" anchor="t"/>
           <a:lstStyle/>
           <a:p>
-            <a:pPr indent="0" marL="0">
+            <a:pPr marL="0" indent="0">
               <a:buNone/>
             </a:pPr>
             <a:r>
@@ -17945,7 +18063,7 @@
           <a:bodyPr wrap="square" lIns="0" tIns="0" rIns="0" bIns="0" rtlCol="0" anchor="t"/>
           <a:lstStyle/>
           <a:p>
-            <a:pPr indent="0" marL="0">
+            <a:pPr marL="0" indent="0">
               <a:buNone/>
             </a:pPr>
             <a:r>
@@ -17981,7 +18099,7 @@
           <a:bodyPr wrap="square" lIns="0" tIns="0" rIns="0" bIns="0" rtlCol="0" anchor="t"/>
           <a:lstStyle/>
           <a:p>
-            <a:pPr indent="0" marL="0">
+            <a:pPr marL="0" indent="0">
               <a:buNone/>
             </a:pPr>
             <a:r>
@@ -18039,7 +18157,7 @@
           <a:bodyPr wrap="square" lIns="0" tIns="0" rIns="0" bIns="0" rtlCol="0" anchor="t"/>
           <a:lstStyle/>
           <a:p>
-            <a:pPr indent="0" marL="0">
+            <a:pPr marL="0" indent="0">
               <a:buNone/>
             </a:pPr>
             <a:r>
@@ -18075,7 +18193,7 @@
           <a:bodyPr wrap="square" lIns="0" tIns="0" rIns="0" bIns="0" rtlCol="0" anchor="t"/>
           <a:lstStyle/>
           <a:p>
-            <a:pPr indent="0" marL="0">
+            <a:pPr marL="0" indent="0">
               <a:buNone/>
             </a:pPr>
             <a:r>
@@ -18111,7 +18229,7 @@
           <a:bodyPr wrap="square" lIns="0" tIns="0" rIns="0" bIns="0" rtlCol="0" anchor="t"/>
           <a:lstStyle/>
           <a:p>
-            <a:pPr indent="0" marL="0">
+            <a:pPr marL="0" indent="0">
               <a:buNone/>
             </a:pPr>
             <a:r>
@@ -18169,7 +18287,7 @@
           <a:bodyPr wrap="square" lIns="0" tIns="0" rIns="0" bIns="0" rtlCol="0" anchor="t"/>
           <a:lstStyle/>
           <a:p>
-            <a:pPr indent="0" marL="0">
+            <a:pPr marL="0" indent="0">
               <a:buNone/>
             </a:pPr>
             <a:r>
@@ -18205,7 +18323,7 @@
           <a:bodyPr wrap="square" lIns="0" tIns="0" rIns="0" bIns="0" rtlCol="0" anchor="t"/>
           <a:lstStyle/>
           <a:p>
-            <a:pPr indent="0" marL="0">
+            <a:pPr marL="0" indent="0">
               <a:buNone/>
             </a:pPr>
             <a:r>
@@ -18241,7 +18359,7 @@
           <a:bodyPr wrap="square" lIns="0" tIns="0" rIns="0" bIns="0" rtlCol="0" anchor="t"/>
           <a:lstStyle/>
           <a:p>
-            <a:pPr indent="0" marL="0">
+            <a:pPr marL="0" indent="0">
               <a:buNone/>
             </a:pPr>
             <a:r>
@@ -18277,7 +18395,7 @@
           <a:bodyPr wrap="square" lIns="0" tIns="0" rIns="0" bIns="0" rtlCol="0" anchor="t"/>
           <a:lstStyle/>
           <a:p>
-            <a:pPr indent="0" marL="0">
+            <a:pPr marL="0" indent="0">
               <a:buNone/>
             </a:pPr>
             <a:r>
@@ -18312,7 +18430,7 @@
           </a:prstGeom>
           <a:extLst>
             <a:ext uri="{C572A759-6A51-4108-AA02-DFA0A04FC94B}">
-              <ma14:wrappingTextBoxFlag xmlns:ma14="http://schemas.microsoft.com/office/mac/drawingml/2011/main" val="0"/>
+              <ma14:wrappingTextBoxFlag xmlns="" xmlns:ma14="http://schemas.microsoft.com/office/mac/drawingml/2011/main" val="0"/>
             </a:ext>
           </a:extLst>
         </p:spPr>
@@ -18330,7 +18448,7 @@
           <a:p>
             <a:pPr algn="r"/>
             <a:fld id="{F7021451-1387-4CA6-816F-3879F97B5CBC}" type="slidenum">
-              <a:rPr b="0" lang="en-US"/>
+              <a:rPr lang="en-US" b="0"/>
               <a:t>5</a:t>
             </a:fld>
             <a:endParaRPr lang="en-US"/>
@@ -18365,9 +18483,11 @@
       <p:sp>
         <p:nvSpPr>
           <p:cNvPr id="2" name="Text 0"/>
-          <p:cNvSpPr/>
+          <p:cNvSpPr>
+            <a:spLocks noGrp="1"/>
+          </p:cNvSpPr>
           <p:nvPr>
-            <p:ph idx="100" type="body" hasCustomPrompt="1"/>
+            <p:ph type="body" idx="100" hasCustomPrompt="1"/>
           </p:nvPr>
         </p:nvSpPr>
         <p:spPr>
@@ -18385,7 +18505,7 @@
           <a:bodyPr wrap="square" lIns="0" tIns="0" rIns="0" bIns="0" rtlCol="0"/>
           <a:lstStyle/>
           <a:p>
-            <a:pPr algn="l" indent="0" marL="0">
+            <a:pPr marL="0" indent="0" algn="l">
               <a:buNone/>
             </a:pPr>
             <a:r>
@@ -18403,9 +18523,11 @@
       <p:sp>
         <p:nvSpPr>
           <p:cNvPr id="3" name="Text 0"/>
-          <p:cNvSpPr/>
+          <p:cNvSpPr>
+            <a:spLocks noGrp="1"/>
+          </p:cNvSpPr>
           <p:nvPr>
-            <p:ph idx="101" type="title" hasCustomPrompt="1"/>
+            <p:ph type="title" idx="101" hasCustomPrompt="1"/>
           </p:nvPr>
         </p:nvSpPr>
         <p:spPr>
@@ -18423,7 +18545,7 @@
           <a:bodyPr wrap="square" lIns="0" tIns="0" rIns="0" bIns="0" rtlCol="0" anchor="t"/>
           <a:lstStyle/>
           <a:p>
-            <a:pPr algn="l" indent="0" marL="0">
+            <a:pPr marL="0" indent="0" algn="l">
               <a:buNone/>
             </a:pPr>
             <a:r>
@@ -18458,7 +18580,7 @@
           </a:prstGeom>
           <a:extLst>
             <a:ext uri="{C572A759-6A51-4108-AA02-DFA0A04FC94B}">
-              <ma14:wrappingTextBoxFlag xmlns:ma14="http://schemas.microsoft.com/office/mac/drawingml/2011/main" val="0"/>
+              <ma14:wrappingTextBoxFlag xmlns="" xmlns:ma14="http://schemas.microsoft.com/office/mac/drawingml/2011/main" val="0"/>
             </a:ext>
           </a:extLst>
         </p:spPr>
@@ -18476,7 +18598,7 @@
           <a:p>
             <a:pPr algn="r"/>
             <a:fld id="{F7021451-1387-4CA6-816F-3879F97B5CBC}" type="slidenum">
-              <a:rPr b="0" lang="en-US"/>
+              <a:rPr lang="en-US" b="0"/>
               <a:t>6</a:t>
             </a:fld>
             <a:endParaRPr lang="en-US"/>
@@ -18511,9 +18633,11 @@
       <p:sp>
         <p:nvSpPr>
           <p:cNvPr id="2" name="Text 0"/>
-          <p:cNvSpPr/>
+          <p:cNvSpPr>
+            <a:spLocks noGrp="1"/>
+          </p:cNvSpPr>
           <p:nvPr>
-            <p:ph idx="100" type="title" hasCustomPrompt="1"/>
+            <p:ph type="title" idx="100" hasCustomPrompt="1"/>
           </p:nvPr>
         </p:nvSpPr>
         <p:spPr>
@@ -18531,7 +18655,7 @@
           <a:bodyPr wrap="square" lIns="0" tIns="0" rIns="0" bIns="0" rtlCol="0" anchor="ctr"/>
           <a:lstStyle/>
           <a:p>
-            <a:pPr algn="l" indent="0" marL="0">
+            <a:pPr marL="0" indent="0" algn="l">
               <a:buNone/>
             </a:pPr>
             <a:r>
@@ -18548,14 +18672,14 @@
       </p:sp>
       <p:pic>
         <p:nvPicPr>
-          <p:cNvPr id="3" name="02_serie_diaria" descr="/home/claude/case/reports/figures/slides/02_serie_diaria.png">    </p:cNvPr>
+          <p:cNvPr id="3" name="02_serie_diaria" descr="/home/claude/case/reports/figures/slides/02_serie_diaria.png"/>
           <p:cNvPicPr>
             <a:picLocks noChangeAspect="1"/>
           </p:cNvPicPr>
           <p:nvPr/>
         </p:nvPicPr>
         <p:blipFill>
-          <a:blip r:embed="rId1"/>
+          <a:blip r:embed="rId3"/>
           <a:stretch>
             <a:fillRect/>
           </a:stretch>
@@ -18591,7 +18715,7 @@
           <a:bodyPr wrap="square" lIns="0" tIns="0" rIns="0" bIns="0" rtlCol="0" anchor="t"/>
           <a:lstStyle/>
           <a:p>
-            <a:pPr indent="0" marL="0">
+            <a:pPr marL="0" indent="0">
               <a:buNone/>
             </a:pPr>
             <a:r>
@@ -18626,7 +18750,7 @@
           </a:prstGeom>
           <a:extLst>
             <a:ext uri="{C572A759-6A51-4108-AA02-DFA0A04FC94B}">
-              <ma14:wrappingTextBoxFlag xmlns:ma14="http://schemas.microsoft.com/office/mac/drawingml/2011/main" val="0"/>
+              <ma14:wrappingTextBoxFlag xmlns="" xmlns:ma14="http://schemas.microsoft.com/office/mac/drawingml/2011/main" val="0"/>
             </a:ext>
           </a:extLst>
         </p:spPr>
@@ -18644,7 +18768,7 @@
           <a:p>
             <a:pPr algn="r"/>
             <a:fld id="{F7021451-1387-4CA6-816F-3879F97B5CBC}" type="slidenum">
-              <a:rPr b="0" lang="en-US"/>
+              <a:rPr lang="en-US" b="0"/>
               <a:t>7</a:t>
             </a:fld>
             <a:endParaRPr lang="en-US"/>
@@ -18679,9 +18803,11 @@
       <p:sp>
         <p:nvSpPr>
           <p:cNvPr id="2" name="Text 0"/>
-          <p:cNvSpPr/>
+          <p:cNvSpPr>
+            <a:spLocks noGrp="1"/>
+          </p:cNvSpPr>
           <p:nvPr>
-            <p:ph idx="100" type="title" hasCustomPrompt="1"/>
+            <p:ph type="title" idx="100" hasCustomPrompt="1"/>
           </p:nvPr>
         </p:nvSpPr>
         <p:spPr>
@@ -18699,7 +18825,7 @@
           <a:bodyPr wrap="square" lIns="0" tIns="0" rIns="0" bIns="0" rtlCol="0" anchor="ctr"/>
           <a:lstStyle/>
           <a:p>
-            <a:pPr algn="l" indent="0" marL="0">
+            <a:pPr marL="0" indent="0" algn="l">
               <a:buNone/>
             </a:pPr>
             <a:r>
@@ -18757,7 +18883,7 @@
           <a:bodyPr wrap="square" lIns="0" tIns="0" rIns="0" bIns="0" rtlCol="0" anchor="ctr"/>
           <a:lstStyle/>
           <a:p>
-            <a:pPr indent="0" marL="0">
+            <a:pPr marL="0" indent="0">
               <a:buNone/>
             </a:pPr>
             <a:r>
@@ -18793,7 +18919,7 @@
           <a:bodyPr wrap="square" lIns="0" tIns="0" rIns="0" bIns="0" rtlCol="0" anchor="ctr"/>
           <a:lstStyle/>
           <a:p>
-            <a:pPr indent="0" marL="0">
+            <a:pPr marL="0" indent="0">
               <a:buNone/>
             </a:pPr>
             <a:r>
@@ -18851,7 +18977,7 @@
           <a:bodyPr wrap="square" lIns="0" tIns="0" rIns="0" bIns="0" rtlCol="0" anchor="ctr"/>
           <a:lstStyle/>
           <a:p>
-            <a:pPr indent="0" marL="0">
+            <a:pPr marL="0" indent="0">
               <a:buNone/>
             </a:pPr>
             <a:r>
@@ -18887,7 +19013,7 @@
           <a:bodyPr wrap="square" lIns="0" tIns="0" rIns="0" bIns="0" rtlCol="0" anchor="ctr"/>
           <a:lstStyle/>
           <a:p>
-            <a:pPr indent="0" marL="0">
+            <a:pPr marL="0" indent="0">
               <a:buNone/>
             </a:pPr>
             <a:r>
@@ -18945,7 +19071,7 @@
           <a:bodyPr wrap="square" lIns="0" tIns="0" rIns="0" bIns="0" rtlCol="0" anchor="ctr"/>
           <a:lstStyle/>
           <a:p>
-            <a:pPr indent="0" marL="0">
+            <a:pPr marL="0" indent="0">
               <a:buNone/>
             </a:pPr>
             <a:r>
@@ -18981,7 +19107,7 @@
           <a:bodyPr wrap="square" lIns="0" tIns="0" rIns="0" bIns="0" rtlCol="0" anchor="ctr"/>
           <a:lstStyle/>
           <a:p>
-            <a:pPr indent="0" marL="0">
+            <a:pPr marL="0" indent="0">
               <a:buNone/>
             </a:pPr>
             <a:r>
@@ -18998,14 +19124,14 @@
       </p:sp>
       <p:pic>
         <p:nvPicPr>
-          <p:cNvPr id="12" name="02_preco_desconto" descr="/home/claude/case/reports/figures/slides/02_preco_desconto.png">    </p:cNvPr>
+          <p:cNvPr id="12" name="02_preco_desconto" descr="/home/claude/case/reports/figures/slides/02_preco_desconto.png"/>
           <p:cNvPicPr>
             <a:picLocks noChangeAspect="1"/>
           </p:cNvPicPr>
           <p:nvPr/>
         </p:nvPicPr>
         <p:blipFill>
-          <a:blip r:embed="rId1"/>
+          <a:blip r:embed="rId3"/>
           <a:stretch>
             <a:fillRect/>
           </a:stretch>
@@ -19041,7 +19167,7 @@
           <a:bodyPr wrap="square" lIns="0" tIns="0" rIns="0" bIns="0" rtlCol="0" anchor="t"/>
           <a:lstStyle/>
           <a:p>
-            <a:pPr indent="0" marL="0">
+            <a:pPr marL="0" indent="0">
               <a:buNone/>
             </a:pPr>
             <a:r>
@@ -19076,7 +19202,7 @@
           </a:prstGeom>
           <a:extLst>
             <a:ext uri="{C572A759-6A51-4108-AA02-DFA0A04FC94B}">
-              <ma14:wrappingTextBoxFlag xmlns:ma14="http://schemas.microsoft.com/office/mac/drawingml/2011/main" val="0"/>
+              <ma14:wrappingTextBoxFlag xmlns="" xmlns:ma14="http://schemas.microsoft.com/office/mac/drawingml/2011/main" val="0"/>
             </a:ext>
           </a:extLst>
         </p:spPr>
@@ -19094,7 +19220,7 @@
           <a:p>
             <a:pPr algn="r"/>
             <a:fld id="{F7021451-1387-4CA6-816F-3879F97B5CBC}" type="slidenum">
-              <a:rPr b="0" lang="en-US"/>
+              <a:rPr lang="en-US" b="0"/>
               <a:t>8</a:t>
             </a:fld>
             <a:endParaRPr lang="en-US"/>
@@ -19129,9 +19255,11 @@
       <p:sp>
         <p:nvSpPr>
           <p:cNvPr id="2" name="Text 0"/>
-          <p:cNvSpPr/>
+          <p:cNvSpPr>
+            <a:spLocks noGrp="1"/>
+          </p:cNvSpPr>
           <p:nvPr>
-            <p:ph idx="100" type="title" hasCustomPrompt="1"/>
+            <p:ph type="title" idx="100" hasCustomPrompt="1"/>
           </p:nvPr>
         </p:nvSpPr>
         <p:spPr>
@@ -19149,7 +19277,7 @@
           <a:bodyPr wrap="square" lIns="0" tIns="0" rIns="0" bIns="0" rtlCol="0" anchor="ctr"/>
           <a:lstStyle/>
           <a:p>
-            <a:pPr algn="l" indent="0" marL="0">
+            <a:pPr marL="0" indent="0" algn="l">
               <a:buNone/>
             </a:pPr>
             <a:r>
@@ -19166,14 +19294,14 @@
       </p:sp>
       <p:pic>
         <p:nvPicPr>
-          <p:cNvPr id="3" name="02_desconto_volume" descr="/home/claude/case/reports/figures/slides/02_desconto_volume.png">    </p:cNvPr>
+          <p:cNvPr id="3" name="02_desconto_volume" descr="/home/claude/case/reports/figures/slides/02_desconto_volume.png"/>
           <p:cNvPicPr>
             <a:picLocks noChangeAspect="1"/>
           </p:cNvPicPr>
           <p:nvPr/>
         </p:nvPicPr>
         <p:blipFill>
-          <a:blip r:embed="rId1"/>
+          <a:blip r:embed="rId3"/>
           <a:stretch>
             <a:fillRect/>
           </a:stretch>
@@ -19204,17 +19332,41 @@
         </p:nvGraphicFramePr>
         <p:xfrm>
           <a:off x="6858000" y="1600200"/>
-          <a:ext cx="4754880" cy="914400"/>
+          <a:ext cx="4754880" cy="2346960"/>
         </p:xfrm>
         <a:graphic>
           <a:graphicData uri="http://schemas.openxmlformats.org/drawingml/2006/table">
             <a:tbl>
               <a:tblPr/>
               <a:tblGrid>
-                <a:gridCol w="1463040"/>
-                <a:gridCol w="1097280"/>
-                <a:gridCol w="1280160"/>
-                <a:gridCol w="914400"/>
+                <a:gridCol w="1463040">
+                  <a:extLst>
+                    <a:ext uri="{9D8B030D-6E8A-4147-A177-3AD203B41FA5}">
+                      <a16:colId xmlns:a16="http://schemas.microsoft.com/office/drawing/2014/main" val="20000"/>
+                    </a:ext>
+                  </a:extLst>
+                </a:gridCol>
+                <a:gridCol w="1097280">
+                  <a:extLst>
+                    <a:ext uri="{9D8B030D-6E8A-4147-A177-3AD203B41FA5}">
+                      <a16:colId xmlns:a16="http://schemas.microsoft.com/office/drawing/2014/main" val="20001"/>
+                    </a:ext>
+                  </a:extLst>
+                </a:gridCol>
+                <a:gridCol w="1280160">
+                  <a:extLst>
+                    <a:ext uri="{9D8B030D-6E8A-4147-A177-3AD203B41FA5}">
+                      <a16:colId xmlns:a16="http://schemas.microsoft.com/office/drawing/2014/main" val="20002"/>
+                    </a:ext>
+                  </a:extLst>
+                </a:gridCol>
+                <a:gridCol w="914400">
+                  <a:extLst>
+                    <a:ext uri="{9D8B030D-6E8A-4147-A177-3AD203B41FA5}">
+                      <a16:colId xmlns:a16="http://schemas.microsoft.com/office/drawing/2014/main" val="20003"/>
+                    </a:ext>
+                  </a:extLst>
+                </a:gridCol>
               </a:tblGrid>
               <a:tr h="457200">
                 <a:tc>
@@ -19222,13 +19374,13 @@
                     <a:bodyPr/>
                     <a:lstStyle/>
                     <a:p>
-                      <a:pPr indent="0" marL="0">
+                      <a:pPr marL="0" indent="0">
                         <a:buNone/>
                       </a:pPr>
                       <a:endParaRPr lang="en-US" sz="1400" dirty="0"/>
                     </a:p>
                   </a:txBody>
-                  <a:tcPr marL="91440" marR="91440" marT="45720" marB="45720" anchor="ctr">
+                  <a:tcPr anchor="ctr">
                     <a:lnL w="0" cap="flat" cmpd="sng" algn="ctr">
                       <a:noFill/>
                     </a:lnL>
@@ -19251,7 +19403,7 @@
                     <a:bodyPr/>
                     <a:lstStyle/>
                     <a:p>
-                      <a:pPr indent="0" marL="0">
+                      <a:pPr marL="0" indent="0">
                         <a:buNone/>
                       </a:pPr>
                       <a:r>
@@ -19265,7 +19417,7 @@
                       <a:endParaRPr lang="en-US" sz="1400" dirty="0"/>
                     </a:p>
                   </a:txBody>
-                  <a:tcPr marL="91440" marR="91440" marT="45720" marB="45720" anchor="ctr">
+                  <a:tcPr anchor="ctr">
                     <a:lnL w="0" cap="flat" cmpd="sng" algn="ctr">
                       <a:noFill/>
                     </a:lnL>
@@ -19288,7 +19440,7 @@
                     <a:bodyPr/>
                     <a:lstStyle/>
                     <a:p>
-                      <a:pPr indent="0" marL="0">
+                      <a:pPr marL="0" indent="0">
                         <a:buNone/>
                       </a:pPr>
                       <a:r>
@@ -19302,7 +19454,7 @@
                       <a:endParaRPr lang="en-US" sz="1400" dirty="0"/>
                     </a:p>
                   </a:txBody>
-                  <a:tcPr marL="91440" marR="91440" marT="45720" marB="45720" anchor="ctr">
+                  <a:tcPr anchor="ctr">
                     <a:lnL w="0" cap="flat" cmpd="sng" algn="ctr">
                       <a:noFill/>
                     </a:lnL>
@@ -19325,7 +19477,7 @@
                     <a:bodyPr/>
                     <a:lstStyle/>
                     <a:p>
-                      <a:pPr indent="0" marL="0">
+                      <a:pPr marL="0" indent="0">
                         <a:buNone/>
                       </a:pPr>
                       <a:r>
@@ -19339,7 +19491,7 @@
                       <a:endParaRPr lang="en-US" sz="1400" dirty="0"/>
                     </a:p>
                   </a:txBody>
-                  <a:tcPr marL="91440" marR="91440" marT="45720" marB="45720" anchor="ctr">
+                  <a:tcPr anchor="ctr">
                     <a:lnL w="0" cap="flat" cmpd="sng" algn="ctr">
                       <a:noFill/>
                     </a:lnL>
@@ -19357,6 +19509,11 @@
                     </a:solidFill>
                   </a:tcPr>
                 </a:tc>
+                <a:extLst>
+                  <a:ext uri="{0D108BD9-81ED-4DB2-BD59-A6C34878D82A}">
+                    <a16:rowId xmlns:a16="http://schemas.microsoft.com/office/drawing/2014/main" val="10000"/>
+                  </a:ext>
+                </a:extLst>
               </a:tr>
               <a:tr h="457200">
                 <a:tc>
@@ -19364,7 +19521,7 @@
                     <a:bodyPr/>
                     <a:lstStyle/>
                     <a:p>
-                      <a:pPr indent="0" marL="0">
+                      <a:pPr marL="0" indent="0">
                         <a:buNone/>
                       </a:pPr>
                       <a:r>
@@ -19378,7 +19535,7 @@
                       <a:endParaRPr lang="en-US" sz="1400" dirty="0"/>
                     </a:p>
                   </a:txBody>
-                  <a:tcPr marL="91440" marR="91440" marT="45720" marB="45720" anchor="ctr">
+                  <a:tcPr anchor="ctr">
                     <a:lnL w="0" cap="flat" cmpd="sng" algn="ctr">
                       <a:noFill/>
                     </a:lnL>
@@ -19401,7 +19558,7 @@
                     <a:bodyPr/>
                     <a:lstStyle/>
                     <a:p>
-                      <a:pPr indent="0" marL="0">
+                      <a:pPr marL="0" indent="0">
                         <a:buNone/>
                       </a:pPr>
                       <a:r>
@@ -19415,7 +19572,7 @@
                       <a:endParaRPr lang="en-US" sz="1400" dirty="0"/>
                     </a:p>
                   </a:txBody>
-                  <a:tcPr marL="91440" marR="91440" marT="45720" marB="45720" anchor="ctr">
+                  <a:tcPr anchor="ctr">
                     <a:lnL w="0" cap="flat" cmpd="sng" algn="ctr">
                       <a:noFill/>
                     </a:lnL>
@@ -19438,7 +19595,7 @@
                     <a:bodyPr/>
                     <a:lstStyle/>
                     <a:p>
-                      <a:pPr indent="0" marL="0">
+                      <a:pPr marL="0" indent="0">
                         <a:buNone/>
                       </a:pPr>
                       <a:r>
@@ -19452,7 +19609,7 @@
                       <a:endParaRPr lang="en-US" sz="1400" dirty="0"/>
                     </a:p>
                   </a:txBody>
-                  <a:tcPr marL="91440" marR="91440" marT="45720" marB="45720" anchor="ctr">
+                  <a:tcPr anchor="ctr">
                     <a:lnL w="0" cap="flat" cmpd="sng" algn="ctr">
                       <a:noFill/>
                     </a:lnL>
@@ -19475,7 +19632,7 @@
                     <a:bodyPr/>
                     <a:lstStyle/>
                     <a:p>
-                      <a:pPr indent="0" marL="0">
+                      <a:pPr marL="0" indent="0">
                         <a:buNone/>
                       </a:pPr>
                       <a:r>
@@ -19489,7 +19646,7 @@
                       <a:endParaRPr lang="en-US" sz="1400" dirty="0"/>
                     </a:p>
                   </a:txBody>
-                  <a:tcPr marL="91440" marR="91440" marT="45720" marB="45720" anchor="ctr">
+                  <a:tcPr anchor="ctr">
                     <a:lnL w="0" cap="flat" cmpd="sng" algn="ctr">
                       <a:noFill/>
                     </a:lnL>
@@ -19507,6 +19664,11 @@
                     </a:solidFill>
                   </a:tcPr>
                 </a:tc>
+                <a:extLst>
+                  <a:ext uri="{0D108BD9-81ED-4DB2-BD59-A6C34878D82A}">
+                    <a16:rowId xmlns:a16="http://schemas.microsoft.com/office/drawing/2014/main" val="10001"/>
+                  </a:ext>
+                </a:extLst>
               </a:tr>
               <a:tr h="457200">
                 <a:tc>
@@ -19514,7 +19676,7 @@
                     <a:bodyPr/>
                     <a:lstStyle/>
                     <a:p>
-                      <a:pPr indent="0" marL="0">
+                      <a:pPr marL="0" indent="0">
                         <a:buNone/>
                       </a:pPr>
                       <a:r>
@@ -19528,7 +19690,7 @@
                       <a:endParaRPr lang="en-US" sz="1400" dirty="0"/>
                     </a:p>
                   </a:txBody>
-                  <a:tcPr marL="91440" marR="91440" marT="45720" marB="45720" anchor="ctr">
+                  <a:tcPr anchor="ctr">
                     <a:lnL w="0" cap="flat" cmpd="sng" algn="ctr">
                       <a:noFill/>
                     </a:lnL>
@@ -19551,7 +19713,7 @@
                     <a:bodyPr/>
                     <a:lstStyle/>
                     <a:p>
-                      <a:pPr indent="0" marL="0">
+                      <a:pPr marL="0" indent="0">
                         <a:buNone/>
                       </a:pPr>
                       <a:r>
@@ -19565,7 +19727,7 @@
                       <a:endParaRPr lang="en-US" sz="1400" dirty="0"/>
                     </a:p>
                   </a:txBody>
-                  <a:tcPr marL="91440" marR="91440" marT="45720" marB="45720" anchor="ctr">
+                  <a:tcPr anchor="ctr">
                     <a:lnL w="0" cap="flat" cmpd="sng" algn="ctr">
                       <a:noFill/>
                     </a:lnL>
@@ -19588,7 +19750,7 @@
                     <a:bodyPr/>
                     <a:lstStyle/>
                     <a:p>
-                      <a:pPr indent="0" marL="0">
+                      <a:pPr marL="0" indent="0">
                         <a:buNone/>
                       </a:pPr>
                       <a:r>
@@ -19602,7 +19764,7 @@
                       <a:endParaRPr lang="en-US" sz="1400" dirty="0"/>
                     </a:p>
                   </a:txBody>
-                  <a:tcPr marL="91440" marR="91440" marT="45720" marB="45720" anchor="ctr">
+                  <a:tcPr anchor="ctr">
                     <a:lnL w="0" cap="flat" cmpd="sng" algn="ctr">
                       <a:noFill/>
                     </a:lnL>
@@ -19625,7 +19787,7 @@
                     <a:bodyPr/>
                     <a:lstStyle/>
                     <a:p>
-                      <a:pPr indent="0" marL="0">
+                      <a:pPr marL="0" indent="0">
                         <a:buNone/>
                       </a:pPr>
                       <a:r>
@@ -19639,7 +19801,7 @@
                       <a:endParaRPr lang="en-US" sz="1400" dirty="0"/>
                     </a:p>
                   </a:txBody>
-                  <a:tcPr marL="91440" marR="91440" marT="45720" marB="45720" anchor="ctr">
+                  <a:tcPr anchor="ctr">
                     <a:lnL w="0" cap="flat" cmpd="sng" algn="ctr">
                       <a:noFill/>
                     </a:lnL>
@@ -19657,6 +19819,11 @@
                     </a:solidFill>
                   </a:tcPr>
                 </a:tc>
+                <a:extLst>
+                  <a:ext uri="{0D108BD9-81ED-4DB2-BD59-A6C34878D82A}">
+                    <a16:rowId xmlns:a16="http://schemas.microsoft.com/office/drawing/2014/main" val="10002"/>
+                  </a:ext>
+                </a:extLst>
               </a:tr>
               <a:tr h="457200">
                 <a:tc>
@@ -19664,7 +19831,7 @@
                     <a:bodyPr/>
                     <a:lstStyle/>
                     <a:p>
-                      <a:pPr indent="0" marL="0">
+                      <a:pPr marL="0" indent="0">
                         <a:buNone/>
                       </a:pPr>
                       <a:r>
@@ -19678,7 +19845,7 @@
                       <a:endParaRPr lang="en-US" sz="1400" dirty="0"/>
                     </a:p>
                   </a:txBody>
-                  <a:tcPr marL="91440" marR="91440" marT="45720" marB="45720" anchor="ctr">
+                  <a:tcPr anchor="ctr">
                     <a:lnL w="0" cap="flat" cmpd="sng" algn="ctr">
                       <a:noFill/>
                     </a:lnL>
@@ -19701,7 +19868,7 @@
                     <a:bodyPr/>
                     <a:lstStyle/>
                     <a:p>
-                      <a:pPr indent="0" marL="0">
+                      <a:pPr marL="0" indent="0">
                         <a:buNone/>
                       </a:pPr>
                       <a:r>
@@ -19715,7 +19882,7 @@
                       <a:endParaRPr lang="en-US" sz="1400" dirty="0"/>
                     </a:p>
                   </a:txBody>
-                  <a:tcPr marL="91440" marR="91440" marT="45720" marB="45720" anchor="ctr">
+                  <a:tcPr anchor="ctr">
                     <a:lnL w="0" cap="flat" cmpd="sng" algn="ctr">
                       <a:noFill/>
                     </a:lnL>
@@ -19738,7 +19905,7 @@
                     <a:bodyPr/>
                     <a:lstStyle/>
                     <a:p>
-                      <a:pPr indent="0" marL="0">
+                      <a:pPr marL="0" indent="0">
                         <a:buNone/>
                       </a:pPr>
                       <a:r>
@@ -19752,7 +19919,7 @@
                       <a:endParaRPr lang="en-US" sz="1400" dirty="0"/>
                     </a:p>
                   </a:txBody>
-                  <a:tcPr marL="91440" marR="91440" marT="45720" marB="45720" anchor="ctr">
+                  <a:tcPr anchor="ctr">
                     <a:lnL w="0" cap="flat" cmpd="sng" algn="ctr">
                       <a:noFill/>
                     </a:lnL>
@@ -19775,7 +19942,7 @@
                     <a:bodyPr/>
                     <a:lstStyle/>
                     <a:p>
-                      <a:pPr indent="0" marL="0">
+                      <a:pPr marL="0" indent="0">
                         <a:buNone/>
                       </a:pPr>
                       <a:r>
@@ -19789,7 +19956,7 @@
                       <a:endParaRPr lang="en-US" sz="1400" dirty="0"/>
                     </a:p>
                   </a:txBody>
-                  <a:tcPr marL="91440" marR="91440" marT="45720" marB="45720" anchor="ctr">
+                  <a:tcPr anchor="ctr">
                     <a:lnL w="0" cap="flat" cmpd="sng" algn="ctr">
                       <a:noFill/>
                     </a:lnL>
@@ -19807,6 +19974,11 @@
                     </a:solidFill>
                   </a:tcPr>
                 </a:tc>
+                <a:extLst>
+                  <a:ext uri="{0D108BD9-81ED-4DB2-BD59-A6C34878D82A}">
+                    <a16:rowId xmlns:a16="http://schemas.microsoft.com/office/drawing/2014/main" val="10003"/>
+                  </a:ext>
+                </a:extLst>
               </a:tr>
               <a:tr h="457200">
                 <a:tc>
@@ -19814,7 +19986,7 @@
                     <a:bodyPr/>
                     <a:lstStyle/>
                     <a:p>
-                      <a:pPr indent="0" marL="0">
+                      <a:pPr marL="0" indent="0">
                         <a:buNone/>
                       </a:pPr>
                       <a:r>
@@ -19828,7 +20000,7 @@
                       <a:endParaRPr lang="en-US" sz="1400" dirty="0"/>
                     </a:p>
                   </a:txBody>
-                  <a:tcPr marL="91440" marR="91440" marT="45720" marB="45720" anchor="ctr">
+                  <a:tcPr anchor="ctr">
                     <a:lnL w="0" cap="flat" cmpd="sng" algn="ctr">
                       <a:noFill/>
                     </a:lnL>
@@ -19851,7 +20023,7 @@
                     <a:bodyPr/>
                     <a:lstStyle/>
                     <a:p>
-                      <a:pPr indent="0" marL="0">
+                      <a:pPr marL="0" indent="0">
                         <a:buNone/>
                       </a:pPr>
                       <a:r>
@@ -19865,7 +20037,7 @@
                       <a:endParaRPr lang="en-US" sz="1400" dirty="0"/>
                     </a:p>
                   </a:txBody>
-                  <a:tcPr marL="91440" marR="91440" marT="45720" marB="45720" anchor="ctr">
+                  <a:tcPr anchor="ctr">
                     <a:lnL w="0" cap="flat" cmpd="sng" algn="ctr">
                       <a:noFill/>
                     </a:lnL>
@@ -19888,7 +20060,7 @@
                     <a:bodyPr/>
                     <a:lstStyle/>
                     <a:p>
-                      <a:pPr indent="0" marL="0">
+                      <a:pPr marL="0" indent="0">
                         <a:buNone/>
                       </a:pPr>
                       <a:r>
@@ -19902,7 +20074,7 @@
                       <a:endParaRPr lang="en-US" sz="1400" dirty="0"/>
                     </a:p>
                   </a:txBody>
-                  <a:tcPr marL="91440" marR="91440" marT="45720" marB="45720" anchor="ctr">
+                  <a:tcPr anchor="ctr">
                     <a:lnL w="0" cap="flat" cmpd="sng" algn="ctr">
                       <a:noFill/>
                     </a:lnL>
@@ -19925,7 +20097,7 @@
                     <a:bodyPr/>
                     <a:lstStyle/>
                     <a:p>
-                      <a:pPr indent="0" marL="0">
+                      <a:pPr marL="0" indent="0">
                         <a:buNone/>
                       </a:pPr>
                       <a:r>
@@ -19939,7 +20111,7 @@
                       <a:endParaRPr lang="en-US" sz="1400" dirty="0"/>
                     </a:p>
                   </a:txBody>
-                  <a:tcPr marL="91440" marR="91440" marT="45720" marB="45720" anchor="ctr">
+                  <a:tcPr anchor="ctr">
                     <a:lnL w="0" cap="flat" cmpd="sng" algn="ctr">
                       <a:noFill/>
                     </a:lnL>
@@ -19957,6 +20129,11 @@
                     </a:solidFill>
                   </a:tcPr>
                 </a:tc>
+                <a:extLst>
+                  <a:ext uri="{0D108BD9-81ED-4DB2-BD59-A6C34878D82A}">
+                    <a16:rowId xmlns:a16="http://schemas.microsoft.com/office/drawing/2014/main" val="10004"/>
+                  </a:ext>
+                </a:extLst>
               </a:tr>
             </a:tbl>
           </a:graphicData>
@@ -19983,7 +20160,7 @@
           <a:bodyPr wrap="square" lIns="0" tIns="0" rIns="0" bIns="0" rtlCol="0" anchor="t"/>
           <a:lstStyle/>
           <a:p>
-            <a:pPr indent="0" marL="0">
+            <a:pPr marL="0" indent="0">
               <a:buNone/>
             </a:pPr>
             <a:r>
@@ -20018,7 +20195,7 @@
           </a:prstGeom>
           <a:extLst>
             <a:ext uri="{C572A759-6A51-4108-AA02-DFA0A04FC94B}">
-              <ma14:wrappingTextBoxFlag xmlns:ma14="http://schemas.microsoft.com/office/mac/drawingml/2011/main" val="0"/>
+              <ma14:wrappingTextBoxFlag xmlns="" xmlns:ma14="http://schemas.microsoft.com/office/mac/drawingml/2011/main" val="0"/>
             </a:ext>
           </a:extLst>
         </p:spPr>
@@ -20036,7 +20213,7 @@
           <a:p>
             <a:pPr algn="r"/>
             <a:fld id="{F7021451-1387-4CA6-816F-3879F97B5CBC}" type="slidenum">
-              <a:rPr b="0" lang="en-US"/>
+              <a:rPr lang="en-US" b="0"/>
               <a:t>9</a:t>
             </a:fld>
             <a:endParaRPr lang="en-US"/>
@@ -20344,4 +20521,265 @@
     </a:ext>
   </a:extLst>
 </a:theme>
+</file>
+
+<file path=ppt/theme/theme2.xml><?xml version="1.0" encoding="utf-8"?>
+<a:theme xmlns:a="http://schemas.openxmlformats.org/drawingml/2006/main" name="Tema do Office">
+  <a:themeElements>
+    <a:clrScheme name="Office">
+      <a:dk1>
+        <a:sysClr val="windowText" lastClr="000000"/>
+      </a:dk1>
+      <a:lt1>
+        <a:sysClr val="window" lastClr="FFFFFF"/>
+      </a:lt1>
+      <a:dk2>
+        <a:srgbClr val="44546A"/>
+      </a:dk2>
+      <a:lt2>
+        <a:srgbClr val="E7E6E6"/>
+      </a:lt2>
+      <a:accent1>
+        <a:srgbClr val="5B9BD5"/>
+      </a:accent1>
+      <a:accent2>
+        <a:srgbClr val="ED7D31"/>
+      </a:accent2>
+      <a:accent3>
+        <a:srgbClr val="A5A5A5"/>
+      </a:accent3>
+      <a:accent4>
+        <a:srgbClr val="FFC000"/>
+      </a:accent4>
+      <a:accent5>
+        <a:srgbClr val="4472C4"/>
+      </a:accent5>
+      <a:accent6>
+        <a:srgbClr val="70AD47"/>
+      </a:accent6>
+      <a:hlink>
+        <a:srgbClr val="0563C1"/>
+      </a:hlink>
+      <a:folHlink>
+        <a:srgbClr val="954F72"/>
+      </a:folHlink>
+    </a:clrScheme>
+    <a:fontScheme name="Office">
+      <a:majorFont>
+        <a:latin typeface="Calibri Light" panose="020F0302020204030204"/>
+        <a:ea typeface=""/>
+        <a:cs typeface=""/>
+        <a:font script="Jpan" typeface="游ゴシック Light"/>
+        <a:font script="Hang" typeface="맑은 고딕"/>
+        <a:font script="Hans" typeface="等线 Light"/>
+        <a:font script="Hant" typeface="新細明體"/>
+        <a:font script="Arab" typeface="Times New Roman"/>
+        <a:font script="Hebr" typeface="Times New Roman"/>
+        <a:font script="Thai" typeface="Angsana New"/>
+        <a:font script="Ethi" typeface="Nyala"/>
+        <a:font script="Beng" typeface="Vrinda"/>
+        <a:font script="Gujr" typeface="Shruti"/>
+        <a:font script="Khmr" typeface="MoolBoran"/>
+        <a:font script="Knda" typeface="Tunga"/>
+        <a:font script="Guru" typeface="Raavi"/>
+        <a:font script="Cans" typeface="Euphemia"/>
+        <a:font script="Cher" typeface="Plantagenet Cherokee"/>
+        <a:font script="Yiii" typeface="Microsoft Yi Baiti"/>
+        <a:font script="Tibt" typeface="Microsoft Himalaya"/>
+        <a:font script="Thaa" typeface="MV Boli"/>
+        <a:font script="Deva" typeface="Mangal"/>
+        <a:font script="Telu" typeface="Gautami"/>
+        <a:font script="Taml" typeface="Latha"/>
+        <a:font script="Syrc" typeface="Estrangelo Edessa"/>
+        <a:font script="Orya" typeface="Kalinga"/>
+        <a:font script="Mlym" typeface="Kartika"/>
+        <a:font script="Laoo" typeface="DokChampa"/>
+        <a:font script="Sinh" typeface="Iskoola Pota"/>
+        <a:font script="Mong" typeface="Mongolian Baiti"/>
+        <a:font script="Viet" typeface="Times New Roman"/>
+        <a:font script="Uigh" typeface="Microsoft Uighur"/>
+        <a:font script="Geor" typeface="Sylfaen"/>
+      </a:majorFont>
+      <a:minorFont>
+        <a:latin typeface="Calibri" panose="020F0502020204030204"/>
+        <a:ea typeface=""/>
+        <a:cs typeface=""/>
+        <a:font script="Jpan" typeface="游ゴシック"/>
+        <a:font script="Hang" typeface="맑은 고딕"/>
+        <a:font script="Hans" typeface="等线"/>
+        <a:font script="Hant" typeface="新細明體"/>
+        <a:font script="Arab" typeface="Arial"/>
+        <a:font script="Hebr" typeface="Arial"/>
+        <a:font script="Thai" typeface="Cordia New"/>
+        <a:font script="Ethi" typeface="Nyala"/>
+        <a:font script="Beng" typeface="Vrinda"/>
+        <a:font script="Gujr" typeface="Shruti"/>
+        <a:font script="Khmr" typeface="DaunPenh"/>
+        <a:font script="Knda" typeface="Tunga"/>
+        <a:font script="Guru" typeface="Raavi"/>
+        <a:font script="Cans" typeface="Euphemia"/>
+        <a:font script="Cher" typeface="Plantagenet Cherokee"/>
+        <a:font script="Yiii" typeface="Microsoft Yi Baiti"/>
+        <a:font script="Tibt" typeface="Microsoft Himalaya"/>
+        <a:font script="Thaa" typeface="MV Boli"/>
+        <a:font script="Deva" typeface="Mangal"/>
+        <a:font script="Telu" typeface="Gautami"/>
+        <a:font script="Taml" typeface="Latha"/>
+        <a:font script="Syrc" typeface="Estrangelo Edessa"/>
+        <a:font script="Orya" typeface="Kalinga"/>
+        <a:font script="Mlym" typeface="Kartika"/>
+        <a:font script="Laoo" typeface="DokChampa"/>
+        <a:font script="Sinh" typeface="Iskoola Pota"/>
+        <a:font script="Mong" typeface="Mongolian Baiti"/>
+        <a:font script="Viet" typeface="Arial"/>
+        <a:font script="Uigh" typeface="Microsoft Uighur"/>
+        <a:font script="Geor" typeface="Sylfaen"/>
+      </a:minorFont>
+    </a:fontScheme>
+    <a:fmtScheme name="Office">
+      <a:fillStyleLst>
+        <a:solidFill>
+          <a:schemeClr val="phClr"/>
+        </a:solidFill>
+        <a:gradFill rotWithShape="1">
+          <a:gsLst>
+            <a:gs pos="0">
+              <a:schemeClr val="phClr">
+                <a:lumMod val="110000"/>
+                <a:satMod val="105000"/>
+                <a:tint val="67000"/>
+              </a:schemeClr>
+            </a:gs>
+            <a:gs pos="50000">
+              <a:schemeClr val="phClr">
+                <a:lumMod val="105000"/>
+                <a:satMod val="103000"/>
+                <a:tint val="73000"/>
+              </a:schemeClr>
+            </a:gs>
+            <a:gs pos="100000">
+              <a:schemeClr val="phClr">
+                <a:lumMod val="105000"/>
+                <a:satMod val="109000"/>
+                <a:tint val="81000"/>
+              </a:schemeClr>
+            </a:gs>
+          </a:gsLst>
+          <a:lin ang="5400000" scaled="0"/>
+        </a:gradFill>
+        <a:gradFill rotWithShape="1">
+          <a:gsLst>
+            <a:gs pos="0">
+              <a:schemeClr val="phClr">
+                <a:satMod val="103000"/>
+                <a:lumMod val="102000"/>
+                <a:tint val="94000"/>
+              </a:schemeClr>
+            </a:gs>
+            <a:gs pos="50000">
+              <a:schemeClr val="phClr">
+                <a:satMod val="110000"/>
+                <a:lumMod val="100000"/>
+                <a:shade val="100000"/>
+              </a:schemeClr>
+            </a:gs>
+            <a:gs pos="100000">
+              <a:schemeClr val="phClr">
+                <a:lumMod val="99000"/>
+                <a:satMod val="120000"/>
+                <a:shade val="78000"/>
+              </a:schemeClr>
+            </a:gs>
+          </a:gsLst>
+          <a:lin ang="5400000" scaled="0"/>
+        </a:gradFill>
+      </a:fillStyleLst>
+      <a:lnStyleLst>
+        <a:ln w="6350" cap="flat" cmpd="sng" algn="ctr">
+          <a:solidFill>
+            <a:schemeClr val="phClr"/>
+          </a:solidFill>
+          <a:prstDash val="solid"/>
+          <a:miter lim="800000"/>
+        </a:ln>
+        <a:ln w="12700" cap="flat" cmpd="sng" algn="ctr">
+          <a:solidFill>
+            <a:schemeClr val="phClr"/>
+          </a:solidFill>
+          <a:prstDash val="solid"/>
+          <a:miter lim="800000"/>
+        </a:ln>
+        <a:ln w="19050" cap="flat" cmpd="sng" algn="ctr">
+          <a:solidFill>
+            <a:schemeClr val="phClr"/>
+          </a:solidFill>
+          <a:prstDash val="solid"/>
+          <a:miter lim="800000"/>
+        </a:ln>
+      </a:lnStyleLst>
+      <a:effectStyleLst>
+        <a:effectStyle>
+          <a:effectLst/>
+        </a:effectStyle>
+        <a:effectStyle>
+          <a:effectLst/>
+        </a:effectStyle>
+        <a:effectStyle>
+          <a:effectLst>
+            <a:outerShdw blurRad="57150" dist="19050" dir="5400000" algn="ctr" rotWithShape="0">
+              <a:srgbClr val="000000">
+                <a:alpha val="63000"/>
+              </a:srgbClr>
+            </a:outerShdw>
+          </a:effectLst>
+        </a:effectStyle>
+      </a:effectStyleLst>
+      <a:bgFillStyleLst>
+        <a:solidFill>
+          <a:schemeClr val="phClr"/>
+        </a:solidFill>
+        <a:solidFill>
+          <a:schemeClr val="phClr">
+            <a:tint val="95000"/>
+            <a:satMod val="170000"/>
+          </a:schemeClr>
+        </a:solidFill>
+        <a:gradFill rotWithShape="1">
+          <a:gsLst>
+            <a:gs pos="0">
+              <a:schemeClr val="phClr">
+                <a:tint val="93000"/>
+                <a:satMod val="150000"/>
+                <a:shade val="98000"/>
+                <a:lumMod val="102000"/>
+              </a:schemeClr>
+            </a:gs>
+            <a:gs pos="50000">
+              <a:schemeClr val="phClr">
+                <a:tint val="98000"/>
+                <a:satMod val="130000"/>
+                <a:shade val="90000"/>
+                <a:lumMod val="103000"/>
+              </a:schemeClr>
+            </a:gs>
+            <a:gs pos="100000">
+              <a:schemeClr val="phClr">
+                <a:shade val="63000"/>
+                <a:satMod val="120000"/>
+              </a:schemeClr>
+            </a:gs>
+          </a:gsLst>
+          <a:lin ang="5400000" scaled="0"/>
+        </a:gradFill>
+      </a:bgFillStyleLst>
+    </a:fmtScheme>
+  </a:themeElements>
+  <a:objectDefaults/>
+  <a:extraClrSchemeLst/>
+  <a:extLst>
+    <a:ext uri="{05A4C25C-085E-4340-85A3-A5531E510DB2}">
+      <thm15:themeFamily xmlns:thm15="http://schemas.microsoft.com/office/thememl/2012/main" name="Office Theme" id="{62F939B6-93AF-4DB8-9C6B-D6C7DFDC589F}" vid="{4A3C46E8-61CC-4603-A589-7422A47A8E4A}"/>
+    </a:ext>
+  </a:extLst>
+</a:theme>
 </file>